--- a/output/wordlabs-observe-3day.pptx
+++ b/output/wordlabs-observe-3day.pptx
@@ -5622,7 +5622,7 @@
                 <a:ea typeface="Trebuchet MS" pitchFamily="34" charset="-122"/>
                 <a:cs typeface="Trebuchet MS" pitchFamily="34" charset="-120"/>
               </a:rPr>
-              <a:t>1</a:t>
+              <a:t>0</a:t>
             </a:r>
             <a:pPr algn="ctr" indent="0" marL="0">
               <a:buNone/>
@@ -6040,7 +6040,7 @@
                 <a:ea typeface="Calibri" pitchFamily="34" charset="-122"/>
                 <a:cs typeface="Calibri" pitchFamily="34" charset="-120"/>
               </a:rPr>
-              <a:t>During our science lesson, we made an </a:t>
+              <a:t>The keen </a:t>
             </a:r>
             <a:pPr algn="l" indent="0" marL="0">
               <a:buNone/>
@@ -6057,7 +6057,7 @@
                 <a:ea typeface="Calibri" pitchFamily="34" charset="-122"/>
                 <a:cs typeface="Calibri" pitchFamily="34" charset="-120"/>
               </a:rPr>
-              <a:t>observation</a:t>
+              <a:t>observer</a:t>
             </a:r>
             <a:pPr algn="l" indent="0" marL="0">
               <a:buNone/>
@@ -6071,7 +6071,7 @@
                 <a:ea typeface="Calibri" pitchFamily="34" charset="-122"/>
                 <a:cs typeface="Calibri" pitchFamily="34" charset="-120"/>
               </a:rPr>
-              <a:t> about the plants, and our teacher said we were very </a:t>
+              <a:t> made an important </a:t>
             </a:r>
             <a:pPr algn="l" indent="0" marL="0">
               <a:buNone/>
@@ -6088,7 +6088,7 @@
                 <a:ea typeface="Calibri" pitchFamily="34" charset="-122"/>
                 <a:cs typeface="Calibri" pitchFamily="34" charset="-120"/>
               </a:rPr>
-              <a:t>observant</a:t>
+              <a:t>observation</a:t>
             </a:r>
             <a:pPr algn="l" indent="0" marL="0">
               <a:buNone/>
@@ -6102,7 +6102,7 @@
                 <a:ea typeface="Calibri" pitchFamily="34" charset="-122"/>
                 <a:cs typeface="Calibri" pitchFamily="34" charset="-120"/>
               </a:rPr>
-              <a:t>.</a:t>
+              <a:t> about the way the clouds were forming.</a:t>
             </a:r>
             <a:endParaRPr lang="en-US" sz="1800" dirty="0"/>
           </a:p>
@@ -6257,7 +6257,7 @@
                 <a:ea typeface="Trebuchet MS" pitchFamily="34" charset="-122"/>
                 <a:cs typeface="Trebuchet MS" pitchFamily="34" charset="-120"/>
               </a:rPr>
-              <a:t>observation</a:t>
+              <a:t>observer</a:t>
             </a:r>
             <a:endParaRPr lang="en-US" sz="1400" dirty="0"/>
           </a:p>
@@ -6385,7 +6385,7 @@
                 <a:ea typeface="Trebuchet MS" pitchFamily="34" charset="-122"/>
                 <a:cs typeface="Trebuchet MS" pitchFamily="34" charset="-120"/>
               </a:rPr>
-              <a:t>observant</a:t>
+              <a:t>observation</a:t>
             </a:r>
             <a:endParaRPr lang="en-US" sz="1400" dirty="0"/>
           </a:p>
@@ -6855,7 +6855,7 @@
                 <a:ea typeface="Trebuchet MS" pitchFamily="34" charset="-122"/>
                 <a:cs typeface="Trebuchet MS" pitchFamily="34" charset="-120"/>
               </a:rPr>
-              <a:t>observation</a:t>
+              <a:t>observer</a:t>
             </a:r>
             <a:endParaRPr lang="en-US" sz="2800" dirty="0"/>
           </a:p>
@@ -7682,7 +7682,7 @@
                 <a:ea typeface="Trebuchet MS" pitchFamily="34" charset="-122"/>
                 <a:cs typeface="Trebuchet MS" pitchFamily="34" charset="-120"/>
               </a:rPr>
-              <a:t>observation</a:t>
+              <a:t>observer</a:t>
             </a:r>
             <a:endParaRPr lang="en-US" sz="2800" dirty="0"/>
           </a:p>
@@ -7762,7 +7762,7 @@
         </p:nvSpPr>
         <p:spPr>
           <a:xfrm>
-            <a:off x="2938272" y="2258568"/>
+            <a:off x="2221992" y="2258568"/>
             <a:ext cx="1828800" cy="292608"/>
           </a:xfrm>
           <a:prstGeom prst="rect">
@@ -7796,7 +7796,7 @@
         </p:nvSpPr>
         <p:spPr>
           <a:xfrm>
-            <a:off x="2938272" y="2258568"/>
+            <a:off x="2221992" y="2258568"/>
             <a:ext cx="1828800" cy="292608"/>
           </a:xfrm>
           <a:prstGeom prst="rect">
@@ -7835,7 +7835,7 @@
         </p:nvSpPr>
         <p:spPr>
           <a:xfrm>
-            <a:off x="2938272" y="2569464"/>
+            <a:off x="2221992" y="2569464"/>
             <a:ext cx="1828800" cy="201168"/>
           </a:xfrm>
           <a:prstGeom prst="rect">
@@ -7868,52 +7868,13 @@
       </p:sp>
       <p:sp>
         <p:nvSpPr>
-          <p:cNvPr id="19" name="Text 17"/>
-          <p:cNvSpPr/>
-          <p:nvPr/>
-        </p:nvSpPr>
-        <p:spPr>
-          <a:xfrm>
-            <a:off x="2938272" y="2752344"/>
-            <a:ext cx="1828800" cy="182880"/>
-          </a:xfrm>
-          <a:prstGeom prst="rect">
-            <a:avLst/>
-          </a:prstGeom>
-          <a:noFill/>
-          <a:ln/>
-        </p:spPr>
-        <p:txBody>
-          <a:bodyPr wrap="square" lIns="0" tIns="0" rIns="0" bIns="0" rtlCol="0" anchor="t"/>
-          <a:lstStyle/>
-          <a:p>
-            <a:pPr algn="ctr" indent="0" marL="0">
-              <a:buNone/>
-            </a:pPr>
-            <a:r>
-              <a:rPr lang="en-US" sz="700" i="1" dirty="0">
-                <a:solidFill>
-                  <a:srgbClr val="94A3B8"/>
-                </a:solidFill>
-                <a:latin typeface="Calibri" pitchFamily="34" charset="0"/>
-                <a:ea typeface="Calibri" pitchFamily="34" charset="-122"/>
-                <a:cs typeface="Calibri" pitchFamily="34" charset="-120"/>
-              </a:rPr>
-              <a:t>'e' dropped before vowel suffix</a:t>
-            </a:r>
-            <a:endParaRPr lang="en-US" sz="700" dirty="0"/>
-          </a:p>
-        </p:txBody>
-      </p:sp>
-      <p:sp>
-        <p:nvSpPr>
-          <p:cNvPr id="20" name="Shape 18"/>
-          <p:cNvSpPr/>
-          <p:nvPr/>
-        </p:nvSpPr>
-        <p:spPr>
-          <a:xfrm>
-            <a:off x="5803392" y="2258568"/>
+          <p:cNvPr id="19" name="Shape 17"/>
+          <p:cNvSpPr/>
+          <p:nvPr/>
+        </p:nvSpPr>
+        <p:spPr>
+          <a:xfrm>
+            <a:off x="4370832" y="2258568"/>
             <a:ext cx="1828800" cy="292608"/>
           </a:xfrm>
           <a:prstGeom prst="rect">
@@ -7941,13 +7902,13 @@
       </p:sp>
       <p:sp>
         <p:nvSpPr>
-          <p:cNvPr id="21" name="Text 19"/>
-          <p:cNvSpPr/>
-          <p:nvPr/>
-        </p:nvSpPr>
-        <p:spPr>
-          <a:xfrm>
-            <a:off x="5803392" y="2258568"/>
+          <p:cNvPr id="20" name="Text 18"/>
+          <p:cNvSpPr/>
+          <p:nvPr/>
+        </p:nvSpPr>
+        <p:spPr>
+          <a:xfrm>
+            <a:off x="4370832" y="2258568"/>
             <a:ext cx="1828800" cy="292608"/>
           </a:xfrm>
           <a:prstGeom prst="rect">
@@ -7972,7 +7933,7 @@
                 <a:ea typeface="Trebuchet MS" pitchFamily="34" charset="-122"/>
                 <a:cs typeface="Trebuchet MS" pitchFamily="34" charset="-120"/>
               </a:rPr>
-              <a:t>ation</a:t>
+              <a:t>r</a:t>
             </a:r>
             <a:endParaRPr lang="en-US" sz="1300" dirty="0"/>
           </a:p>
@@ -7980,13 +7941,13 @@
       </p:sp>
       <p:sp>
         <p:nvSpPr>
-          <p:cNvPr id="22" name="Text 20"/>
-          <p:cNvSpPr/>
-          <p:nvPr/>
-        </p:nvSpPr>
-        <p:spPr>
-          <a:xfrm>
-            <a:off x="5803392" y="2569464"/>
+          <p:cNvPr id="21" name="Text 19"/>
+          <p:cNvSpPr/>
+          <p:nvPr/>
+        </p:nvSpPr>
+        <p:spPr>
+          <a:xfrm>
+            <a:off x="4370832" y="2569464"/>
             <a:ext cx="1828800" cy="201168"/>
           </a:xfrm>
           <a:prstGeom prst="rect">
@@ -8011,7 +7972,7 @@
                 <a:ea typeface="Calibri" pitchFamily="34" charset="-122"/>
                 <a:cs typeface="Calibri" pitchFamily="34" charset="-120"/>
               </a:rPr>
-              <a:t>the act or result of</a:t>
+              <a:t>connecting letter</a:t>
             </a:r>
             <a:endParaRPr lang="en-US" sz="850" dirty="0"/>
           </a:p>
@@ -8019,7 +7980,158 @@
       </p:sp>
       <p:sp>
         <p:nvSpPr>
+          <p:cNvPr id="22" name="Text 20"/>
+          <p:cNvSpPr/>
+          <p:nvPr/>
+        </p:nvSpPr>
+        <p:spPr>
+          <a:xfrm>
+            <a:off x="4370832" y="2752344"/>
+            <a:ext cx="1828800" cy="182880"/>
+          </a:xfrm>
+          <a:prstGeom prst="rect">
+            <a:avLst/>
+          </a:prstGeom>
+          <a:noFill/>
+          <a:ln/>
+        </p:spPr>
+        <p:txBody>
+          <a:bodyPr wrap="square" lIns="0" tIns="0" rIns="0" bIns="0" rtlCol="0" anchor="t"/>
+          <a:lstStyle/>
+          <a:p>
+            <a:pPr algn="ctr" indent="0" marL="0">
+              <a:buNone/>
+            </a:pPr>
+            <a:r>
+              <a:rPr lang="en-US" sz="700" i="1" dirty="0">
+                <a:solidFill>
+                  <a:srgbClr val="94A3B8"/>
+                </a:solidFill>
+                <a:latin typeface="Calibri" pitchFamily="34" charset="0"/>
+                <a:ea typeface="Calibri" pitchFamily="34" charset="-122"/>
+                <a:cs typeface="Calibri" pitchFamily="34" charset="-120"/>
+              </a:rPr>
+              <a:t>'e' dropped before vowel suffix</a:t>
+            </a:r>
+            <a:endParaRPr lang="en-US" sz="700" dirty="0"/>
+          </a:p>
+        </p:txBody>
+      </p:sp>
+      <p:sp>
+        <p:nvSpPr>
           <p:cNvPr id="23" name="Shape 21"/>
+          <p:cNvSpPr/>
+          <p:nvPr/>
+        </p:nvSpPr>
+        <p:spPr>
+          <a:xfrm>
+            <a:off x="6519672" y="2258568"/>
+            <a:ext cx="1828800" cy="292608"/>
+          </a:xfrm>
+          <a:prstGeom prst="rect">
+            <a:avLst>
+              <a:gd name="adj" fmla="val 25000"/>
+            </a:avLst>
+          </a:prstGeom>
+          <a:solidFill>
+            <a:srgbClr val="FCE7F3"/>
+          </a:solidFill>
+          <a:ln w="19050">
+            <a:solidFill>
+              <a:srgbClr val="DB2777"/>
+            </a:solidFill>
+            <a:prstDash val="solid"/>
+          </a:ln>
+          <a:effectLst>
+            <a:outerShdw sx="100000" sy="100000" kx="0" ky="0" algn="bl" rotWithShape="0" blurRad="101600" dist="38100" dir="8100000">
+              <a:srgbClr val="000000">
+                <a:alpha val="12000"/>
+              </a:srgbClr>
+            </a:outerShdw>
+          </a:effectLst>
+        </p:spPr>
+      </p:sp>
+      <p:sp>
+        <p:nvSpPr>
+          <p:cNvPr id="24" name="Text 22"/>
+          <p:cNvSpPr/>
+          <p:nvPr/>
+        </p:nvSpPr>
+        <p:spPr>
+          <a:xfrm>
+            <a:off x="6519672" y="2258568"/>
+            <a:ext cx="1828800" cy="292608"/>
+          </a:xfrm>
+          <a:prstGeom prst="rect">
+            <a:avLst/>
+          </a:prstGeom>
+          <a:noFill/>
+          <a:ln/>
+        </p:spPr>
+        <p:txBody>
+          <a:bodyPr wrap="square" lIns="0" tIns="0" rIns="0" bIns="0" rtlCol="0" anchor="ctr"/>
+          <a:lstStyle/>
+          <a:p>
+            <a:pPr algn="ctr" indent="0" marL="0">
+              <a:buNone/>
+            </a:pPr>
+            <a:r>
+              <a:rPr lang="en-US" sz="1300" b="1" dirty="0">
+                <a:solidFill>
+                  <a:srgbClr val="9D174D"/>
+                </a:solidFill>
+                <a:latin typeface="Trebuchet MS" pitchFamily="34" charset="0"/>
+                <a:ea typeface="Trebuchet MS" pitchFamily="34" charset="-122"/>
+                <a:cs typeface="Trebuchet MS" pitchFamily="34" charset="-120"/>
+              </a:rPr>
+              <a:t>er</a:t>
+            </a:r>
+            <a:endParaRPr lang="en-US" sz="1300" dirty="0"/>
+          </a:p>
+        </p:txBody>
+      </p:sp>
+      <p:sp>
+        <p:nvSpPr>
+          <p:cNvPr id="25" name="Text 23"/>
+          <p:cNvSpPr/>
+          <p:nvPr/>
+        </p:nvSpPr>
+        <p:spPr>
+          <a:xfrm>
+            <a:off x="6519672" y="2569464"/>
+            <a:ext cx="1828800" cy="201168"/>
+          </a:xfrm>
+          <a:prstGeom prst="rect">
+            <a:avLst/>
+          </a:prstGeom>
+          <a:noFill/>
+          <a:ln/>
+        </p:spPr>
+        <p:txBody>
+          <a:bodyPr wrap="square" lIns="0" tIns="0" rIns="0" bIns="0" rtlCol="0" anchor="t"/>
+          <a:lstStyle/>
+          <a:p>
+            <a:pPr algn="ctr" indent="0" marL="0">
+              <a:buNone/>
+            </a:pPr>
+            <a:r>
+              <a:rPr lang="en-US" sz="850" dirty="0">
+                <a:solidFill>
+                  <a:srgbClr val="475569"/>
+                </a:solidFill>
+                <a:latin typeface="Calibri" pitchFamily="34" charset="0"/>
+                <a:ea typeface="Calibri" pitchFamily="34" charset="-122"/>
+                <a:cs typeface="Calibri" pitchFamily="34" charset="-120"/>
+              </a:rPr>
+              <a:t>a person who does something</a:t>
+            </a:r>
+            <a:endParaRPr lang="en-US" sz="850" dirty="0"/>
+          </a:p>
+        </p:txBody>
+      </p:sp>
+      <p:sp>
+        <p:nvSpPr>
+          <p:cNvPr id="26" name="Shape 24"/>
           <p:cNvSpPr/>
           <p:nvPr/>
         </p:nvSpPr>
@@ -8046,7 +8158,7 @@
       </p:sp>
       <p:sp>
         <p:nvSpPr>
-          <p:cNvPr id="24" name="Text 22"/>
+          <p:cNvPr id="27" name="Text 25"/>
           <p:cNvSpPr/>
           <p:nvPr/>
         </p:nvSpPr>
@@ -8085,7 +8197,7 @@
       </p:sp>
       <p:sp>
         <p:nvSpPr>
-          <p:cNvPr id="25" name="Shape 23"/>
+          <p:cNvPr id="28" name="Shape 26"/>
           <p:cNvSpPr/>
           <p:nvPr/>
         </p:nvSpPr>
@@ -8112,7 +8224,7 @@
       </p:sp>
       <p:sp>
         <p:nvSpPr>
-          <p:cNvPr id="26" name="Text 24"/>
+          <p:cNvPr id="29" name="Text 27"/>
           <p:cNvSpPr/>
           <p:nvPr/>
         </p:nvSpPr>
@@ -8151,7 +8263,7 @@
       </p:sp>
       <p:sp>
         <p:nvSpPr>
-          <p:cNvPr id="27" name="Shape 25"/>
+          <p:cNvPr id="30" name="Shape 28"/>
           <p:cNvSpPr/>
           <p:nvPr/>
         </p:nvSpPr>
@@ -8178,7 +8290,7 @@
       </p:sp>
       <p:sp>
         <p:nvSpPr>
-          <p:cNvPr id="28" name="Text 26"/>
+          <p:cNvPr id="31" name="Text 29"/>
           <p:cNvSpPr/>
           <p:nvPr/>
         </p:nvSpPr>
@@ -8217,7 +8329,7 @@
       </p:sp>
       <p:sp>
         <p:nvSpPr>
-          <p:cNvPr id="29" name="Shape 27"/>
+          <p:cNvPr id="32" name="Shape 30"/>
           <p:cNvSpPr/>
           <p:nvPr/>
         </p:nvSpPr>
@@ -8244,7 +8356,7 @@
       </p:sp>
       <p:sp>
         <p:nvSpPr>
-          <p:cNvPr id="30" name="Text 28"/>
+          <p:cNvPr id="33" name="Text 31"/>
           <p:cNvSpPr/>
           <p:nvPr/>
         </p:nvSpPr>
@@ -8706,7 +8818,7 @@
                 <a:ea typeface="Trebuchet MS" pitchFamily="34" charset="-122"/>
                 <a:cs typeface="Trebuchet MS" pitchFamily="34" charset="-120"/>
               </a:rPr>
-              <a:t>observation</a:t>
+              <a:t>observer</a:t>
             </a:r>
             <a:endParaRPr lang="en-US" sz="2800" dirty="0"/>
           </a:p>
@@ -8786,7 +8898,7 @@
         </p:nvSpPr>
         <p:spPr>
           <a:xfrm>
-            <a:off x="2938272" y="2258568"/>
+            <a:off x="2221992" y="2258568"/>
             <a:ext cx="1828800" cy="292608"/>
           </a:xfrm>
           <a:prstGeom prst="rect">
@@ -8820,7 +8932,7 @@
         </p:nvSpPr>
         <p:spPr>
           <a:xfrm>
-            <a:off x="2938272" y="2258568"/>
+            <a:off x="2221992" y="2258568"/>
             <a:ext cx="1828800" cy="292608"/>
           </a:xfrm>
           <a:prstGeom prst="rect">
@@ -8859,7 +8971,7 @@
         </p:nvSpPr>
         <p:spPr>
           <a:xfrm>
-            <a:off x="2938272" y="2569464"/>
+            <a:off x="2221992" y="2569464"/>
             <a:ext cx="1828800" cy="201168"/>
           </a:xfrm>
           <a:prstGeom prst="rect">
@@ -8892,52 +9004,13 @@
       </p:sp>
       <p:sp>
         <p:nvSpPr>
-          <p:cNvPr id="19" name="Text 17"/>
-          <p:cNvSpPr/>
-          <p:nvPr/>
-        </p:nvSpPr>
-        <p:spPr>
-          <a:xfrm>
-            <a:off x="2938272" y="2752344"/>
-            <a:ext cx="1828800" cy="182880"/>
-          </a:xfrm>
-          <a:prstGeom prst="rect">
-            <a:avLst/>
-          </a:prstGeom>
-          <a:noFill/>
-          <a:ln/>
-        </p:spPr>
-        <p:txBody>
-          <a:bodyPr wrap="square" lIns="0" tIns="0" rIns="0" bIns="0" rtlCol="0" anchor="t"/>
-          <a:lstStyle/>
-          <a:p>
-            <a:pPr algn="ctr" indent="0" marL="0">
-              <a:buNone/>
-            </a:pPr>
-            <a:r>
-              <a:rPr lang="en-US" sz="700" i="1" dirty="0">
-                <a:solidFill>
-                  <a:srgbClr val="94A3B8"/>
-                </a:solidFill>
-                <a:latin typeface="Calibri" pitchFamily="34" charset="0"/>
-                <a:ea typeface="Calibri" pitchFamily="34" charset="-122"/>
-                <a:cs typeface="Calibri" pitchFamily="34" charset="-120"/>
-              </a:rPr>
-              <a:t>'e' dropped before vowel suffix</a:t>
-            </a:r>
-            <a:endParaRPr lang="en-US" sz="700" dirty="0"/>
-          </a:p>
-        </p:txBody>
-      </p:sp>
-      <p:sp>
-        <p:nvSpPr>
-          <p:cNvPr id="20" name="Shape 18"/>
-          <p:cNvSpPr/>
-          <p:nvPr/>
-        </p:nvSpPr>
-        <p:spPr>
-          <a:xfrm>
-            <a:off x="5803392" y="2258568"/>
+          <p:cNvPr id="19" name="Shape 17"/>
+          <p:cNvSpPr/>
+          <p:nvPr/>
+        </p:nvSpPr>
+        <p:spPr>
+          <a:xfrm>
+            <a:off x="4370832" y="2258568"/>
             <a:ext cx="1828800" cy="292608"/>
           </a:xfrm>
           <a:prstGeom prst="rect">
@@ -8965,13 +9038,13 @@
       </p:sp>
       <p:sp>
         <p:nvSpPr>
-          <p:cNvPr id="21" name="Text 19"/>
-          <p:cNvSpPr/>
-          <p:nvPr/>
-        </p:nvSpPr>
-        <p:spPr>
-          <a:xfrm>
-            <a:off x="5803392" y="2258568"/>
+          <p:cNvPr id="20" name="Text 18"/>
+          <p:cNvSpPr/>
+          <p:nvPr/>
+        </p:nvSpPr>
+        <p:spPr>
+          <a:xfrm>
+            <a:off x="4370832" y="2258568"/>
             <a:ext cx="1828800" cy="292608"/>
           </a:xfrm>
           <a:prstGeom prst="rect">
@@ -8996,7 +9069,7 @@
                 <a:ea typeface="Trebuchet MS" pitchFamily="34" charset="-122"/>
                 <a:cs typeface="Trebuchet MS" pitchFamily="34" charset="-120"/>
               </a:rPr>
-              <a:t>ation</a:t>
+              <a:t>r</a:t>
             </a:r>
             <a:endParaRPr lang="en-US" sz="1300" dirty="0"/>
           </a:p>
@@ -9004,13 +9077,13 @@
       </p:sp>
       <p:sp>
         <p:nvSpPr>
-          <p:cNvPr id="22" name="Text 20"/>
-          <p:cNvSpPr/>
-          <p:nvPr/>
-        </p:nvSpPr>
-        <p:spPr>
-          <a:xfrm>
-            <a:off x="5803392" y="2569464"/>
+          <p:cNvPr id="21" name="Text 19"/>
+          <p:cNvSpPr/>
+          <p:nvPr/>
+        </p:nvSpPr>
+        <p:spPr>
+          <a:xfrm>
+            <a:off x="4370832" y="2569464"/>
             <a:ext cx="1828800" cy="201168"/>
           </a:xfrm>
           <a:prstGeom prst="rect">
@@ -9035,7 +9108,7 @@
                 <a:ea typeface="Calibri" pitchFamily="34" charset="-122"/>
                 <a:cs typeface="Calibri" pitchFamily="34" charset="-120"/>
               </a:rPr>
-              <a:t>the act or result of</a:t>
+              <a:t>connecting letter</a:t>
             </a:r>
             <a:endParaRPr lang="en-US" sz="850" dirty="0"/>
           </a:p>
@@ -9043,7 +9116,158 @@
       </p:sp>
       <p:sp>
         <p:nvSpPr>
+          <p:cNvPr id="22" name="Text 20"/>
+          <p:cNvSpPr/>
+          <p:nvPr/>
+        </p:nvSpPr>
+        <p:spPr>
+          <a:xfrm>
+            <a:off x="4370832" y="2752344"/>
+            <a:ext cx="1828800" cy="182880"/>
+          </a:xfrm>
+          <a:prstGeom prst="rect">
+            <a:avLst/>
+          </a:prstGeom>
+          <a:noFill/>
+          <a:ln/>
+        </p:spPr>
+        <p:txBody>
+          <a:bodyPr wrap="square" lIns="0" tIns="0" rIns="0" bIns="0" rtlCol="0" anchor="t"/>
+          <a:lstStyle/>
+          <a:p>
+            <a:pPr algn="ctr" indent="0" marL="0">
+              <a:buNone/>
+            </a:pPr>
+            <a:r>
+              <a:rPr lang="en-US" sz="700" i="1" dirty="0">
+                <a:solidFill>
+                  <a:srgbClr val="94A3B8"/>
+                </a:solidFill>
+                <a:latin typeface="Calibri" pitchFamily="34" charset="0"/>
+                <a:ea typeface="Calibri" pitchFamily="34" charset="-122"/>
+                <a:cs typeface="Calibri" pitchFamily="34" charset="-120"/>
+              </a:rPr>
+              <a:t>'e' dropped before vowel suffix</a:t>
+            </a:r>
+            <a:endParaRPr lang="en-US" sz="700" dirty="0"/>
+          </a:p>
+        </p:txBody>
+      </p:sp>
+      <p:sp>
+        <p:nvSpPr>
           <p:cNvPr id="23" name="Shape 21"/>
+          <p:cNvSpPr/>
+          <p:nvPr/>
+        </p:nvSpPr>
+        <p:spPr>
+          <a:xfrm>
+            <a:off x="6519672" y="2258568"/>
+            <a:ext cx="1828800" cy="292608"/>
+          </a:xfrm>
+          <a:prstGeom prst="rect">
+            <a:avLst>
+              <a:gd name="adj" fmla="val 25000"/>
+            </a:avLst>
+          </a:prstGeom>
+          <a:solidFill>
+            <a:srgbClr val="FCE7F3"/>
+          </a:solidFill>
+          <a:ln w="19050">
+            <a:solidFill>
+              <a:srgbClr val="DB2777"/>
+            </a:solidFill>
+            <a:prstDash val="solid"/>
+          </a:ln>
+          <a:effectLst>
+            <a:outerShdw sx="100000" sy="100000" kx="0" ky="0" algn="bl" rotWithShape="0" blurRad="101600" dist="38100" dir="8100000">
+              <a:srgbClr val="000000">
+                <a:alpha val="12000"/>
+              </a:srgbClr>
+            </a:outerShdw>
+          </a:effectLst>
+        </p:spPr>
+      </p:sp>
+      <p:sp>
+        <p:nvSpPr>
+          <p:cNvPr id="24" name="Text 22"/>
+          <p:cNvSpPr/>
+          <p:nvPr/>
+        </p:nvSpPr>
+        <p:spPr>
+          <a:xfrm>
+            <a:off x="6519672" y="2258568"/>
+            <a:ext cx="1828800" cy="292608"/>
+          </a:xfrm>
+          <a:prstGeom prst="rect">
+            <a:avLst/>
+          </a:prstGeom>
+          <a:noFill/>
+          <a:ln/>
+        </p:spPr>
+        <p:txBody>
+          <a:bodyPr wrap="square" lIns="0" tIns="0" rIns="0" bIns="0" rtlCol="0" anchor="ctr"/>
+          <a:lstStyle/>
+          <a:p>
+            <a:pPr algn="ctr" indent="0" marL="0">
+              <a:buNone/>
+            </a:pPr>
+            <a:r>
+              <a:rPr lang="en-US" sz="1300" b="1" dirty="0">
+                <a:solidFill>
+                  <a:srgbClr val="9D174D"/>
+                </a:solidFill>
+                <a:latin typeface="Trebuchet MS" pitchFamily="34" charset="0"/>
+                <a:ea typeface="Trebuchet MS" pitchFamily="34" charset="-122"/>
+                <a:cs typeface="Trebuchet MS" pitchFamily="34" charset="-120"/>
+              </a:rPr>
+              <a:t>er</a:t>
+            </a:r>
+            <a:endParaRPr lang="en-US" sz="1300" dirty="0"/>
+          </a:p>
+        </p:txBody>
+      </p:sp>
+      <p:sp>
+        <p:nvSpPr>
+          <p:cNvPr id="25" name="Text 23"/>
+          <p:cNvSpPr/>
+          <p:nvPr/>
+        </p:nvSpPr>
+        <p:spPr>
+          <a:xfrm>
+            <a:off x="6519672" y="2569464"/>
+            <a:ext cx="1828800" cy="201168"/>
+          </a:xfrm>
+          <a:prstGeom prst="rect">
+            <a:avLst/>
+          </a:prstGeom>
+          <a:noFill/>
+          <a:ln/>
+        </p:spPr>
+        <p:txBody>
+          <a:bodyPr wrap="square" lIns="0" tIns="0" rIns="0" bIns="0" rtlCol="0" anchor="t"/>
+          <a:lstStyle/>
+          <a:p>
+            <a:pPr algn="ctr" indent="0" marL="0">
+              <a:buNone/>
+            </a:pPr>
+            <a:r>
+              <a:rPr lang="en-US" sz="850" dirty="0">
+                <a:solidFill>
+                  <a:srgbClr val="475569"/>
+                </a:solidFill>
+                <a:latin typeface="Calibri" pitchFamily="34" charset="0"/>
+                <a:ea typeface="Calibri" pitchFamily="34" charset="-122"/>
+                <a:cs typeface="Calibri" pitchFamily="34" charset="-120"/>
+              </a:rPr>
+              <a:t>a person who does something</a:t>
+            </a:r>
+            <a:endParaRPr lang="en-US" sz="850" dirty="0"/>
+          </a:p>
+        </p:txBody>
+      </p:sp>
+      <p:sp>
+        <p:nvSpPr>
+          <p:cNvPr id="26" name="Shape 24"/>
           <p:cNvSpPr/>
           <p:nvPr/>
         </p:nvSpPr>
@@ -9070,7 +9294,7 @@
       </p:sp>
       <p:sp>
         <p:nvSpPr>
-          <p:cNvPr id="24" name="Text 22"/>
+          <p:cNvPr id="27" name="Text 25"/>
           <p:cNvSpPr/>
           <p:nvPr/>
         </p:nvSpPr>
@@ -9109,7 +9333,7 @@
       </p:sp>
       <p:sp>
         <p:nvSpPr>
-          <p:cNvPr id="25" name="Shape 23"/>
+          <p:cNvPr id="28" name="Shape 26"/>
           <p:cNvSpPr/>
           <p:nvPr/>
         </p:nvSpPr>
@@ -9136,14 +9360,14 @@
       </p:sp>
       <p:sp>
         <p:nvSpPr>
-          <p:cNvPr id="26" name="Shape 24"/>
-          <p:cNvSpPr/>
-          <p:nvPr/>
-        </p:nvSpPr>
-        <p:spPr>
-          <a:xfrm>
-            <a:off x="1975104" y="3364992"/>
-            <a:ext cx="1554480" cy="475488"/>
+          <p:cNvPr id="29" name="Shape 27"/>
+          <p:cNvSpPr/>
+          <p:nvPr/>
+        </p:nvSpPr>
+        <p:spPr>
+          <a:xfrm>
+            <a:off x="2313432" y="3364992"/>
+            <a:ext cx="1645920" cy="475488"/>
           </a:xfrm>
           <a:prstGeom prst="rect">
             <a:avLst>
@@ -9163,14 +9387,14 @@
       </p:sp>
       <p:sp>
         <p:nvSpPr>
-          <p:cNvPr id="27" name="Text 25"/>
-          <p:cNvSpPr/>
-          <p:nvPr/>
-        </p:nvSpPr>
-        <p:spPr>
-          <a:xfrm>
-            <a:off x="1975104" y="3364992"/>
-            <a:ext cx="1554480" cy="475488"/>
+          <p:cNvPr id="30" name="Text 28"/>
+          <p:cNvSpPr/>
+          <p:nvPr/>
+        </p:nvSpPr>
+        <p:spPr>
+          <a:xfrm>
+            <a:off x="2313432" y="3364992"/>
+            <a:ext cx="1645920" cy="475488"/>
           </a:xfrm>
           <a:prstGeom prst="rect">
             <a:avLst/>
@@ -9202,14 +9426,14 @@
       </p:sp>
       <p:sp>
         <p:nvSpPr>
-          <p:cNvPr id="28" name="Text 26"/>
-          <p:cNvSpPr/>
-          <p:nvPr/>
-        </p:nvSpPr>
-        <p:spPr>
-          <a:xfrm>
-            <a:off x="3529584" y="3364992"/>
-            <a:ext cx="73152" cy="475488"/>
+          <p:cNvPr id="31" name="Text 29"/>
+          <p:cNvSpPr/>
+          <p:nvPr/>
+        </p:nvSpPr>
+        <p:spPr>
+          <a:xfrm>
+            <a:off x="3959352" y="3364992"/>
+            <a:ext cx="411480" cy="475488"/>
           </a:xfrm>
           <a:prstGeom prst="rect">
             <a:avLst/>
@@ -9241,14 +9465,14 @@
       </p:sp>
       <p:sp>
         <p:nvSpPr>
-          <p:cNvPr id="29" name="Shape 27"/>
-          <p:cNvSpPr/>
-          <p:nvPr/>
-        </p:nvSpPr>
-        <p:spPr>
-          <a:xfrm>
-            <a:off x="3602736" y="3364992"/>
-            <a:ext cx="1554480" cy="475488"/>
+          <p:cNvPr id="32" name="Shape 30"/>
+          <p:cNvSpPr/>
+          <p:nvPr/>
+        </p:nvSpPr>
+        <p:spPr>
+          <a:xfrm>
+            <a:off x="4370832" y="3364992"/>
+            <a:ext cx="1645920" cy="475488"/>
           </a:xfrm>
           <a:prstGeom prst="rect">
             <a:avLst>
@@ -9268,14 +9492,14 @@
       </p:sp>
       <p:sp>
         <p:nvSpPr>
-          <p:cNvPr id="30" name="Text 28"/>
-          <p:cNvSpPr/>
-          <p:nvPr/>
-        </p:nvSpPr>
-        <p:spPr>
-          <a:xfrm>
-            <a:off x="3602736" y="3364992"/>
-            <a:ext cx="1554480" cy="475488"/>
+          <p:cNvPr id="33" name="Text 31"/>
+          <p:cNvSpPr/>
+          <p:nvPr/>
+        </p:nvSpPr>
+        <p:spPr>
+          <a:xfrm>
+            <a:off x="4370832" y="3364992"/>
+            <a:ext cx="1645920" cy="475488"/>
           </a:xfrm>
           <a:prstGeom prst="rect">
             <a:avLst/>
@@ -9307,14 +9531,14 @@
       </p:sp>
       <p:sp>
         <p:nvSpPr>
-          <p:cNvPr id="31" name="Text 29"/>
-          <p:cNvSpPr/>
-          <p:nvPr/>
-        </p:nvSpPr>
-        <p:spPr>
-          <a:xfrm>
-            <a:off x="5157216" y="3364992"/>
-            <a:ext cx="73152" cy="475488"/>
+          <p:cNvPr id="34" name="Text 32"/>
+          <p:cNvSpPr/>
+          <p:nvPr/>
+        </p:nvSpPr>
+        <p:spPr>
+          <a:xfrm>
+            <a:off x="6016752" y="3364992"/>
+            <a:ext cx="411480" cy="475488"/>
           </a:xfrm>
           <a:prstGeom prst="rect">
             <a:avLst/>
@@ -9346,14 +9570,14 @@
       </p:sp>
       <p:sp>
         <p:nvSpPr>
-          <p:cNvPr id="32" name="Shape 30"/>
-          <p:cNvSpPr/>
-          <p:nvPr/>
-        </p:nvSpPr>
-        <p:spPr>
-          <a:xfrm>
-            <a:off x="5230368" y="3364992"/>
-            <a:ext cx="1554480" cy="475488"/>
+          <p:cNvPr id="35" name="Shape 33"/>
+          <p:cNvSpPr/>
+          <p:nvPr/>
+        </p:nvSpPr>
+        <p:spPr>
+          <a:xfrm>
+            <a:off x="6428232" y="3364992"/>
+            <a:ext cx="1645920" cy="475488"/>
           </a:xfrm>
           <a:prstGeom prst="rect">
             <a:avLst>
@@ -9373,14 +9597,14 @@
       </p:sp>
       <p:sp>
         <p:nvSpPr>
-          <p:cNvPr id="33" name="Text 31"/>
-          <p:cNvSpPr/>
-          <p:nvPr/>
-        </p:nvSpPr>
-        <p:spPr>
-          <a:xfrm>
-            <a:off x="5230368" y="3364992"/>
-            <a:ext cx="1554480" cy="475488"/>
+          <p:cNvPr id="36" name="Text 34"/>
+          <p:cNvSpPr/>
+          <p:nvPr/>
+        </p:nvSpPr>
+        <p:spPr>
+          <a:xfrm>
+            <a:off x="6428232" y="3364992"/>
+            <a:ext cx="1645920" cy="475488"/>
           </a:xfrm>
           <a:prstGeom prst="rect">
             <a:avLst/>
@@ -9404,112 +9628,7 @@
                 <a:ea typeface="Trebuchet MS" pitchFamily="34" charset="-122"/>
                 <a:cs typeface="Trebuchet MS" pitchFamily="34" charset="-120"/>
               </a:rPr>
-              <a:t>va</a:t>
-            </a:r>
-            <a:endParaRPr lang="en-US" sz="1400" dirty="0"/>
-          </a:p>
-        </p:txBody>
-      </p:sp>
-      <p:sp>
-        <p:nvSpPr>
-          <p:cNvPr id="34" name="Text 32"/>
-          <p:cNvSpPr/>
-          <p:nvPr/>
-        </p:nvSpPr>
-        <p:spPr>
-          <a:xfrm>
-            <a:off x="6784848" y="3364992"/>
-            <a:ext cx="73152" cy="475488"/>
-          </a:xfrm>
-          <a:prstGeom prst="rect">
-            <a:avLst/>
-          </a:prstGeom>
-          <a:noFill/>
-          <a:ln/>
-        </p:spPr>
-        <p:txBody>
-          <a:bodyPr wrap="square" lIns="0" tIns="0" rIns="0" bIns="0" rtlCol="0" anchor="ctr"/>
-          <a:lstStyle/>
-          <a:p>
-            <a:pPr algn="ctr" indent="0" marL="0">
-              <a:buNone/>
-            </a:pPr>
-            <a:r>
-              <a:rPr lang="en-US" sz="1600" b="1" dirty="0">
-                <a:solidFill>
-                  <a:srgbClr val="0D9488"/>
-                </a:solidFill>
-                <a:latin typeface="Trebuchet MS" pitchFamily="34" charset="0"/>
-                <a:ea typeface="Trebuchet MS" pitchFamily="34" charset="-122"/>
-                <a:cs typeface="Trebuchet MS" pitchFamily="34" charset="-120"/>
-              </a:rPr>
-              <a:t>·</a:t>
-            </a:r>
-            <a:endParaRPr lang="en-US" sz="1600" dirty="0"/>
-          </a:p>
-        </p:txBody>
-      </p:sp>
-      <p:sp>
-        <p:nvSpPr>
-          <p:cNvPr id="35" name="Shape 33"/>
-          <p:cNvSpPr/>
-          <p:nvPr/>
-        </p:nvSpPr>
-        <p:spPr>
-          <a:xfrm>
-            <a:off x="6858000" y="3364992"/>
-            <a:ext cx="1554480" cy="475488"/>
-          </a:xfrm>
-          <a:prstGeom prst="rect">
-            <a:avLst>
-              <a:gd name="adj" fmla="val 9615"/>
-            </a:avLst>
-          </a:prstGeom>
-          <a:solidFill>
-            <a:srgbClr val="FFFFFF"/>
-          </a:solidFill>
-          <a:ln w="12700">
-            <a:solidFill>
-              <a:srgbClr val="0D9488"/>
-            </a:solidFill>
-            <a:prstDash val="solid"/>
-          </a:ln>
-        </p:spPr>
-      </p:sp>
-      <p:sp>
-        <p:nvSpPr>
-          <p:cNvPr id="36" name="Text 34"/>
-          <p:cNvSpPr/>
-          <p:nvPr/>
-        </p:nvSpPr>
-        <p:spPr>
-          <a:xfrm>
-            <a:off x="6858000" y="3364992"/>
-            <a:ext cx="1554480" cy="475488"/>
-          </a:xfrm>
-          <a:prstGeom prst="rect">
-            <a:avLst/>
-          </a:prstGeom>
-          <a:noFill/>
-          <a:ln/>
-        </p:spPr>
-        <p:txBody>
-          <a:bodyPr wrap="square" lIns="0" tIns="0" rIns="0" bIns="0" rtlCol="0" anchor="ctr"/>
-          <a:lstStyle/>
-          <a:p>
-            <a:pPr algn="ctr" indent="0" marL="0">
-              <a:buNone/>
-            </a:pPr>
-            <a:r>
-              <a:rPr lang="en-US" sz="1400" b="1" dirty="0">
-                <a:solidFill>
-                  <a:srgbClr val="0D9488"/>
-                </a:solidFill>
-                <a:latin typeface="Trebuchet MS" pitchFamily="34" charset="0"/>
-                <a:ea typeface="Trebuchet MS" pitchFamily="34" charset="-122"/>
-                <a:cs typeface="Trebuchet MS" pitchFamily="34" charset="-120"/>
-              </a:rPr>
-              <a:t>tion</a:t>
+              <a:t>ver</a:t>
             </a:r>
             <a:endParaRPr lang="en-US" sz="1400" dirty="0"/>
           </a:p>
@@ -10072,7 +10191,7 @@
                 <a:ea typeface="Trebuchet MS" pitchFamily="34" charset="-122"/>
                 <a:cs typeface="Trebuchet MS" pitchFamily="34" charset="-120"/>
               </a:rPr>
-              <a:t>observation</a:t>
+              <a:t>observer</a:t>
             </a:r>
             <a:endParaRPr lang="en-US" sz="2800" dirty="0"/>
           </a:p>
@@ -10152,7 +10271,7 @@
         </p:nvSpPr>
         <p:spPr>
           <a:xfrm>
-            <a:off x="2938272" y="2258568"/>
+            <a:off x="2221992" y="2258568"/>
             <a:ext cx="1828800" cy="292608"/>
           </a:xfrm>
           <a:prstGeom prst="rect">
@@ -10186,7 +10305,7 @@
         </p:nvSpPr>
         <p:spPr>
           <a:xfrm>
-            <a:off x="2938272" y="2258568"/>
+            <a:off x="2221992" y="2258568"/>
             <a:ext cx="1828800" cy="292608"/>
           </a:xfrm>
           <a:prstGeom prst="rect">
@@ -10225,7 +10344,7 @@
         </p:nvSpPr>
         <p:spPr>
           <a:xfrm>
-            <a:off x="2938272" y="2569464"/>
+            <a:off x="2221992" y="2569464"/>
             <a:ext cx="1828800" cy="201168"/>
           </a:xfrm>
           <a:prstGeom prst="rect">
@@ -10258,52 +10377,13 @@
       </p:sp>
       <p:sp>
         <p:nvSpPr>
-          <p:cNvPr id="19" name="Text 17"/>
-          <p:cNvSpPr/>
-          <p:nvPr/>
-        </p:nvSpPr>
-        <p:spPr>
-          <a:xfrm>
-            <a:off x="2938272" y="2752344"/>
-            <a:ext cx="1828800" cy="182880"/>
-          </a:xfrm>
-          <a:prstGeom prst="rect">
-            <a:avLst/>
-          </a:prstGeom>
-          <a:noFill/>
-          <a:ln/>
-        </p:spPr>
-        <p:txBody>
-          <a:bodyPr wrap="square" lIns="0" tIns="0" rIns="0" bIns="0" rtlCol="0" anchor="t"/>
-          <a:lstStyle/>
-          <a:p>
-            <a:pPr algn="ctr" indent="0" marL="0">
-              <a:buNone/>
-            </a:pPr>
-            <a:r>
-              <a:rPr lang="en-US" sz="700" i="1" dirty="0">
-                <a:solidFill>
-                  <a:srgbClr val="94A3B8"/>
-                </a:solidFill>
-                <a:latin typeface="Calibri" pitchFamily="34" charset="0"/>
-                <a:ea typeface="Calibri" pitchFamily="34" charset="-122"/>
-                <a:cs typeface="Calibri" pitchFamily="34" charset="-120"/>
-              </a:rPr>
-              <a:t>'e' dropped before vowel suffix</a:t>
-            </a:r>
-            <a:endParaRPr lang="en-US" sz="700" dirty="0"/>
-          </a:p>
-        </p:txBody>
-      </p:sp>
-      <p:sp>
-        <p:nvSpPr>
-          <p:cNvPr id="20" name="Shape 18"/>
-          <p:cNvSpPr/>
-          <p:nvPr/>
-        </p:nvSpPr>
-        <p:spPr>
-          <a:xfrm>
-            <a:off x="5803392" y="2258568"/>
+          <p:cNvPr id="19" name="Shape 17"/>
+          <p:cNvSpPr/>
+          <p:nvPr/>
+        </p:nvSpPr>
+        <p:spPr>
+          <a:xfrm>
+            <a:off x="4370832" y="2258568"/>
             <a:ext cx="1828800" cy="292608"/>
           </a:xfrm>
           <a:prstGeom prst="rect">
@@ -10331,13 +10411,13 @@
       </p:sp>
       <p:sp>
         <p:nvSpPr>
-          <p:cNvPr id="21" name="Text 19"/>
-          <p:cNvSpPr/>
-          <p:nvPr/>
-        </p:nvSpPr>
-        <p:spPr>
-          <a:xfrm>
-            <a:off x="5803392" y="2258568"/>
+          <p:cNvPr id="20" name="Text 18"/>
+          <p:cNvSpPr/>
+          <p:nvPr/>
+        </p:nvSpPr>
+        <p:spPr>
+          <a:xfrm>
+            <a:off x="4370832" y="2258568"/>
             <a:ext cx="1828800" cy="292608"/>
           </a:xfrm>
           <a:prstGeom prst="rect">
@@ -10362,7 +10442,7 @@
                 <a:ea typeface="Trebuchet MS" pitchFamily="34" charset="-122"/>
                 <a:cs typeface="Trebuchet MS" pitchFamily="34" charset="-120"/>
               </a:rPr>
-              <a:t>ation</a:t>
+              <a:t>r</a:t>
             </a:r>
             <a:endParaRPr lang="en-US" sz="1300" dirty="0"/>
           </a:p>
@@ -10370,13 +10450,13 @@
       </p:sp>
       <p:sp>
         <p:nvSpPr>
-          <p:cNvPr id="22" name="Text 20"/>
-          <p:cNvSpPr/>
-          <p:nvPr/>
-        </p:nvSpPr>
-        <p:spPr>
-          <a:xfrm>
-            <a:off x="5803392" y="2569464"/>
+          <p:cNvPr id="21" name="Text 19"/>
+          <p:cNvSpPr/>
+          <p:nvPr/>
+        </p:nvSpPr>
+        <p:spPr>
+          <a:xfrm>
+            <a:off x="4370832" y="2569464"/>
             <a:ext cx="1828800" cy="201168"/>
           </a:xfrm>
           <a:prstGeom prst="rect">
@@ -10401,7 +10481,7 @@
                 <a:ea typeface="Calibri" pitchFamily="34" charset="-122"/>
                 <a:cs typeface="Calibri" pitchFamily="34" charset="-120"/>
               </a:rPr>
-              <a:t>the act or result of</a:t>
+              <a:t>connecting letter</a:t>
             </a:r>
             <a:endParaRPr lang="en-US" sz="850" dirty="0"/>
           </a:p>
@@ -10409,7 +10489,158 @@
       </p:sp>
       <p:sp>
         <p:nvSpPr>
+          <p:cNvPr id="22" name="Text 20"/>
+          <p:cNvSpPr/>
+          <p:nvPr/>
+        </p:nvSpPr>
+        <p:spPr>
+          <a:xfrm>
+            <a:off x="4370832" y="2752344"/>
+            <a:ext cx="1828800" cy="182880"/>
+          </a:xfrm>
+          <a:prstGeom prst="rect">
+            <a:avLst/>
+          </a:prstGeom>
+          <a:noFill/>
+          <a:ln/>
+        </p:spPr>
+        <p:txBody>
+          <a:bodyPr wrap="square" lIns="0" tIns="0" rIns="0" bIns="0" rtlCol="0" anchor="t"/>
+          <a:lstStyle/>
+          <a:p>
+            <a:pPr algn="ctr" indent="0" marL="0">
+              <a:buNone/>
+            </a:pPr>
+            <a:r>
+              <a:rPr lang="en-US" sz="700" i="1" dirty="0">
+                <a:solidFill>
+                  <a:srgbClr val="94A3B8"/>
+                </a:solidFill>
+                <a:latin typeface="Calibri" pitchFamily="34" charset="0"/>
+                <a:ea typeface="Calibri" pitchFamily="34" charset="-122"/>
+                <a:cs typeface="Calibri" pitchFamily="34" charset="-120"/>
+              </a:rPr>
+              <a:t>'e' dropped before vowel suffix</a:t>
+            </a:r>
+            <a:endParaRPr lang="en-US" sz="700" dirty="0"/>
+          </a:p>
+        </p:txBody>
+      </p:sp>
+      <p:sp>
+        <p:nvSpPr>
           <p:cNvPr id="23" name="Shape 21"/>
+          <p:cNvSpPr/>
+          <p:nvPr/>
+        </p:nvSpPr>
+        <p:spPr>
+          <a:xfrm>
+            <a:off x="6519672" y="2258568"/>
+            <a:ext cx="1828800" cy="292608"/>
+          </a:xfrm>
+          <a:prstGeom prst="rect">
+            <a:avLst>
+              <a:gd name="adj" fmla="val 25000"/>
+            </a:avLst>
+          </a:prstGeom>
+          <a:solidFill>
+            <a:srgbClr val="FCE7F3"/>
+          </a:solidFill>
+          <a:ln w="19050">
+            <a:solidFill>
+              <a:srgbClr val="DB2777"/>
+            </a:solidFill>
+            <a:prstDash val="solid"/>
+          </a:ln>
+          <a:effectLst>
+            <a:outerShdw sx="100000" sy="100000" kx="0" ky="0" algn="bl" rotWithShape="0" blurRad="101600" dist="38100" dir="8100000">
+              <a:srgbClr val="000000">
+                <a:alpha val="12000"/>
+              </a:srgbClr>
+            </a:outerShdw>
+          </a:effectLst>
+        </p:spPr>
+      </p:sp>
+      <p:sp>
+        <p:nvSpPr>
+          <p:cNvPr id="24" name="Text 22"/>
+          <p:cNvSpPr/>
+          <p:nvPr/>
+        </p:nvSpPr>
+        <p:spPr>
+          <a:xfrm>
+            <a:off x="6519672" y="2258568"/>
+            <a:ext cx="1828800" cy="292608"/>
+          </a:xfrm>
+          <a:prstGeom prst="rect">
+            <a:avLst/>
+          </a:prstGeom>
+          <a:noFill/>
+          <a:ln/>
+        </p:spPr>
+        <p:txBody>
+          <a:bodyPr wrap="square" lIns="0" tIns="0" rIns="0" bIns="0" rtlCol="0" anchor="ctr"/>
+          <a:lstStyle/>
+          <a:p>
+            <a:pPr algn="ctr" indent="0" marL="0">
+              <a:buNone/>
+            </a:pPr>
+            <a:r>
+              <a:rPr lang="en-US" sz="1300" b="1" dirty="0">
+                <a:solidFill>
+                  <a:srgbClr val="9D174D"/>
+                </a:solidFill>
+                <a:latin typeface="Trebuchet MS" pitchFamily="34" charset="0"/>
+                <a:ea typeface="Trebuchet MS" pitchFamily="34" charset="-122"/>
+                <a:cs typeface="Trebuchet MS" pitchFamily="34" charset="-120"/>
+              </a:rPr>
+              <a:t>er</a:t>
+            </a:r>
+            <a:endParaRPr lang="en-US" sz="1300" dirty="0"/>
+          </a:p>
+        </p:txBody>
+      </p:sp>
+      <p:sp>
+        <p:nvSpPr>
+          <p:cNvPr id="25" name="Text 23"/>
+          <p:cNvSpPr/>
+          <p:nvPr/>
+        </p:nvSpPr>
+        <p:spPr>
+          <a:xfrm>
+            <a:off x="6519672" y="2569464"/>
+            <a:ext cx="1828800" cy="201168"/>
+          </a:xfrm>
+          <a:prstGeom prst="rect">
+            <a:avLst/>
+          </a:prstGeom>
+          <a:noFill/>
+          <a:ln/>
+        </p:spPr>
+        <p:txBody>
+          <a:bodyPr wrap="square" lIns="0" tIns="0" rIns="0" bIns="0" rtlCol="0" anchor="t"/>
+          <a:lstStyle/>
+          <a:p>
+            <a:pPr algn="ctr" indent="0" marL="0">
+              <a:buNone/>
+            </a:pPr>
+            <a:r>
+              <a:rPr lang="en-US" sz="850" dirty="0">
+                <a:solidFill>
+                  <a:srgbClr val="475569"/>
+                </a:solidFill>
+                <a:latin typeface="Calibri" pitchFamily="34" charset="0"/>
+                <a:ea typeface="Calibri" pitchFamily="34" charset="-122"/>
+                <a:cs typeface="Calibri" pitchFamily="34" charset="-120"/>
+              </a:rPr>
+              <a:t>a person who does something</a:t>
+            </a:r>
+            <a:endParaRPr lang="en-US" sz="850" dirty="0"/>
+          </a:p>
+        </p:txBody>
+      </p:sp>
+      <p:sp>
+        <p:nvSpPr>
+          <p:cNvPr id="26" name="Shape 24"/>
           <p:cNvSpPr/>
           <p:nvPr/>
         </p:nvSpPr>
@@ -10436,7 +10667,7 @@
       </p:sp>
       <p:sp>
         <p:nvSpPr>
-          <p:cNvPr id="24" name="Text 22"/>
+          <p:cNvPr id="27" name="Text 25"/>
           <p:cNvSpPr/>
           <p:nvPr/>
         </p:nvSpPr>
@@ -10475,7 +10706,7 @@
       </p:sp>
       <p:sp>
         <p:nvSpPr>
-          <p:cNvPr id="25" name="Shape 23"/>
+          <p:cNvPr id="28" name="Shape 26"/>
           <p:cNvSpPr/>
           <p:nvPr/>
         </p:nvSpPr>
@@ -10502,14 +10733,14 @@
       </p:sp>
       <p:sp>
         <p:nvSpPr>
-          <p:cNvPr id="26" name="Shape 24"/>
-          <p:cNvSpPr/>
-          <p:nvPr/>
-        </p:nvSpPr>
-        <p:spPr>
-          <a:xfrm>
-            <a:off x="1975104" y="3364992"/>
-            <a:ext cx="1554480" cy="475488"/>
+          <p:cNvPr id="29" name="Shape 27"/>
+          <p:cNvSpPr/>
+          <p:nvPr/>
+        </p:nvSpPr>
+        <p:spPr>
+          <a:xfrm>
+            <a:off x="2313432" y="3364992"/>
+            <a:ext cx="1645920" cy="475488"/>
           </a:xfrm>
           <a:prstGeom prst="rect">
             <a:avLst>
@@ -10529,14 +10760,14 @@
       </p:sp>
       <p:sp>
         <p:nvSpPr>
-          <p:cNvPr id="27" name="Text 25"/>
-          <p:cNvSpPr/>
-          <p:nvPr/>
-        </p:nvSpPr>
-        <p:spPr>
-          <a:xfrm>
-            <a:off x="1975104" y="3364992"/>
-            <a:ext cx="1554480" cy="475488"/>
+          <p:cNvPr id="30" name="Text 28"/>
+          <p:cNvSpPr/>
+          <p:nvPr/>
+        </p:nvSpPr>
+        <p:spPr>
+          <a:xfrm>
+            <a:off x="2313432" y="3364992"/>
+            <a:ext cx="1645920" cy="475488"/>
           </a:xfrm>
           <a:prstGeom prst="rect">
             <a:avLst/>
@@ -10568,14 +10799,14 @@
       </p:sp>
       <p:sp>
         <p:nvSpPr>
-          <p:cNvPr id="28" name="Text 26"/>
-          <p:cNvSpPr/>
-          <p:nvPr/>
-        </p:nvSpPr>
-        <p:spPr>
-          <a:xfrm>
-            <a:off x="3529584" y="3364992"/>
-            <a:ext cx="73152" cy="475488"/>
+          <p:cNvPr id="31" name="Text 29"/>
+          <p:cNvSpPr/>
+          <p:nvPr/>
+        </p:nvSpPr>
+        <p:spPr>
+          <a:xfrm>
+            <a:off x="3959352" y="3364992"/>
+            <a:ext cx="411480" cy="475488"/>
           </a:xfrm>
           <a:prstGeom prst="rect">
             <a:avLst/>
@@ -10607,14 +10838,14 @@
       </p:sp>
       <p:sp>
         <p:nvSpPr>
-          <p:cNvPr id="29" name="Shape 27"/>
-          <p:cNvSpPr/>
-          <p:nvPr/>
-        </p:nvSpPr>
-        <p:spPr>
-          <a:xfrm>
-            <a:off x="3602736" y="3364992"/>
-            <a:ext cx="1554480" cy="475488"/>
+          <p:cNvPr id="32" name="Shape 30"/>
+          <p:cNvSpPr/>
+          <p:nvPr/>
+        </p:nvSpPr>
+        <p:spPr>
+          <a:xfrm>
+            <a:off x="4370832" y="3364992"/>
+            <a:ext cx="1645920" cy="475488"/>
           </a:xfrm>
           <a:prstGeom prst="rect">
             <a:avLst>
@@ -10634,14 +10865,14 @@
       </p:sp>
       <p:sp>
         <p:nvSpPr>
-          <p:cNvPr id="30" name="Text 28"/>
-          <p:cNvSpPr/>
-          <p:nvPr/>
-        </p:nvSpPr>
-        <p:spPr>
-          <a:xfrm>
-            <a:off x="3602736" y="3364992"/>
-            <a:ext cx="1554480" cy="475488"/>
+          <p:cNvPr id="33" name="Text 31"/>
+          <p:cNvSpPr/>
+          <p:nvPr/>
+        </p:nvSpPr>
+        <p:spPr>
+          <a:xfrm>
+            <a:off x="4370832" y="3364992"/>
+            <a:ext cx="1645920" cy="475488"/>
           </a:xfrm>
           <a:prstGeom prst="rect">
             <a:avLst/>
@@ -10673,14 +10904,14 @@
       </p:sp>
       <p:sp>
         <p:nvSpPr>
-          <p:cNvPr id="31" name="Text 29"/>
-          <p:cNvSpPr/>
-          <p:nvPr/>
-        </p:nvSpPr>
-        <p:spPr>
-          <a:xfrm>
-            <a:off x="5157216" y="3364992"/>
-            <a:ext cx="73152" cy="475488"/>
+          <p:cNvPr id="34" name="Text 32"/>
+          <p:cNvSpPr/>
+          <p:nvPr/>
+        </p:nvSpPr>
+        <p:spPr>
+          <a:xfrm>
+            <a:off x="6016752" y="3364992"/>
+            <a:ext cx="411480" cy="475488"/>
           </a:xfrm>
           <a:prstGeom prst="rect">
             <a:avLst/>
@@ -10712,14 +10943,14 @@
       </p:sp>
       <p:sp>
         <p:nvSpPr>
-          <p:cNvPr id="32" name="Shape 30"/>
-          <p:cNvSpPr/>
-          <p:nvPr/>
-        </p:nvSpPr>
-        <p:spPr>
-          <a:xfrm>
-            <a:off x="5230368" y="3364992"/>
-            <a:ext cx="1554480" cy="475488"/>
+          <p:cNvPr id="35" name="Shape 33"/>
+          <p:cNvSpPr/>
+          <p:nvPr/>
+        </p:nvSpPr>
+        <p:spPr>
+          <a:xfrm>
+            <a:off x="6428232" y="3364992"/>
+            <a:ext cx="1645920" cy="475488"/>
           </a:xfrm>
           <a:prstGeom prst="rect">
             <a:avLst>
@@ -10739,14 +10970,14 @@
       </p:sp>
       <p:sp>
         <p:nvSpPr>
-          <p:cNvPr id="33" name="Text 31"/>
-          <p:cNvSpPr/>
-          <p:nvPr/>
-        </p:nvSpPr>
-        <p:spPr>
-          <a:xfrm>
-            <a:off x="5230368" y="3364992"/>
-            <a:ext cx="1554480" cy="475488"/>
+          <p:cNvPr id="36" name="Text 34"/>
+          <p:cNvSpPr/>
+          <p:nvPr/>
+        </p:nvSpPr>
+        <p:spPr>
+          <a:xfrm>
+            <a:off x="6428232" y="3364992"/>
+            <a:ext cx="1645920" cy="475488"/>
           </a:xfrm>
           <a:prstGeom prst="rect">
             <a:avLst/>
@@ -10770,7 +11001,7 @@
                 <a:ea typeface="Trebuchet MS" pitchFamily="34" charset="-122"/>
                 <a:cs typeface="Trebuchet MS" pitchFamily="34" charset="-120"/>
               </a:rPr>
-              <a:t>va</a:t>
+              <a:t>ver</a:t>
             </a:r>
             <a:endParaRPr lang="en-US" sz="1400" dirty="0"/>
           </a:p>
@@ -10778,212 +11009,239 @@
       </p:sp>
       <p:sp>
         <p:nvSpPr>
-          <p:cNvPr id="34" name="Text 32"/>
-          <p:cNvSpPr/>
-          <p:nvPr/>
-        </p:nvSpPr>
-        <p:spPr>
-          <a:xfrm>
-            <a:off x="6784848" y="3364992"/>
-            <a:ext cx="73152" cy="475488"/>
-          </a:xfrm>
-          <a:prstGeom prst="rect">
-            <a:avLst/>
-          </a:prstGeom>
-          <a:noFill/>
-          <a:ln/>
-        </p:spPr>
-        <p:txBody>
-          <a:bodyPr wrap="square" lIns="0" tIns="0" rIns="0" bIns="0" rtlCol="0" anchor="ctr"/>
-          <a:lstStyle/>
-          <a:p>
-            <a:pPr algn="ctr" indent="0" marL="0">
-              <a:buNone/>
-            </a:pPr>
-            <a:r>
-              <a:rPr lang="en-US" sz="1600" b="1" dirty="0">
-                <a:solidFill>
-                  <a:srgbClr val="0D9488"/>
+          <p:cNvPr id="37" name="Shape 35"/>
+          <p:cNvSpPr/>
+          <p:nvPr/>
+        </p:nvSpPr>
+        <p:spPr>
+          <a:xfrm>
+            <a:off x="365760" y="4096512"/>
+            <a:ext cx="1371600" cy="804672"/>
+          </a:xfrm>
+          <a:prstGeom prst="rect">
+            <a:avLst>
+              <a:gd name="adj" fmla="val 6818"/>
+            </a:avLst>
+          </a:prstGeom>
+          <a:solidFill>
+            <a:srgbClr val="E2E8F0"/>
+          </a:solidFill>
+          <a:ln w="12700">
+            <a:solidFill>
+              <a:srgbClr val="E2E8F0"/>
+            </a:solidFill>
+            <a:prstDash val="solid"/>
+          </a:ln>
+        </p:spPr>
+      </p:sp>
+      <p:sp>
+        <p:nvSpPr>
+          <p:cNvPr id="38" name="Text 36"/>
+          <p:cNvSpPr/>
+          <p:nvPr/>
+        </p:nvSpPr>
+        <p:spPr>
+          <a:xfrm>
+            <a:off x="365760" y="4096512"/>
+            <a:ext cx="1371600" cy="804672"/>
+          </a:xfrm>
+          <a:prstGeom prst="rect">
+            <a:avLst/>
+          </a:prstGeom>
+          <a:noFill/>
+          <a:ln/>
+        </p:spPr>
+        <p:txBody>
+          <a:bodyPr wrap="square" lIns="0" tIns="0" rIns="0" bIns="0" rtlCol="0" anchor="ctr"/>
+          <a:lstStyle/>
+          <a:p>
+            <a:pPr algn="ctr" indent="0" marL="0">
+              <a:buNone/>
+            </a:pPr>
+            <a:r>
+              <a:rPr lang="en-US" sz="1100" b="1" dirty="0">
+                <a:solidFill>
+                  <a:srgbClr val="475569"/>
                 </a:solidFill>
                 <a:latin typeface="Trebuchet MS" pitchFamily="34" charset="0"/>
                 <a:ea typeface="Trebuchet MS" pitchFamily="34" charset="-122"/>
                 <a:cs typeface="Trebuchet MS" pitchFamily="34" charset="-120"/>
               </a:rPr>
-              <a:t>·</a:t>
-            </a:r>
-            <a:endParaRPr lang="en-US" sz="1600" dirty="0"/>
-          </a:p>
-        </p:txBody>
-      </p:sp>
-      <p:sp>
-        <p:nvSpPr>
-          <p:cNvPr id="35" name="Shape 33"/>
-          <p:cNvSpPr/>
-          <p:nvPr/>
-        </p:nvSpPr>
-        <p:spPr>
-          <a:xfrm>
-            <a:off x="6858000" y="3364992"/>
-            <a:ext cx="1554480" cy="475488"/>
+              <a:t>Phonemes</a:t>
+            </a:r>
+            <a:endParaRPr lang="en-US" sz="1100" dirty="0"/>
+          </a:p>
+        </p:txBody>
+      </p:sp>
+      <p:sp>
+        <p:nvSpPr>
+          <p:cNvPr id="39" name="Shape 37"/>
+          <p:cNvSpPr/>
+          <p:nvPr/>
+        </p:nvSpPr>
+        <p:spPr>
+          <a:xfrm>
+            <a:off x="1874520" y="4096512"/>
+            <a:ext cx="6903720" cy="804672"/>
           </a:xfrm>
           <a:prstGeom prst="rect">
             <a:avLst>
-              <a:gd name="adj" fmla="val 9615"/>
+              <a:gd name="adj" fmla="val 6818"/>
             </a:avLst>
           </a:prstGeom>
           <a:solidFill>
+            <a:srgbClr val="FCE7F3"/>
+          </a:solidFill>
+          <a:ln w="12700">
+            <a:solidFill>
+              <a:srgbClr val="DB2777"/>
+            </a:solidFill>
+            <a:prstDash val="solid"/>
+          </a:ln>
+        </p:spPr>
+      </p:sp>
+      <p:sp>
+        <p:nvSpPr>
+          <p:cNvPr id="40" name="Shape 38"/>
+          <p:cNvSpPr/>
+          <p:nvPr/>
+        </p:nvSpPr>
+        <p:spPr>
+          <a:xfrm>
+            <a:off x="2254649" y="4169664"/>
+            <a:ext cx="685800" cy="384048"/>
+          </a:xfrm>
+          <a:prstGeom prst="rect">
+            <a:avLst>
+              <a:gd name="adj" fmla="val 9524"/>
+            </a:avLst>
+          </a:prstGeom>
+          <a:solidFill>
             <a:srgbClr val="FFFFFF"/>
           </a:solidFill>
           <a:ln w="12700">
             <a:solidFill>
-              <a:srgbClr val="0D9488"/>
-            </a:solidFill>
-            <a:prstDash val="solid"/>
-          </a:ln>
-        </p:spPr>
-      </p:sp>
-      <p:sp>
-        <p:nvSpPr>
-          <p:cNvPr id="36" name="Text 34"/>
-          <p:cNvSpPr/>
-          <p:nvPr/>
-        </p:nvSpPr>
-        <p:spPr>
-          <a:xfrm>
-            <a:off x="6858000" y="3364992"/>
-            <a:ext cx="1554480" cy="475488"/>
-          </a:xfrm>
-          <a:prstGeom prst="rect">
-            <a:avLst/>
-          </a:prstGeom>
-          <a:noFill/>
-          <a:ln/>
-        </p:spPr>
-        <p:txBody>
-          <a:bodyPr wrap="square" lIns="0" tIns="0" rIns="0" bIns="0" rtlCol="0" anchor="ctr"/>
-          <a:lstStyle/>
-          <a:p>
-            <a:pPr algn="ctr" indent="0" marL="0">
-              <a:buNone/>
-            </a:pPr>
-            <a:r>
-              <a:rPr lang="en-US" sz="1400" b="1" dirty="0">
-                <a:solidFill>
-                  <a:srgbClr val="0D9488"/>
+              <a:srgbClr val="DB2777"/>
+            </a:solidFill>
+            <a:prstDash val="solid"/>
+          </a:ln>
+        </p:spPr>
+      </p:sp>
+      <p:sp>
+        <p:nvSpPr>
+          <p:cNvPr id="41" name="Text 39"/>
+          <p:cNvSpPr/>
+          <p:nvPr/>
+        </p:nvSpPr>
+        <p:spPr>
+          <a:xfrm>
+            <a:off x="2254649" y="4169664"/>
+            <a:ext cx="685800" cy="384048"/>
+          </a:xfrm>
+          <a:prstGeom prst="rect">
+            <a:avLst/>
+          </a:prstGeom>
+          <a:noFill/>
+          <a:ln/>
+        </p:spPr>
+        <p:txBody>
+          <a:bodyPr wrap="square" lIns="0" tIns="0" rIns="0" bIns="0" rtlCol="0" anchor="ctr"/>
+          <a:lstStyle/>
+          <a:p>
+            <a:pPr algn="ctr" indent="0" marL="0">
+              <a:buNone/>
+            </a:pPr>
+            <a:r>
+              <a:rPr lang="en-US" sz="900" b="1" dirty="0">
+                <a:solidFill>
+                  <a:srgbClr val="9D174D"/>
                 </a:solidFill>
                 <a:latin typeface="Trebuchet MS" pitchFamily="34" charset="0"/>
                 <a:ea typeface="Trebuchet MS" pitchFamily="34" charset="-122"/>
                 <a:cs typeface="Trebuchet MS" pitchFamily="34" charset="-120"/>
               </a:rPr>
-              <a:t>tion</a:t>
-            </a:r>
-            <a:endParaRPr lang="en-US" sz="1400" dirty="0"/>
-          </a:p>
-        </p:txBody>
-      </p:sp>
-      <p:sp>
-        <p:nvSpPr>
-          <p:cNvPr id="37" name="Shape 35"/>
-          <p:cNvSpPr/>
-          <p:nvPr/>
-        </p:nvSpPr>
-        <p:spPr>
-          <a:xfrm>
-            <a:off x="365760" y="4096512"/>
-            <a:ext cx="1371600" cy="804672"/>
+              <a:t>o</a:t>
+            </a:r>
+            <a:endParaRPr lang="en-US" sz="900" dirty="0"/>
+          </a:p>
+        </p:txBody>
+      </p:sp>
+      <p:sp>
+        <p:nvSpPr>
+          <p:cNvPr id="42" name="Shape 40"/>
+          <p:cNvSpPr/>
+          <p:nvPr/>
+        </p:nvSpPr>
+        <p:spPr>
+          <a:xfrm>
+            <a:off x="3293146" y="4169664"/>
+            <a:ext cx="685800" cy="384048"/>
           </a:xfrm>
           <a:prstGeom prst="rect">
             <a:avLst>
-              <a:gd name="adj" fmla="val 6818"/>
+              <a:gd name="adj" fmla="val 9524"/>
             </a:avLst>
           </a:prstGeom>
           <a:solidFill>
-            <a:srgbClr val="E2E8F0"/>
-          </a:solidFill>
-          <a:ln w="12700">
-            <a:solidFill>
-              <a:srgbClr val="E2E8F0"/>
-            </a:solidFill>
-            <a:prstDash val="solid"/>
-          </a:ln>
-        </p:spPr>
-      </p:sp>
-      <p:sp>
-        <p:nvSpPr>
-          <p:cNvPr id="38" name="Text 36"/>
-          <p:cNvSpPr/>
-          <p:nvPr/>
-        </p:nvSpPr>
-        <p:spPr>
-          <a:xfrm>
-            <a:off x="365760" y="4096512"/>
-            <a:ext cx="1371600" cy="804672"/>
-          </a:xfrm>
-          <a:prstGeom prst="rect">
-            <a:avLst/>
-          </a:prstGeom>
-          <a:noFill/>
-          <a:ln/>
-        </p:spPr>
-        <p:txBody>
-          <a:bodyPr wrap="square" lIns="0" tIns="0" rIns="0" bIns="0" rtlCol="0" anchor="ctr"/>
-          <a:lstStyle/>
-          <a:p>
-            <a:pPr algn="ctr" indent="0" marL="0">
-              <a:buNone/>
-            </a:pPr>
-            <a:r>
-              <a:rPr lang="en-US" sz="1100" b="1" dirty="0">
-                <a:solidFill>
-                  <a:srgbClr val="475569"/>
+            <a:srgbClr val="FFFFFF"/>
+          </a:solidFill>
+          <a:ln w="12700">
+            <a:solidFill>
+              <a:srgbClr val="DB2777"/>
+            </a:solidFill>
+            <a:prstDash val="solid"/>
+          </a:ln>
+        </p:spPr>
+      </p:sp>
+      <p:sp>
+        <p:nvSpPr>
+          <p:cNvPr id="43" name="Text 41"/>
+          <p:cNvSpPr/>
+          <p:nvPr/>
+        </p:nvSpPr>
+        <p:spPr>
+          <a:xfrm>
+            <a:off x="3293146" y="4169664"/>
+            <a:ext cx="685800" cy="384048"/>
+          </a:xfrm>
+          <a:prstGeom prst="rect">
+            <a:avLst/>
+          </a:prstGeom>
+          <a:noFill/>
+          <a:ln/>
+        </p:spPr>
+        <p:txBody>
+          <a:bodyPr wrap="square" lIns="0" tIns="0" rIns="0" bIns="0" rtlCol="0" anchor="ctr"/>
+          <a:lstStyle/>
+          <a:p>
+            <a:pPr algn="ctr" indent="0" marL="0">
+              <a:buNone/>
+            </a:pPr>
+            <a:r>
+              <a:rPr lang="en-US" sz="900" b="1" dirty="0">
+                <a:solidFill>
+                  <a:srgbClr val="9D174D"/>
                 </a:solidFill>
                 <a:latin typeface="Trebuchet MS" pitchFamily="34" charset="0"/>
                 <a:ea typeface="Trebuchet MS" pitchFamily="34" charset="-122"/>
                 <a:cs typeface="Trebuchet MS" pitchFamily="34" charset="-120"/>
               </a:rPr>
-              <a:t>Phonemes</a:t>
-            </a:r>
-            <a:endParaRPr lang="en-US" sz="1100" dirty="0"/>
-          </a:p>
-        </p:txBody>
-      </p:sp>
-      <p:sp>
-        <p:nvSpPr>
-          <p:cNvPr id="39" name="Shape 37"/>
-          <p:cNvSpPr/>
-          <p:nvPr/>
-        </p:nvSpPr>
-        <p:spPr>
-          <a:xfrm>
-            <a:off x="1874520" y="4096512"/>
-            <a:ext cx="6903720" cy="804672"/>
-          </a:xfrm>
-          <a:prstGeom prst="rect">
-            <a:avLst>
-              <a:gd name="adj" fmla="val 6818"/>
-            </a:avLst>
-          </a:prstGeom>
-          <a:solidFill>
-            <a:srgbClr val="FCE7F3"/>
-          </a:solidFill>
-          <a:ln w="12700">
-            <a:solidFill>
-              <a:srgbClr val="DB2777"/>
-            </a:solidFill>
-            <a:prstDash val="solid"/>
-          </a:ln>
-        </p:spPr>
-      </p:sp>
-      <p:sp>
-        <p:nvSpPr>
-          <p:cNvPr id="40" name="Shape 38"/>
-          <p:cNvSpPr/>
-          <p:nvPr/>
-        </p:nvSpPr>
-        <p:spPr>
-          <a:xfrm>
-            <a:off x="1951330" y="4169664"/>
-            <a:ext cx="676656" cy="384048"/>
+              <a:t>b</a:t>
+            </a:r>
+            <a:endParaRPr lang="en-US" sz="900" dirty="0"/>
+          </a:p>
+        </p:txBody>
+      </p:sp>
+      <p:sp>
+        <p:nvSpPr>
+          <p:cNvPr id="44" name="Shape 42"/>
+          <p:cNvSpPr/>
+          <p:nvPr/>
+        </p:nvSpPr>
+        <p:spPr>
+          <a:xfrm>
+            <a:off x="4331643" y="4169664"/>
+            <a:ext cx="685800" cy="384048"/>
           </a:xfrm>
           <a:prstGeom prst="rect">
             <a:avLst>
@@ -11003,14 +11261,14 @@
       </p:sp>
       <p:sp>
         <p:nvSpPr>
-          <p:cNvPr id="41" name="Text 39"/>
-          <p:cNvSpPr/>
-          <p:nvPr/>
-        </p:nvSpPr>
-        <p:spPr>
-          <a:xfrm>
-            <a:off x="1951330" y="4169664"/>
-            <a:ext cx="676656" cy="384048"/>
+          <p:cNvPr id="45" name="Text 43"/>
+          <p:cNvSpPr/>
+          <p:nvPr/>
+        </p:nvSpPr>
+        <p:spPr>
+          <a:xfrm>
+            <a:off x="4331643" y="4169664"/>
+            <a:ext cx="685800" cy="384048"/>
           </a:xfrm>
           <a:prstGeom prst="rect">
             <a:avLst/>
@@ -11034,7 +11292,7 @@
                 <a:ea typeface="Trebuchet MS" pitchFamily="34" charset="-122"/>
                 <a:cs typeface="Trebuchet MS" pitchFamily="34" charset="-120"/>
               </a:rPr>
-              <a:t>o</a:t>
+              <a:t>s</a:t>
             </a:r>
             <a:endParaRPr lang="en-US" sz="900" dirty="0"/>
           </a:p>
@@ -11042,14 +11300,53 @@
       </p:sp>
       <p:sp>
         <p:nvSpPr>
-          <p:cNvPr id="42" name="Shape 40"/>
-          <p:cNvSpPr/>
-          <p:nvPr/>
-        </p:nvSpPr>
-        <p:spPr>
-          <a:xfrm>
-            <a:off x="2677363" y="4169664"/>
-            <a:ext cx="676656" cy="384048"/>
+          <p:cNvPr id="46" name="Text 44"/>
+          <p:cNvSpPr/>
+          <p:nvPr/>
+        </p:nvSpPr>
+        <p:spPr>
+          <a:xfrm>
+            <a:off x="4331643" y="4572000"/>
+            <a:ext cx="685800" cy="219456"/>
+          </a:xfrm>
+          <a:prstGeom prst="rect">
+            <a:avLst/>
+          </a:prstGeom>
+          <a:noFill/>
+          <a:ln/>
+        </p:spPr>
+        <p:txBody>
+          <a:bodyPr wrap="square" lIns="0" tIns="0" rIns="0" bIns="0" rtlCol="0" anchor="t"/>
+          <a:lstStyle/>
+          <a:p>
+            <a:pPr algn="ctr" indent="0" marL="0">
+              <a:buNone/>
+            </a:pPr>
+            <a:r>
+              <a:rPr lang="en-US" sz="750" i="1" dirty="0">
+                <a:solidFill>
+                  <a:srgbClr val="94A3B8"/>
+                </a:solidFill>
+                <a:latin typeface="Calibri" pitchFamily="34" charset="0"/>
+                <a:ea typeface="Calibri" pitchFamily="34" charset="-122"/>
+                <a:cs typeface="Calibri" pitchFamily="34" charset="-120"/>
+              </a:rPr>
+              <a:t>/z/</a:t>
+            </a:r>
+            <a:endParaRPr lang="en-US" sz="750" dirty="0"/>
+          </a:p>
+        </p:txBody>
+      </p:sp>
+      <p:sp>
+        <p:nvSpPr>
+          <p:cNvPr id="47" name="Shape 45"/>
+          <p:cNvSpPr/>
+          <p:nvPr/>
+        </p:nvSpPr>
+        <p:spPr>
+          <a:xfrm>
+            <a:off x="5370141" y="4169664"/>
+            <a:ext cx="685800" cy="384048"/>
           </a:xfrm>
           <a:prstGeom prst="rect">
             <a:avLst>
@@ -11069,14 +11366,14 @@
       </p:sp>
       <p:sp>
         <p:nvSpPr>
-          <p:cNvPr id="43" name="Text 41"/>
-          <p:cNvSpPr/>
-          <p:nvPr/>
-        </p:nvSpPr>
-        <p:spPr>
-          <a:xfrm>
-            <a:off x="2677363" y="4169664"/>
-            <a:ext cx="676656" cy="384048"/>
+          <p:cNvPr id="48" name="Text 46"/>
+          <p:cNvSpPr/>
+          <p:nvPr/>
+        </p:nvSpPr>
+        <p:spPr>
+          <a:xfrm>
+            <a:off x="5370141" y="4169664"/>
+            <a:ext cx="685800" cy="384048"/>
           </a:xfrm>
           <a:prstGeom prst="rect">
             <a:avLst/>
@@ -11100,7 +11397,7 @@
                 <a:ea typeface="Trebuchet MS" pitchFamily="34" charset="-122"/>
                 <a:cs typeface="Trebuchet MS" pitchFamily="34" charset="-120"/>
               </a:rPr>
-              <a:t>b</a:t>
+              <a:t>er</a:t>
             </a:r>
             <a:endParaRPr lang="en-US" sz="900" dirty="0"/>
           </a:p>
@@ -11108,14 +11405,14 @@
       </p:sp>
       <p:sp>
         <p:nvSpPr>
-          <p:cNvPr id="44" name="Shape 42"/>
-          <p:cNvSpPr/>
-          <p:nvPr/>
-        </p:nvSpPr>
-        <p:spPr>
-          <a:xfrm>
-            <a:off x="3403397" y="4169664"/>
-            <a:ext cx="676656" cy="384048"/>
+          <p:cNvPr id="49" name="Shape 47"/>
+          <p:cNvSpPr/>
+          <p:nvPr/>
+        </p:nvSpPr>
+        <p:spPr>
+          <a:xfrm>
+            <a:off x="6408638" y="4169664"/>
+            <a:ext cx="685800" cy="384048"/>
           </a:xfrm>
           <a:prstGeom prst="rect">
             <a:avLst>
@@ -11135,14 +11432,14 @@
       </p:sp>
       <p:sp>
         <p:nvSpPr>
-          <p:cNvPr id="45" name="Text 43"/>
-          <p:cNvSpPr/>
-          <p:nvPr/>
-        </p:nvSpPr>
-        <p:spPr>
-          <a:xfrm>
-            <a:off x="3403397" y="4169664"/>
-            <a:ext cx="676656" cy="384048"/>
+          <p:cNvPr id="50" name="Text 48"/>
+          <p:cNvSpPr/>
+          <p:nvPr/>
+        </p:nvSpPr>
+        <p:spPr>
+          <a:xfrm>
+            <a:off x="6408638" y="4169664"/>
+            <a:ext cx="685800" cy="384048"/>
           </a:xfrm>
           <a:prstGeom prst="rect">
             <a:avLst/>
@@ -11166,7 +11463,7 @@
                 <a:ea typeface="Trebuchet MS" pitchFamily="34" charset="-122"/>
                 <a:cs typeface="Trebuchet MS" pitchFamily="34" charset="-120"/>
               </a:rPr>
-              <a:t>s</a:t>
+              <a:t>v</a:t>
             </a:r>
             <a:endParaRPr lang="en-US" sz="900" dirty="0"/>
           </a:p>
@@ -11174,14 +11471,14 @@
       </p:sp>
       <p:sp>
         <p:nvSpPr>
-          <p:cNvPr id="46" name="Shape 44"/>
-          <p:cNvSpPr/>
-          <p:nvPr/>
-        </p:nvSpPr>
-        <p:spPr>
-          <a:xfrm>
-            <a:off x="4129430" y="4169664"/>
-            <a:ext cx="676656" cy="384048"/>
+          <p:cNvPr id="51" name="Shape 49"/>
+          <p:cNvSpPr/>
+          <p:nvPr/>
+        </p:nvSpPr>
+        <p:spPr>
+          <a:xfrm>
+            <a:off x="7447135" y="4169664"/>
+            <a:ext cx="685800" cy="384048"/>
           </a:xfrm>
           <a:prstGeom prst="rect">
             <a:avLst>
@@ -11201,14 +11498,14 @@
       </p:sp>
       <p:sp>
         <p:nvSpPr>
-          <p:cNvPr id="47" name="Text 45"/>
-          <p:cNvSpPr/>
-          <p:nvPr/>
-        </p:nvSpPr>
-        <p:spPr>
-          <a:xfrm>
-            <a:off x="4129430" y="4169664"/>
-            <a:ext cx="676656" cy="384048"/>
+          <p:cNvPr id="52" name="Text 50"/>
+          <p:cNvSpPr/>
+          <p:nvPr/>
+        </p:nvSpPr>
+        <p:spPr>
+          <a:xfrm>
+            <a:off x="7447135" y="4169664"/>
+            <a:ext cx="685800" cy="384048"/>
           </a:xfrm>
           <a:prstGeom prst="rect">
             <a:avLst/>
@@ -11233,375 +11530,6 @@
                 <a:cs typeface="Trebuchet MS" pitchFamily="34" charset="-120"/>
               </a:rPr>
               <a:t>er</a:t>
-            </a:r>
-            <a:endParaRPr lang="en-US" sz="900" dirty="0"/>
-          </a:p>
-        </p:txBody>
-      </p:sp>
-      <p:sp>
-        <p:nvSpPr>
-          <p:cNvPr id="48" name="Shape 46"/>
-          <p:cNvSpPr/>
-          <p:nvPr/>
-        </p:nvSpPr>
-        <p:spPr>
-          <a:xfrm>
-            <a:off x="4855464" y="4169664"/>
-            <a:ext cx="676656" cy="384048"/>
-          </a:xfrm>
-          <a:prstGeom prst="rect">
-            <a:avLst>
-              <a:gd name="adj" fmla="val 9524"/>
-            </a:avLst>
-          </a:prstGeom>
-          <a:solidFill>
-            <a:srgbClr val="FFFFFF"/>
-          </a:solidFill>
-          <a:ln w="12700">
-            <a:solidFill>
-              <a:srgbClr val="DB2777"/>
-            </a:solidFill>
-            <a:prstDash val="solid"/>
-          </a:ln>
-        </p:spPr>
-      </p:sp>
-      <p:sp>
-        <p:nvSpPr>
-          <p:cNvPr id="49" name="Text 47"/>
-          <p:cNvSpPr/>
-          <p:nvPr/>
-        </p:nvSpPr>
-        <p:spPr>
-          <a:xfrm>
-            <a:off x="4855464" y="4169664"/>
-            <a:ext cx="676656" cy="384048"/>
-          </a:xfrm>
-          <a:prstGeom prst="rect">
-            <a:avLst/>
-          </a:prstGeom>
-          <a:noFill/>
-          <a:ln/>
-        </p:spPr>
-        <p:txBody>
-          <a:bodyPr wrap="square" lIns="0" tIns="0" rIns="0" bIns="0" rtlCol="0" anchor="ctr"/>
-          <a:lstStyle/>
-          <a:p>
-            <a:pPr algn="ctr" indent="0" marL="0">
-              <a:buNone/>
-            </a:pPr>
-            <a:r>
-              <a:rPr lang="en-US" sz="900" b="1" dirty="0">
-                <a:solidFill>
-                  <a:srgbClr val="9D174D"/>
-                </a:solidFill>
-                <a:latin typeface="Trebuchet MS" pitchFamily="34" charset="0"/>
-                <a:ea typeface="Trebuchet MS" pitchFamily="34" charset="-122"/>
-                <a:cs typeface="Trebuchet MS" pitchFamily="34" charset="-120"/>
-              </a:rPr>
-              <a:t>v</a:t>
-            </a:r>
-            <a:endParaRPr lang="en-US" sz="900" dirty="0"/>
-          </a:p>
-        </p:txBody>
-      </p:sp>
-      <p:sp>
-        <p:nvSpPr>
-          <p:cNvPr id="50" name="Shape 48"/>
-          <p:cNvSpPr/>
-          <p:nvPr/>
-        </p:nvSpPr>
-        <p:spPr>
-          <a:xfrm>
-            <a:off x="5581498" y="4169664"/>
-            <a:ext cx="676656" cy="384048"/>
-          </a:xfrm>
-          <a:prstGeom prst="rect">
-            <a:avLst>
-              <a:gd name="adj" fmla="val 9524"/>
-            </a:avLst>
-          </a:prstGeom>
-          <a:solidFill>
-            <a:srgbClr val="FFFFFF"/>
-          </a:solidFill>
-          <a:ln w="12700">
-            <a:solidFill>
-              <a:srgbClr val="DB2777"/>
-            </a:solidFill>
-            <a:prstDash val="solid"/>
-          </a:ln>
-        </p:spPr>
-      </p:sp>
-      <p:sp>
-        <p:nvSpPr>
-          <p:cNvPr id="51" name="Text 49"/>
-          <p:cNvSpPr/>
-          <p:nvPr/>
-        </p:nvSpPr>
-        <p:spPr>
-          <a:xfrm>
-            <a:off x="5581498" y="4169664"/>
-            <a:ext cx="676656" cy="384048"/>
-          </a:xfrm>
-          <a:prstGeom prst="rect">
-            <a:avLst/>
-          </a:prstGeom>
-          <a:noFill/>
-          <a:ln/>
-        </p:spPr>
-        <p:txBody>
-          <a:bodyPr wrap="square" lIns="0" tIns="0" rIns="0" bIns="0" rtlCol="0" anchor="ctr"/>
-          <a:lstStyle/>
-          <a:p>
-            <a:pPr algn="ctr" indent="0" marL="0">
-              <a:buNone/>
-            </a:pPr>
-            <a:r>
-              <a:rPr lang="en-US" sz="900" b="1" dirty="0">
-                <a:solidFill>
-                  <a:srgbClr val="9D174D"/>
-                </a:solidFill>
-                <a:latin typeface="Trebuchet MS" pitchFamily="34" charset="0"/>
-                <a:ea typeface="Trebuchet MS" pitchFamily="34" charset="-122"/>
-                <a:cs typeface="Trebuchet MS" pitchFamily="34" charset="-120"/>
-              </a:rPr>
-              <a:t>a</a:t>
-            </a:r>
-            <a:endParaRPr lang="en-US" sz="900" dirty="0"/>
-          </a:p>
-        </p:txBody>
-      </p:sp>
-      <p:sp>
-        <p:nvSpPr>
-          <p:cNvPr id="52" name="Shape 50"/>
-          <p:cNvSpPr/>
-          <p:nvPr/>
-        </p:nvSpPr>
-        <p:spPr>
-          <a:xfrm>
-            <a:off x="6307531" y="4169664"/>
-            <a:ext cx="676656" cy="384048"/>
-          </a:xfrm>
-          <a:prstGeom prst="rect">
-            <a:avLst>
-              <a:gd name="adj" fmla="val 9524"/>
-            </a:avLst>
-          </a:prstGeom>
-          <a:solidFill>
-            <a:srgbClr val="FFFFFF"/>
-          </a:solidFill>
-          <a:ln w="12700">
-            <a:solidFill>
-              <a:srgbClr val="DB2777"/>
-            </a:solidFill>
-            <a:prstDash val="solid"/>
-          </a:ln>
-        </p:spPr>
-      </p:sp>
-      <p:sp>
-        <p:nvSpPr>
-          <p:cNvPr id="53" name="Text 51"/>
-          <p:cNvSpPr/>
-          <p:nvPr/>
-        </p:nvSpPr>
-        <p:spPr>
-          <a:xfrm>
-            <a:off x="6307531" y="4169664"/>
-            <a:ext cx="676656" cy="384048"/>
-          </a:xfrm>
-          <a:prstGeom prst="rect">
-            <a:avLst/>
-          </a:prstGeom>
-          <a:noFill/>
-          <a:ln/>
-        </p:spPr>
-        <p:txBody>
-          <a:bodyPr wrap="square" lIns="0" tIns="0" rIns="0" bIns="0" rtlCol="0" anchor="ctr"/>
-          <a:lstStyle/>
-          <a:p>
-            <a:pPr algn="ctr" indent="0" marL="0">
-              <a:buNone/>
-            </a:pPr>
-            <a:r>
-              <a:rPr lang="en-US" sz="900" b="1" dirty="0">
-                <a:solidFill>
-                  <a:srgbClr val="9D174D"/>
-                </a:solidFill>
-                <a:latin typeface="Trebuchet MS" pitchFamily="34" charset="0"/>
-                <a:ea typeface="Trebuchet MS" pitchFamily="34" charset="-122"/>
-                <a:cs typeface="Trebuchet MS" pitchFamily="34" charset="-120"/>
-              </a:rPr>
-              <a:t>t</a:t>
-            </a:r>
-            <a:endParaRPr lang="en-US" sz="900" dirty="0"/>
-          </a:p>
-        </p:txBody>
-      </p:sp>
-      <p:sp>
-        <p:nvSpPr>
-          <p:cNvPr id="54" name="Text 52"/>
-          <p:cNvSpPr/>
-          <p:nvPr/>
-        </p:nvSpPr>
-        <p:spPr>
-          <a:xfrm>
-            <a:off x="6307531" y="4572000"/>
-            <a:ext cx="676656" cy="219456"/>
-          </a:xfrm>
-          <a:prstGeom prst="rect">
-            <a:avLst/>
-          </a:prstGeom>
-          <a:noFill/>
-          <a:ln/>
-        </p:spPr>
-        <p:txBody>
-          <a:bodyPr wrap="square" lIns="0" tIns="0" rIns="0" bIns="0" rtlCol="0" anchor="t"/>
-          <a:lstStyle/>
-          <a:p>
-            <a:pPr algn="ctr" indent="0" marL="0">
-              <a:buNone/>
-            </a:pPr>
-            <a:r>
-              <a:rPr lang="en-US" sz="750" i="1" dirty="0">
-                <a:solidFill>
-                  <a:srgbClr val="94A3B8"/>
-                </a:solidFill>
-                <a:latin typeface="Calibri" pitchFamily="34" charset="0"/>
-                <a:ea typeface="Calibri" pitchFamily="34" charset="-122"/>
-                <a:cs typeface="Calibri" pitchFamily="34" charset="-120"/>
-              </a:rPr>
-              <a:t>/sh/</a:t>
-            </a:r>
-            <a:endParaRPr lang="en-US" sz="750" dirty="0"/>
-          </a:p>
-        </p:txBody>
-      </p:sp>
-      <p:sp>
-        <p:nvSpPr>
-          <p:cNvPr id="55" name="Shape 53"/>
-          <p:cNvSpPr/>
-          <p:nvPr/>
-        </p:nvSpPr>
-        <p:spPr>
-          <a:xfrm>
-            <a:off x="7033565" y="4169664"/>
-            <a:ext cx="676656" cy="384048"/>
-          </a:xfrm>
-          <a:prstGeom prst="rect">
-            <a:avLst>
-              <a:gd name="adj" fmla="val 9524"/>
-            </a:avLst>
-          </a:prstGeom>
-          <a:solidFill>
-            <a:srgbClr val="FFFFFF"/>
-          </a:solidFill>
-          <a:ln w="12700">
-            <a:solidFill>
-              <a:srgbClr val="DB2777"/>
-            </a:solidFill>
-            <a:prstDash val="solid"/>
-          </a:ln>
-        </p:spPr>
-      </p:sp>
-      <p:sp>
-        <p:nvSpPr>
-          <p:cNvPr id="56" name="Text 54"/>
-          <p:cNvSpPr/>
-          <p:nvPr/>
-        </p:nvSpPr>
-        <p:spPr>
-          <a:xfrm>
-            <a:off x="7033565" y="4169664"/>
-            <a:ext cx="676656" cy="384048"/>
-          </a:xfrm>
-          <a:prstGeom prst="rect">
-            <a:avLst/>
-          </a:prstGeom>
-          <a:noFill/>
-          <a:ln/>
-        </p:spPr>
-        <p:txBody>
-          <a:bodyPr wrap="square" lIns="0" tIns="0" rIns="0" bIns="0" rtlCol="0" anchor="ctr"/>
-          <a:lstStyle/>
-          <a:p>
-            <a:pPr algn="ctr" indent="0" marL="0">
-              <a:buNone/>
-            </a:pPr>
-            <a:r>
-              <a:rPr lang="en-US" sz="900" b="1" dirty="0">
-                <a:solidFill>
-                  <a:srgbClr val="9D174D"/>
-                </a:solidFill>
-                <a:latin typeface="Trebuchet MS" pitchFamily="34" charset="0"/>
-                <a:ea typeface="Trebuchet MS" pitchFamily="34" charset="-122"/>
-                <a:cs typeface="Trebuchet MS" pitchFamily="34" charset="-120"/>
-              </a:rPr>
-              <a:t>io</a:t>
-            </a:r>
-            <a:endParaRPr lang="en-US" sz="900" dirty="0"/>
-          </a:p>
-        </p:txBody>
-      </p:sp>
-      <p:sp>
-        <p:nvSpPr>
-          <p:cNvPr id="57" name="Shape 55"/>
-          <p:cNvSpPr/>
-          <p:nvPr/>
-        </p:nvSpPr>
-        <p:spPr>
-          <a:xfrm>
-            <a:off x="7759598" y="4169664"/>
-            <a:ext cx="676656" cy="384048"/>
-          </a:xfrm>
-          <a:prstGeom prst="rect">
-            <a:avLst>
-              <a:gd name="adj" fmla="val 9524"/>
-            </a:avLst>
-          </a:prstGeom>
-          <a:solidFill>
-            <a:srgbClr val="FFFFFF"/>
-          </a:solidFill>
-          <a:ln w="12700">
-            <a:solidFill>
-              <a:srgbClr val="DB2777"/>
-            </a:solidFill>
-            <a:prstDash val="solid"/>
-          </a:ln>
-        </p:spPr>
-      </p:sp>
-      <p:sp>
-        <p:nvSpPr>
-          <p:cNvPr id="58" name="Text 56"/>
-          <p:cNvSpPr/>
-          <p:nvPr/>
-        </p:nvSpPr>
-        <p:spPr>
-          <a:xfrm>
-            <a:off x="7759598" y="4169664"/>
-            <a:ext cx="676656" cy="384048"/>
-          </a:xfrm>
-          <a:prstGeom prst="rect">
-            <a:avLst/>
-          </a:prstGeom>
-          <a:noFill/>
-          <a:ln/>
-        </p:spPr>
-        <p:txBody>
-          <a:bodyPr wrap="square" lIns="0" tIns="0" rIns="0" bIns="0" rtlCol="0" anchor="ctr"/>
-          <a:lstStyle/>
-          <a:p>
-            <a:pPr algn="ctr" indent="0" marL="0">
-              <a:buNone/>
-            </a:pPr>
-            <a:r>
-              <a:rPr lang="en-US" sz="900" b="1" dirty="0">
-                <a:solidFill>
-                  <a:srgbClr val="9D174D"/>
-                </a:solidFill>
-                <a:latin typeface="Trebuchet MS" pitchFamily="34" charset="0"/>
-                <a:ea typeface="Trebuchet MS" pitchFamily="34" charset="-122"/>
-                <a:cs typeface="Trebuchet MS" pitchFamily="34" charset="-120"/>
-              </a:rPr>
-              <a:t>n</a:t>
             </a:r>
             <a:endParaRPr lang="en-US" sz="900" dirty="0"/>
           </a:p>
@@ -12032,7 +11960,7 @@
                 <a:ea typeface="Trebuchet MS" pitchFamily="34" charset="-122"/>
                 <a:cs typeface="Trebuchet MS" pitchFamily="34" charset="-120"/>
               </a:rPr>
-              <a:t>observant</a:t>
+              <a:t>observation</a:t>
             </a:r>
             <a:endParaRPr lang="en-US" sz="2800" dirty="0"/>
           </a:p>
@@ -12859,7 +12787,7 @@
                 <a:ea typeface="Trebuchet MS" pitchFamily="34" charset="-122"/>
                 <a:cs typeface="Trebuchet MS" pitchFamily="34" charset="-120"/>
               </a:rPr>
-              <a:t>observant</a:t>
+              <a:t>observation</a:t>
             </a:r>
             <a:endParaRPr lang="en-US" sz="2800" dirty="0"/>
           </a:p>
@@ -13045,46 +12973,7 @@
       </p:sp>
       <p:sp>
         <p:nvSpPr>
-          <p:cNvPr id="19" name="Text 17"/>
-          <p:cNvSpPr/>
-          <p:nvPr/>
-        </p:nvSpPr>
-        <p:spPr>
-          <a:xfrm>
-            <a:off x="2938272" y="2752344"/>
-            <a:ext cx="1828800" cy="182880"/>
-          </a:xfrm>
-          <a:prstGeom prst="rect">
-            <a:avLst/>
-          </a:prstGeom>
-          <a:noFill/>
-          <a:ln/>
-        </p:spPr>
-        <p:txBody>
-          <a:bodyPr wrap="square" lIns="0" tIns="0" rIns="0" bIns="0" rtlCol="0" anchor="t"/>
-          <a:lstStyle/>
-          <a:p>
-            <a:pPr algn="ctr" indent="0" marL="0">
-              <a:buNone/>
-            </a:pPr>
-            <a:r>
-              <a:rPr lang="en-US" sz="700" i="1" dirty="0">
-                <a:solidFill>
-                  <a:srgbClr val="94A3B8"/>
-                </a:solidFill>
-                <a:latin typeface="Calibri" pitchFamily="34" charset="0"/>
-                <a:ea typeface="Calibri" pitchFamily="34" charset="-122"/>
-                <a:cs typeface="Calibri" pitchFamily="34" charset="-120"/>
-              </a:rPr>
-              <a:t>'e' dropped before vowel suffix</a:t>
-            </a:r>
-            <a:endParaRPr lang="en-US" sz="700" dirty="0"/>
-          </a:p>
-        </p:txBody>
-      </p:sp>
-      <p:sp>
-        <p:nvSpPr>
-          <p:cNvPr id="20" name="Shape 18"/>
+          <p:cNvPr id="19" name="Shape 17"/>
           <p:cNvSpPr/>
           <p:nvPr/>
         </p:nvSpPr>
@@ -13118,7 +13007,7 @@
       </p:sp>
       <p:sp>
         <p:nvSpPr>
-          <p:cNvPr id="21" name="Text 19"/>
+          <p:cNvPr id="20" name="Text 18"/>
           <p:cNvSpPr/>
           <p:nvPr/>
         </p:nvSpPr>
@@ -13149,7 +13038,7 @@
                 <a:ea typeface="Trebuchet MS" pitchFamily="34" charset="-122"/>
                 <a:cs typeface="Trebuchet MS" pitchFamily="34" charset="-120"/>
               </a:rPr>
-              <a:t>ant</a:t>
+              <a:t>ation</a:t>
             </a:r>
             <a:endParaRPr lang="en-US" sz="1300" dirty="0"/>
           </a:p>
@@ -13157,7 +13046,7 @@
       </p:sp>
       <p:sp>
         <p:nvSpPr>
-          <p:cNvPr id="22" name="Text 20"/>
+          <p:cNvPr id="21" name="Text 19"/>
           <p:cNvSpPr/>
           <p:nvPr/>
         </p:nvSpPr>
@@ -13188,9 +13077,48 @@
                 <a:ea typeface="Calibri" pitchFamily="34" charset="-122"/>
                 <a:cs typeface="Calibri" pitchFamily="34" charset="-120"/>
               </a:rPr>
-              <a:t>having a quality; a person who</a:t>
+              <a:t>the act or result of</a:t>
             </a:r>
             <a:endParaRPr lang="en-US" sz="850" dirty="0"/>
+          </a:p>
+        </p:txBody>
+      </p:sp>
+      <p:sp>
+        <p:nvSpPr>
+          <p:cNvPr id="22" name="Text 20"/>
+          <p:cNvSpPr/>
+          <p:nvPr/>
+        </p:nvSpPr>
+        <p:spPr>
+          <a:xfrm>
+            <a:off x="5803392" y="2752344"/>
+            <a:ext cx="1828800" cy="182880"/>
+          </a:xfrm>
+          <a:prstGeom prst="rect">
+            <a:avLst/>
+          </a:prstGeom>
+          <a:noFill/>
+          <a:ln/>
+        </p:spPr>
+        <p:txBody>
+          <a:bodyPr wrap="square" lIns="0" tIns="0" rIns="0" bIns="0" rtlCol="0" anchor="t"/>
+          <a:lstStyle/>
+          <a:p>
+            <a:pPr algn="ctr" indent="0" marL="0">
+              <a:buNone/>
+            </a:pPr>
+            <a:r>
+              <a:rPr lang="en-US" sz="700" i="1" dirty="0">
+                <a:solidFill>
+                  <a:srgbClr val="94A3B8"/>
+                </a:solidFill>
+                <a:latin typeface="Calibri" pitchFamily="34" charset="0"/>
+                <a:ea typeface="Calibri" pitchFamily="34" charset="-122"/>
+                <a:cs typeface="Calibri" pitchFamily="34" charset="-120"/>
+              </a:rPr>
+              <a:t>'e' dropped before vowel suffix</a:t>
+            </a:r>
+            <a:endParaRPr lang="en-US" sz="700" dirty="0"/>
           </a:p>
         </p:txBody>
       </p:sp>
@@ -13883,7 +13811,7 @@
                 <a:ea typeface="Trebuchet MS" pitchFamily="34" charset="-122"/>
                 <a:cs typeface="Trebuchet MS" pitchFamily="34" charset="-120"/>
               </a:rPr>
-              <a:t>observant</a:t>
+              <a:t>observation</a:t>
             </a:r>
             <a:endParaRPr lang="en-US" sz="2800" dirty="0"/>
           </a:p>
@@ -14069,46 +13997,7 @@
       </p:sp>
       <p:sp>
         <p:nvSpPr>
-          <p:cNvPr id="19" name="Text 17"/>
-          <p:cNvSpPr/>
-          <p:nvPr/>
-        </p:nvSpPr>
-        <p:spPr>
-          <a:xfrm>
-            <a:off x="2938272" y="2752344"/>
-            <a:ext cx="1828800" cy="182880"/>
-          </a:xfrm>
-          <a:prstGeom prst="rect">
-            <a:avLst/>
-          </a:prstGeom>
-          <a:noFill/>
-          <a:ln/>
-        </p:spPr>
-        <p:txBody>
-          <a:bodyPr wrap="square" lIns="0" tIns="0" rIns="0" bIns="0" rtlCol="0" anchor="t"/>
-          <a:lstStyle/>
-          <a:p>
-            <a:pPr algn="ctr" indent="0" marL="0">
-              <a:buNone/>
-            </a:pPr>
-            <a:r>
-              <a:rPr lang="en-US" sz="700" i="1" dirty="0">
-                <a:solidFill>
-                  <a:srgbClr val="94A3B8"/>
-                </a:solidFill>
-                <a:latin typeface="Calibri" pitchFamily="34" charset="0"/>
-                <a:ea typeface="Calibri" pitchFamily="34" charset="-122"/>
-                <a:cs typeface="Calibri" pitchFamily="34" charset="-120"/>
-              </a:rPr>
-              <a:t>'e' dropped before vowel suffix</a:t>
-            </a:r>
-            <a:endParaRPr lang="en-US" sz="700" dirty="0"/>
-          </a:p>
-        </p:txBody>
-      </p:sp>
-      <p:sp>
-        <p:nvSpPr>
-          <p:cNvPr id="20" name="Shape 18"/>
+          <p:cNvPr id="19" name="Shape 17"/>
           <p:cNvSpPr/>
           <p:nvPr/>
         </p:nvSpPr>
@@ -14142,7 +14031,7 @@
       </p:sp>
       <p:sp>
         <p:nvSpPr>
-          <p:cNvPr id="21" name="Text 19"/>
+          <p:cNvPr id="20" name="Text 18"/>
           <p:cNvSpPr/>
           <p:nvPr/>
         </p:nvSpPr>
@@ -14173,7 +14062,7 @@
                 <a:ea typeface="Trebuchet MS" pitchFamily="34" charset="-122"/>
                 <a:cs typeface="Trebuchet MS" pitchFamily="34" charset="-120"/>
               </a:rPr>
-              <a:t>ant</a:t>
+              <a:t>ation</a:t>
             </a:r>
             <a:endParaRPr lang="en-US" sz="1300" dirty="0"/>
           </a:p>
@@ -14181,7 +14070,7 @@
       </p:sp>
       <p:sp>
         <p:nvSpPr>
-          <p:cNvPr id="22" name="Text 20"/>
+          <p:cNvPr id="21" name="Text 19"/>
           <p:cNvSpPr/>
           <p:nvPr/>
         </p:nvSpPr>
@@ -14212,9 +14101,48 @@
                 <a:ea typeface="Calibri" pitchFamily="34" charset="-122"/>
                 <a:cs typeface="Calibri" pitchFamily="34" charset="-120"/>
               </a:rPr>
-              <a:t>having a quality; a person who</a:t>
+              <a:t>the act or result of</a:t>
             </a:r>
             <a:endParaRPr lang="en-US" sz="850" dirty="0"/>
+          </a:p>
+        </p:txBody>
+      </p:sp>
+      <p:sp>
+        <p:nvSpPr>
+          <p:cNvPr id="22" name="Text 20"/>
+          <p:cNvSpPr/>
+          <p:nvPr/>
+        </p:nvSpPr>
+        <p:spPr>
+          <a:xfrm>
+            <a:off x="5803392" y="2752344"/>
+            <a:ext cx="1828800" cy="182880"/>
+          </a:xfrm>
+          <a:prstGeom prst="rect">
+            <a:avLst/>
+          </a:prstGeom>
+          <a:noFill/>
+          <a:ln/>
+        </p:spPr>
+        <p:txBody>
+          <a:bodyPr wrap="square" lIns="0" tIns="0" rIns="0" bIns="0" rtlCol="0" anchor="t"/>
+          <a:lstStyle/>
+          <a:p>
+            <a:pPr algn="ctr" indent="0" marL="0">
+              <a:buNone/>
+            </a:pPr>
+            <a:r>
+              <a:rPr lang="en-US" sz="700" i="1" dirty="0">
+                <a:solidFill>
+                  <a:srgbClr val="94A3B8"/>
+                </a:solidFill>
+                <a:latin typeface="Calibri" pitchFamily="34" charset="0"/>
+                <a:ea typeface="Calibri" pitchFamily="34" charset="-122"/>
+                <a:cs typeface="Calibri" pitchFamily="34" charset="-120"/>
+              </a:rPr>
+              <a:t>'e' dropped before vowel suffix</a:t>
+            </a:r>
+            <a:endParaRPr lang="en-US" sz="700" dirty="0"/>
           </a:p>
         </p:txBody>
       </p:sp>
@@ -14319,8 +14247,8 @@
         </p:nvSpPr>
         <p:spPr>
           <a:xfrm>
-            <a:off x="2313432" y="3364992"/>
-            <a:ext cx="1645920" cy="475488"/>
+            <a:off x="1975104" y="3364992"/>
+            <a:ext cx="1554480" cy="475488"/>
           </a:xfrm>
           <a:prstGeom prst="rect">
             <a:avLst>
@@ -14346,8 +14274,8 @@
         </p:nvSpPr>
         <p:spPr>
           <a:xfrm>
-            <a:off x="2313432" y="3364992"/>
-            <a:ext cx="1645920" cy="475488"/>
+            <a:off x="1975104" y="3364992"/>
+            <a:ext cx="1554480" cy="475488"/>
           </a:xfrm>
           <a:prstGeom prst="rect">
             <a:avLst/>
@@ -14385,8 +14313,8 @@
         </p:nvSpPr>
         <p:spPr>
           <a:xfrm>
-            <a:off x="3959352" y="3364992"/>
-            <a:ext cx="411480" cy="475488"/>
+            <a:off x="3529584" y="3364992"/>
+            <a:ext cx="73152" cy="475488"/>
           </a:xfrm>
           <a:prstGeom prst="rect">
             <a:avLst/>
@@ -14424,8 +14352,8 @@
         </p:nvSpPr>
         <p:spPr>
           <a:xfrm>
-            <a:off x="4370832" y="3364992"/>
-            <a:ext cx="1645920" cy="475488"/>
+            <a:off x="3602736" y="3364992"/>
+            <a:ext cx="1554480" cy="475488"/>
           </a:xfrm>
           <a:prstGeom prst="rect">
             <a:avLst>
@@ -14451,8 +14379,8 @@
         </p:nvSpPr>
         <p:spPr>
           <a:xfrm>
-            <a:off x="4370832" y="3364992"/>
-            <a:ext cx="1645920" cy="475488"/>
+            <a:off x="3602736" y="3364992"/>
+            <a:ext cx="1554480" cy="475488"/>
           </a:xfrm>
           <a:prstGeom prst="rect">
             <a:avLst/>
@@ -14490,8 +14418,8 @@
         </p:nvSpPr>
         <p:spPr>
           <a:xfrm>
-            <a:off x="6016752" y="3364992"/>
-            <a:ext cx="411480" cy="475488"/>
+            <a:off x="5157216" y="3364992"/>
+            <a:ext cx="73152" cy="475488"/>
           </a:xfrm>
           <a:prstGeom prst="rect">
             <a:avLst/>
@@ -14529,8 +14457,8 @@
         </p:nvSpPr>
         <p:spPr>
           <a:xfrm>
-            <a:off x="6428232" y="3364992"/>
-            <a:ext cx="1645920" cy="475488"/>
+            <a:off x="5230368" y="3364992"/>
+            <a:ext cx="1554480" cy="475488"/>
           </a:xfrm>
           <a:prstGeom prst="rect">
             <a:avLst>
@@ -14556,8 +14484,8 @@
         </p:nvSpPr>
         <p:spPr>
           <a:xfrm>
-            <a:off x="6428232" y="3364992"/>
-            <a:ext cx="1645920" cy="475488"/>
+            <a:off x="5230368" y="3364992"/>
+            <a:ext cx="1554480" cy="475488"/>
           </a:xfrm>
           <a:prstGeom prst="rect">
             <a:avLst/>
@@ -14581,7 +14509,7 @@
                 <a:ea typeface="Trebuchet MS" pitchFamily="34" charset="-122"/>
                 <a:cs typeface="Trebuchet MS" pitchFamily="34" charset="-120"/>
               </a:rPr>
-              <a:t>vant</a:t>
+              <a:t>va</a:t>
             </a:r>
             <a:endParaRPr lang="en-US" sz="1400" dirty="0"/>
           </a:p>
@@ -14589,7 +14517,112 @@
       </p:sp>
       <p:sp>
         <p:nvSpPr>
-          <p:cNvPr id="34" name="Shape 32"/>
+          <p:cNvPr id="34" name="Text 32"/>
+          <p:cNvSpPr/>
+          <p:nvPr/>
+        </p:nvSpPr>
+        <p:spPr>
+          <a:xfrm>
+            <a:off x="6784848" y="3364992"/>
+            <a:ext cx="73152" cy="475488"/>
+          </a:xfrm>
+          <a:prstGeom prst="rect">
+            <a:avLst/>
+          </a:prstGeom>
+          <a:noFill/>
+          <a:ln/>
+        </p:spPr>
+        <p:txBody>
+          <a:bodyPr wrap="square" lIns="0" tIns="0" rIns="0" bIns="0" rtlCol="0" anchor="ctr"/>
+          <a:lstStyle/>
+          <a:p>
+            <a:pPr algn="ctr" indent="0" marL="0">
+              <a:buNone/>
+            </a:pPr>
+            <a:r>
+              <a:rPr lang="en-US" sz="1600" b="1" dirty="0">
+                <a:solidFill>
+                  <a:srgbClr val="0D9488"/>
+                </a:solidFill>
+                <a:latin typeface="Trebuchet MS" pitchFamily="34" charset="0"/>
+                <a:ea typeface="Trebuchet MS" pitchFamily="34" charset="-122"/>
+                <a:cs typeface="Trebuchet MS" pitchFamily="34" charset="-120"/>
+              </a:rPr>
+              <a:t>·</a:t>
+            </a:r>
+            <a:endParaRPr lang="en-US" sz="1600" dirty="0"/>
+          </a:p>
+        </p:txBody>
+      </p:sp>
+      <p:sp>
+        <p:nvSpPr>
+          <p:cNvPr id="35" name="Shape 33"/>
+          <p:cNvSpPr/>
+          <p:nvPr/>
+        </p:nvSpPr>
+        <p:spPr>
+          <a:xfrm>
+            <a:off x="6858000" y="3364992"/>
+            <a:ext cx="1554480" cy="475488"/>
+          </a:xfrm>
+          <a:prstGeom prst="rect">
+            <a:avLst>
+              <a:gd name="adj" fmla="val 9615"/>
+            </a:avLst>
+          </a:prstGeom>
+          <a:solidFill>
+            <a:srgbClr val="FFFFFF"/>
+          </a:solidFill>
+          <a:ln w="12700">
+            <a:solidFill>
+              <a:srgbClr val="0D9488"/>
+            </a:solidFill>
+            <a:prstDash val="solid"/>
+          </a:ln>
+        </p:spPr>
+      </p:sp>
+      <p:sp>
+        <p:nvSpPr>
+          <p:cNvPr id="36" name="Text 34"/>
+          <p:cNvSpPr/>
+          <p:nvPr/>
+        </p:nvSpPr>
+        <p:spPr>
+          <a:xfrm>
+            <a:off x="6858000" y="3364992"/>
+            <a:ext cx="1554480" cy="475488"/>
+          </a:xfrm>
+          <a:prstGeom prst="rect">
+            <a:avLst/>
+          </a:prstGeom>
+          <a:noFill/>
+          <a:ln/>
+        </p:spPr>
+        <p:txBody>
+          <a:bodyPr wrap="square" lIns="0" tIns="0" rIns="0" bIns="0" rtlCol="0" anchor="ctr"/>
+          <a:lstStyle/>
+          <a:p>
+            <a:pPr algn="ctr" indent="0" marL="0">
+              <a:buNone/>
+            </a:pPr>
+            <a:r>
+              <a:rPr lang="en-US" sz="1400" b="1" dirty="0">
+                <a:solidFill>
+                  <a:srgbClr val="0D9488"/>
+                </a:solidFill>
+                <a:latin typeface="Trebuchet MS" pitchFamily="34" charset="0"/>
+                <a:ea typeface="Trebuchet MS" pitchFamily="34" charset="-122"/>
+                <a:cs typeface="Trebuchet MS" pitchFamily="34" charset="-120"/>
+              </a:rPr>
+              <a:t>tion</a:t>
+            </a:r>
+            <a:endParaRPr lang="en-US" sz="1400" dirty="0"/>
+          </a:p>
+        </p:txBody>
+      </p:sp>
+      <p:sp>
+        <p:nvSpPr>
+          <p:cNvPr id="37" name="Shape 35"/>
           <p:cNvSpPr/>
           <p:nvPr/>
         </p:nvSpPr>
@@ -14616,7 +14649,7 @@
       </p:sp>
       <p:sp>
         <p:nvSpPr>
-          <p:cNvPr id="35" name="Text 33"/>
+          <p:cNvPr id="38" name="Text 36"/>
           <p:cNvSpPr/>
           <p:nvPr/>
         </p:nvSpPr>
@@ -14655,7 +14688,7 @@
       </p:sp>
       <p:sp>
         <p:nvSpPr>
-          <p:cNvPr id="36" name="Shape 34"/>
+          <p:cNvPr id="39" name="Shape 37"/>
           <p:cNvSpPr/>
           <p:nvPr/>
         </p:nvSpPr>
@@ -14682,7 +14715,7 @@
       </p:sp>
       <p:sp>
         <p:nvSpPr>
-          <p:cNvPr id="37" name="Text 35"/>
+          <p:cNvPr id="40" name="Text 38"/>
           <p:cNvSpPr/>
           <p:nvPr/>
         </p:nvSpPr>
@@ -15409,7 +15442,7 @@
                 <a:ea typeface="Trebuchet MS" pitchFamily="34" charset="-122"/>
                 <a:cs typeface="Trebuchet MS" pitchFamily="34" charset="-120"/>
               </a:rPr>
-              <a:t>observant</a:t>
+              <a:t>observation</a:t>
             </a:r>
             <a:endParaRPr lang="en-US" sz="2800" dirty="0"/>
           </a:p>
@@ -15595,46 +15628,7 @@
       </p:sp>
       <p:sp>
         <p:nvSpPr>
-          <p:cNvPr id="19" name="Text 17"/>
-          <p:cNvSpPr/>
-          <p:nvPr/>
-        </p:nvSpPr>
-        <p:spPr>
-          <a:xfrm>
-            <a:off x="2938272" y="2752344"/>
-            <a:ext cx="1828800" cy="182880"/>
-          </a:xfrm>
-          <a:prstGeom prst="rect">
-            <a:avLst/>
-          </a:prstGeom>
-          <a:noFill/>
-          <a:ln/>
-        </p:spPr>
-        <p:txBody>
-          <a:bodyPr wrap="square" lIns="0" tIns="0" rIns="0" bIns="0" rtlCol="0" anchor="t"/>
-          <a:lstStyle/>
-          <a:p>
-            <a:pPr algn="ctr" indent="0" marL="0">
-              <a:buNone/>
-            </a:pPr>
-            <a:r>
-              <a:rPr lang="en-US" sz="700" i="1" dirty="0">
-                <a:solidFill>
-                  <a:srgbClr val="94A3B8"/>
-                </a:solidFill>
-                <a:latin typeface="Calibri" pitchFamily="34" charset="0"/>
-                <a:ea typeface="Calibri" pitchFamily="34" charset="-122"/>
-                <a:cs typeface="Calibri" pitchFamily="34" charset="-120"/>
-              </a:rPr>
-              <a:t>'e' dropped before vowel suffix</a:t>
-            </a:r>
-            <a:endParaRPr lang="en-US" sz="700" dirty="0"/>
-          </a:p>
-        </p:txBody>
-      </p:sp>
-      <p:sp>
-        <p:nvSpPr>
-          <p:cNvPr id="20" name="Shape 18"/>
+          <p:cNvPr id="19" name="Shape 17"/>
           <p:cNvSpPr/>
           <p:nvPr/>
         </p:nvSpPr>
@@ -15668,7 +15662,7 @@
       </p:sp>
       <p:sp>
         <p:nvSpPr>
-          <p:cNvPr id="21" name="Text 19"/>
+          <p:cNvPr id="20" name="Text 18"/>
           <p:cNvSpPr/>
           <p:nvPr/>
         </p:nvSpPr>
@@ -15699,7 +15693,7 @@
                 <a:ea typeface="Trebuchet MS" pitchFamily="34" charset="-122"/>
                 <a:cs typeface="Trebuchet MS" pitchFamily="34" charset="-120"/>
               </a:rPr>
-              <a:t>ant</a:t>
+              <a:t>ation</a:t>
             </a:r>
             <a:endParaRPr lang="en-US" sz="1300" dirty="0"/>
           </a:p>
@@ -15707,7 +15701,7 @@
       </p:sp>
       <p:sp>
         <p:nvSpPr>
-          <p:cNvPr id="22" name="Text 20"/>
+          <p:cNvPr id="21" name="Text 19"/>
           <p:cNvSpPr/>
           <p:nvPr/>
         </p:nvSpPr>
@@ -15738,9 +15732,48 @@
                 <a:ea typeface="Calibri" pitchFamily="34" charset="-122"/>
                 <a:cs typeface="Calibri" pitchFamily="34" charset="-120"/>
               </a:rPr>
-              <a:t>having a quality; a person who</a:t>
+              <a:t>the act or result of</a:t>
             </a:r>
             <a:endParaRPr lang="en-US" sz="850" dirty="0"/>
+          </a:p>
+        </p:txBody>
+      </p:sp>
+      <p:sp>
+        <p:nvSpPr>
+          <p:cNvPr id="22" name="Text 20"/>
+          <p:cNvSpPr/>
+          <p:nvPr/>
+        </p:nvSpPr>
+        <p:spPr>
+          <a:xfrm>
+            <a:off x="5803392" y="2752344"/>
+            <a:ext cx="1828800" cy="182880"/>
+          </a:xfrm>
+          <a:prstGeom prst="rect">
+            <a:avLst/>
+          </a:prstGeom>
+          <a:noFill/>
+          <a:ln/>
+        </p:spPr>
+        <p:txBody>
+          <a:bodyPr wrap="square" lIns="0" tIns="0" rIns="0" bIns="0" rtlCol="0" anchor="t"/>
+          <a:lstStyle/>
+          <a:p>
+            <a:pPr algn="ctr" indent="0" marL="0">
+              <a:buNone/>
+            </a:pPr>
+            <a:r>
+              <a:rPr lang="en-US" sz="700" i="1" dirty="0">
+                <a:solidFill>
+                  <a:srgbClr val="94A3B8"/>
+                </a:solidFill>
+                <a:latin typeface="Calibri" pitchFamily="34" charset="0"/>
+                <a:ea typeface="Calibri" pitchFamily="34" charset="-122"/>
+                <a:cs typeface="Calibri" pitchFamily="34" charset="-120"/>
+              </a:rPr>
+              <a:t>'e' dropped before vowel suffix</a:t>
+            </a:r>
+            <a:endParaRPr lang="en-US" sz="700" dirty="0"/>
           </a:p>
         </p:txBody>
       </p:sp>
@@ -15845,8 +15878,8 @@
         </p:nvSpPr>
         <p:spPr>
           <a:xfrm>
-            <a:off x="2313432" y="3364992"/>
-            <a:ext cx="1645920" cy="475488"/>
+            <a:off x="1975104" y="3364992"/>
+            <a:ext cx="1554480" cy="475488"/>
           </a:xfrm>
           <a:prstGeom prst="rect">
             <a:avLst>
@@ -15872,8 +15905,8 @@
         </p:nvSpPr>
         <p:spPr>
           <a:xfrm>
-            <a:off x="2313432" y="3364992"/>
-            <a:ext cx="1645920" cy="475488"/>
+            <a:off x="1975104" y="3364992"/>
+            <a:ext cx="1554480" cy="475488"/>
           </a:xfrm>
           <a:prstGeom prst="rect">
             <a:avLst/>
@@ -15911,8 +15944,8 @@
         </p:nvSpPr>
         <p:spPr>
           <a:xfrm>
-            <a:off x="3959352" y="3364992"/>
-            <a:ext cx="411480" cy="475488"/>
+            <a:off x="3529584" y="3364992"/>
+            <a:ext cx="73152" cy="475488"/>
           </a:xfrm>
           <a:prstGeom prst="rect">
             <a:avLst/>
@@ -15950,8 +15983,8 @@
         </p:nvSpPr>
         <p:spPr>
           <a:xfrm>
-            <a:off x="4370832" y="3364992"/>
-            <a:ext cx="1645920" cy="475488"/>
+            <a:off x="3602736" y="3364992"/>
+            <a:ext cx="1554480" cy="475488"/>
           </a:xfrm>
           <a:prstGeom prst="rect">
             <a:avLst>
@@ -15977,8 +16010,8 @@
         </p:nvSpPr>
         <p:spPr>
           <a:xfrm>
-            <a:off x="4370832" y="3364992"/>
-            <a:ext cx="1645920" cy="475488"/>
+            <a:off x="3602736" y="3364992"/>
+            <a:ext cx="1554480" cy="475488"/>
           </a:xfrm>
           <a:prstGeom prst="rect">
             <a:avLst/>
@@ -16016,8 +16049,8 @@
         </p:nvSpPr>
         <p:spPr>
           <a:xfrm>
-            <a:off x="6016752" y="3364992"/>
-            <a:ext cx="411480" cy="475488"/>
+            <a:off x="5157216" y="3364992"/>
+            <a:ext cx="73152" cy="475488"/>
           </a:xfrm>
           <a:prstGeom prst="rect">
             <a:avLst/>
@@ -16055,8 +16088,8 @@
         </p:nvSpPr>
         <p:spPr>
           <a:xfrm>
-            <a:off x="6428232" y="3364992"/>
-            <a:ext cx="1645920" cy="475488"/>
+            <a:off x="5230368" y="3364992"/>
+            <a:ext cx="1554480" cy="475488"/>
           </a:xfrm>
           <a:prstGeom prst="rect">
             <a:avLst>
@@ -16082,8 +16115,8 @@
         </p:nvSpPr>
         <p:spPr>
           <a:xfrm>
-            <a:off x="6428232" y="3364992"/>
-            <a:ext cx="1645920" cy="475488"/>
+            <a:off x="5230368" y="3364992"/>
+            <a:ext cx="1554480" cy="475488"/>
           </a:xfrm>
           <a:prstGeom prst="rect">
             <a:avLst/>
@@ -16107,7 +16140,7 @@
                 <a:ea typeface="Trebuchet MS" pitchFamily="34" charset="-122"/>
                 <a:cs typeface="Trebuchet MS" pitchFamily="34" charset="-120"/>
               </a:rPr>
-              <a:t>vant</a:t>
+              <a:t>va</a:t>
             </a:r>
             <a:endParaRPr lang="en-US" sz="1400" dirty="0"/>
           </a:p>
@@ -16115,7 +16148,112 @@
       </p:sp>
       <p:sp>
         <p:nvSpPr>
-          <p:cNvPr id="34" name="Shape 32"/>
+          <p:cNvPr id="34" name="Text 32"/>
+          <p:cNvSpPr/>
+          <p:nvPr/>
+        </p:nvSpPr>
+        <p:spPr>
+          <a:xfrm>
+            <a:off x="6784848" y="3364992"/>
+            <a:ext cx="73152" cy="475488"/>
+          </a:xfrm>
+          <a:prstGeom prst="rect">
+            <a:avLst/>
+          </a:prstGeom>
+          <a:noFill/>
+          <a:ln/>
+        </p:spPr>
+        <p:txBody>
+          <a:bodyPr wrap="square" lIns="0" tIns="0" rIns="0" bIns="0" rtlCol="0" anchor="ctr"/>
+          <a:lstStyle/>
+          <a:p>
+            <a:pPr algn="ctr" indent="0" marL="0">
+              <a:buNone/>
+            </a:pPr>
+            <a:r>
+              <a:rPr lang="en-US" sz="1600" b="1" dirty="0">
+                <a:solidFill>
+                  <a:srgbClr val="0D9488"/>
+                </a:solidFill>
+                <a:latin typeface="Trebuchet MS" pitchFamily="34" charset="0"/>
+                <a:ea typeface="Trebuchet MS" pitchFamily="34" charset="-122"/>
+                <a:cs typeface="Trebuchet MS" pitchFamily="34" charset="-120"/>
+              </a:rPr>
+              <a:t>·</a:t>
+            </a:r>
+            <a:endParaRPr lang="en-US" sz="1600" dirty="0"/>
+          </a:p>
+        </p:txBody>
+      </p:sp>
+      <p:sp>
+        <p:nvSpPr>
+          <p:cNvPr id="35" name="Shape 33"/>
+          <p:cNvSpPr/>
+          <p:nvPr/>
+        </p:nvSpPr>
+        <p:spPr>
+          <a:xfrm>
+            <a:off x="6858000" y="3364992"/>
+            <a:ext cx="1554480" cy="475488"/>
+          </a:xfrm>
+          <a:prstGeom prst="rect">
+            <a:avLst>
+              <a:gd name="adj" fmla="val 9615"/>
+            </a:avLst>
+          </a:prstGeom>
+          <a:solidFill>
+            <a:srgbClr val="FFFFFF"/>
+          </a:solidFill>
+          <a:ln w="12700">
+            <a:solidFill>
+              <a:srgbClr val="0D9488"/>
+            </a:solidFill>
+            <a:prstDash val="solid"/>
+          </a:ln>
+        </p:spPr>
+      </p:sp>
+      <p:sp>
+        <p:nvSpPr>
+          <p:cNvPr id="36" name="Text 34"/>
+          <p:cNvSpPr/>
+          <p:nvPr/>
+        </p:nvSpPr>
+        <p:spPr>
+          <a:xfrm>
+            <a:off x="6858000" y="3364992"/>
+            <a:ext cx="1554480" cy="475488"/>
+          </a:xfrm>
+          <a:prstGeom prst="rect">
+            <a:avLst/>
+          </a:prstGeom>
+          <a:noFill/>
+          <a:ln/>
+        </p:spPr>
+        <p:txBody>
+          <a:bodyPr wrap="square" lIns="0" tIns="0" rIns="0" bIns="0" rtlCol="0" anchor="ctr"/>
+          <a:lstStyle/>
+          <a:p>
+            <a:pPr algn="ctr" indent="0" marL="0">
+              <a:buNone/>
+            </a:pPr>
+            <a:r>
+              <a:rPr lang="en-US" sz="1400" b="1" dirty="0">
+                <a:solidFill>
+                  <a:srgbClr val="0D9488"/>
+                </a:solidFill>
+                <a:latin typeface="Trebuchet MS" pitchFamily="34" charset="0"/>
+                <a:ea typeface="Trebuchet MS" pitchFamily="34" charset="-122"/>
+                <a:cs typeface="Trebuchet MS" pitchFamily="34" charset="-120"/>
+              </a:rPr>
+              <a:t>tion</a:t>
+            </a:r>
+            <a:endParaRPr lang="en-US" sz="1400" dirty="0"/>
+          </a:p>
+        </p:txBody>
+      </p:sp>
+      <p:sp>
+        <p:nvSpPr>
+          <p:cNvPr id="37" name="Shape 35"/>
           <p:cNvSpPr/>
           <p:nvPr/>
         </p:nvSpPr>
@@ -16142,7 +16280,7 @@
       </p:sp>
       <p:sp>
         <p:nvSpPr>
-          <p:cNvPr id="35" name="Text 33"/>
+          <p:cNvPr id="38" name="Text 36"/>
           <p:cNvSpPr/>
           <p:nvPr/>
         </p:nvSpPr>
@@ -16181,18 +16319,18 @@
       </p:sp>
       <p:sp>
         <p:nvSpPr>
-          <p:cNvPr id="36" name="Shape 34"/>
+          <p:cNvPr id="39" name="Shape 37"/>
           <p:cNvSpPr/>
           <p:nvPr/>
         </p:nvSpPr>
         <p:spPr>
           <a:xfrm>
             <a:off x="1874520" y="4096512"/>
-            <a:ext cx="6903720" cy="658368"/>
+            <a:ext cx="6903720" cy="804672"/>
           </a:xfrm>
           <a:prstGeom prst="rect">
             <a:avLst>
-              <a:gd name="adj" fmla="val 8333"/>
+              <a:gd name="adj" fmla="val 6818"/>
             </a:avLst>
           </a:prstGeom>
           <a:solidFill>
@@ -16208,18 +16346,18 @@
       </p:sp>
       <p:sp>
         <p:nvSpPr>
-          <p:cNvPr id="37" name="Shape 35"/>
-          <p:cNvSpPr/>
-          <p:nvPr/>
-        </p:nvSpPr>
-        <p:spPr>
-          <a:xfrm>
-            <a:off x="2023872" y="4169664"/>
-            <a:ext cx="685800" cy="475488"/>
+          <p:cNvPr id="40" name="Shape 38"/>
+          <p:cNvSpPr/>
+          <p:nvPr/>
+        </p:nvSpPr>
+        <p:spPr>
+          <a:xfrm>
+            <a:off x="1951330" y="4169664"/>
+            <a:ext cx="676656" cy="384048"/>
           </a:xfrm>
           <a:prstGeom prst="rect">
             <a:avLst>
-              <a:gd name="adj" fmla="val 7692"/>
+              <a:gd name="adj" fmla="val 9524"/>
             </a:avLst>
           </a:prstGeom>
           <a:solidFill>
@@ -16235,14 +16373,14 @@
       </p:sp>
       <p:sp>
         <p:nvSpPr>
-          <p:cNvPr id="38" name="Text 36"/>
-          <p:cNvSpPr/>
-          <p:nvPr/>
-        </p:nvSpPr>
-        <p:spPr>
-          <a:xfrm>
-            <a:off x="2023872" y="4169664"/>
-            <a:ext cx="685800" cy="475488"/>
+          <p:cNvPr id="41" name="Text 39"/>
+          <p:cNvSpPr/>
+          <p:nvPr/>
+        </p:nvSpPr>
+        <p:spPr>
+          <a:xfrm>
+            <a:off x="1951330" y="4169664"/>
+            <a:ext cx="676656" cy="384048"/>
           </a:xfrm>
           <a:prstGeom prst="rect">
             <a:avLst/>
@@ -16274,18 +16412,18 @@
       </p:sp>
       <p:sp>
         <p:nvSpPr>
-          <p:cNvPr id="39" name="Shape 37"/>
-          <p:cNvSpPr/>
-          <p:nvPr/>
-        </p:nvSpPr>
-        <p:spPr>
-          <a:xfrm>
-            <a:off x="2831592" y="4169664"/>
-            <a:ext cx="685800" cy="475488"/>
+          <p:cNvPr id="42" name="Shape 40"/>
+          <p:cNvSpPr/>
+          <p:nvPr/>
+        </p:nvSpPr>
+        <p:spPr>
+          <a:xfrm>
+            <a:off x="2677363" y="4169664"/>
+            <a:ext cx="676656" cy="384048"/>
           </a:xfrm>
           <a:prstGeom prst="rect">
             <a:avLst>
-              <a:gd name="adj" fmla="val 7692"/>
+              <a:gd name="adj" fmla="val 9524"/>
             </a:avLst>
           </a:prstGeom>
           <a:solidFill>
@@ -16301,14 +16439,14 @@
       </p:sp>
       <p:sp>
         <p:nvSpPr>
-          <p:cNvPr id="40" name="Text 38"/>
-          <p:cNvSpPr/>
-          <p:nvPr/>
-        </p:nvSpPr>
-        <p:spPr>
-          <a:xfrm>
-            <a:off x="2831592" y="4169664"/>
-            <a:ext cx="685800" cy="475488"/>
+          <p:cNvPr id="43" name="Text 41"/>
+          <p:cNvSpPr/>
+          <p:nvPr/>
+        </p:nvSpPr>
+        <p:spPr>
+          <a:xfrm>
+            <a:off x="2677363" y="4169664"/>
+            <a:ext cx="676656" cy="384048"/>
           </a:xfrm>
           <a:prstGeom prst="rect">
             <a:avLst/>
@@ -16340,18 +16478,18 @@
       </p:sp>
       <p:sp>
         <p:nvSpPr>
-          <p:cNvPr id="41" name="Shape 39"/>
-          <p:cNvSpPr/>
-          <p:nvPr/>
-        </p:nvSpPr>
-        <p:spPr>
-          <a:xfrm>
-            <a:off x="3639312" y="4169664"/>
-            <a:ext cx="685800" cy="475488"/>
+          <p:cNvPr id="44" name="Shape 42"/>
+          <p:cNvSpPr/>
+          <p:nvPr/>
+        </p:nvSpPr>
+        <p:spPr>
+          <a:xfrm>
+            <a:off x="3403397" y="4169664"/>
+            <a:ext cx="676656" cy="384048"/>
           </a:xfrm>
           <a:prstGeom prst="rect">
             <a:avLst>
-              <a:gd name="adj" fmla="val 7692"/>
+              <a:gd name="adj" fmla="val 9524"/>
             </a:avLst>
           </a:prstGeom>
           <a:solidFill>
@@ -16367,14 +16505,14 @@
       </p:sp>
       <p:sp>
         <p:nvSpPr>
-          <p:cNvPr id="42" name="Text 40"/>
-          <p:cNvSpPr/>
-          <p:nvPr/>
-        </p:nvSpPr>
-        <p:spPr>
-          <a:xfrm>
-            <a:off x="3639312" y="4169664"/>
-            <a:ext cx="685800" cy="475488"/>
+          <p:cNvPr id="45" name="Text 43"/>
+          <p:cNvSpPr/>
+          <p:nvPr/>
+        </p:nvSpPr>
+        <p:spPr>
+          <a:xfrm>
+            <a:off x="3403397" y="4169664"/>
+            <a:ext cx="676656" cy="384048"/>
           </a:xfrm>
           <a:prstGeom prst="rect">
             <a:avLst/>
@@ -16406,18 +16544,57 @@
       </p:sp>
       <p:sp>
         <p:nvSpPr>
-          <p:cNvPr id="43" name="Shape 41"/>
-          <p:cNvSpPr/>
-          <p:nvPr/>
-        </p:nvSpPr>
-        <p:spPr>
-          <a:xfrm>
-            <a:off x="4447032" y="4169664"/>
-            <a:ext cx="685800" cy="475488"/>
+          <p:cNvPr id="46" name="Text 44"/>
+          <p:cNvSpPr/>
+          <p:nvPr/>
+        </p:nvSpPr>
+        <p:spPr>
+          <a:xfrm>
+            <a:off x="3403397" y="4572000"/>
+            <a:ext cx="676656" cy="219456"/>
+          </a:xfrm>
+          <a:prstGeom prst="rect">
+            <a:avLst/>
+          </a:prstGeom>
+          <a:noFill/>
+          <a:ln/>
+        </p:spPr>
+        <p:txBody>
+          <a:bodyPr wrap="square" lIns="0" tIns="0" rIns="0" bIns="0" rtlCol="0" anchor="t"/>
+          <a:lstStyle/>
+          <a:p>
+            <a:pPr algn="ctr" indent="0" marL="0">
+              <a:buNone/>
+            </a:pPr>
+            <a:r>
+              <a:rPr lang="en-US" sz="750" i="1" dirty="0">
+                <a:solidFill>
+                  <a:srgbClr val="94A3B8"/>
+                </a:solidFill>
+                <a:latin typeface="Calibri" pitchFamily="34" charset="0"/>
+                <a:ea typeface="Calibri" pitchFamily="34" charset="-122"/>
+                <a:cs typeface="Calibri" pitchFamily="34" charset="-120"/>
+              </a:rPr>
+              <a:t>/z/</a:t>
+            </a:r>
+            <a:endParaRPr lang="en-US" sz="750" dirty="0"/>
+          </a:p>
+        </p:txBody>
+      </p:sp>
+      <p:sp>
+        <p:nvSpPr>
+          <p:cNvPr id="47" name="Shape 45"/>
+          <p:cNvSpPr/>
+          <p:nvPr/>
+        </p:nvSpPr>
+        <p:spPr>
+          <a:xfrm>
+            <a:off x="4129430" y="4169664"/>
+            <a:ext cx="676656" cy="384048"/>
           </a:xfrm>
           <a:prstGeom prst="rect">
             <a:avLst>
-              <a:gd name="adj" fmla="val 7692"/>
+              <a:gd name="adj" fmla="val 9524"/>
             </a:avLst>
           </a:prstGeom>
           <a:solidFill>
@@ -16433,14 +16610,14 @@
       </p:sp>
       <p:sp>
         <p:nvSpPr>
-          <p:cNvPr id="44" name="Text 42"/>
-          <p:cNvSpPr/>
-          <p:nvPr/>
-        </p:nvSpPr>
-        <p:spPr>
-          <a:xfrm>
-            <a:off x="4447032" y="4169664"/>
-            <a:ext cx="685800" cy="475488"/>
+          <p:cNvPr id="48" name="Text 46"/>
+          <p:cNvSpPr/>
+          <p:nvPr/>
+        </p:nvSpPr>
+        <p:spPr>
+          <a:xfrm>
+            <a:off x="4129430" y="4169664"/>
+            <a:ext cx="676656" cy="384048"/>
           </a:xfrm>
           <a:prstGeom prst="rect">
             <a:avLst/>
@@ -16472,18 +16649,18 @@
       </p:sp>
       <p:sp>
         <p:nvSpPr>
-          <p:cNvPr id="45" name="Shape 43"/>
-          <p:cNvSpPr/>
-          <p:nvPr/>
-        </p:nvSpPr>
-        <p:spPr>
-          <a:xfrm>
-            <a:off x="5254752" y="4169664"/>
-            <a:ext cx="685800" cy="475488"/>
+          <p:cNvPr id="49" name="Shape 47"/>
+          <p:cNvSpPr/>
+          <p:nvPr/>
+        </p:nvSpPr>
+        <p:spPr>
+          <a:xfrm>
+            <a:off x="4855464" y="4169664"/>
+            <a:ext cx="676656" cy="384048"/>
           </a:xfrm>
           <a:prstGeom prst="rect">
             <a:avLst>
-              <a:gd name="adj" fmla="val 7692"/>
+              <a:gd name="adj" fmla="val 9524"/>
             </a:avLst>
           </a:prstGeom>
           <a:solidFill>
@@ -16499,14 +16676,14 @@
       </p:sp>
       <p:sp>
         <p:nvSpPr>
-          <p:cNvPr id="46" name="Text 44"/>
-          <p:cNvSpPr/>
-          <p:nvPr/>
-        </p:nvSpPr>
-        <p:spPr>
-          <a:xfrm>
-            <a:off x="5254752" y="4169664"/>
-            <a:ext cx="685800" cy="475488"/>
+          <p:cNvPr id="50" name="Text 48"/>
+          <p:cNvSpPr/>
+          <p:nvPr/>
+        </p:nvSpPr>
+        <p:spPr>
+          <a:xfrm>
+            <a:off x="4855464" y="4169664"/>
+            <a:ext cx="676656" cy="384048"/>
           </a:xfrm>
           <a:prstGeom prst="rect">
             <a:avLst/>
@@ -16538,18 +16715,18 @@
       </p:sp>
       <p:sp>
         <p:nvSpPr>
-          <p:cNvPr id="47" name="Shape 45"/>
-          <p:cNvSpPr/>
-          <p:nvPr/>
-        </p:nvSpPr>
-        <p:spPr>
-          <a:xfrm>
-            <a:off x="6062472" y="4169664"/>
-            <a:ext cx="685800" cy="475488"/>
+          <p:cNvPr id="51" name="Shape 49"/>
+          <p:cNvSpPr/>
+          <p:nvPr/>
+        </p:nvSpPr>
+        <p:spPr>
+          <a:xfrm>
+            <a:off x="5581498" y="4169664"/>
+            <a:ext cx="676656" cy="384048"/>
           </a:xfrm>
           <a:prstGeom prst="rect">
             <a:avLst>
-              <a:gd name="adj" fmla="val 7692"/>
+              <a:gd name="adj" fmla="val 9524"/>
             </a:avLst>
           </a:prstGeom>
           <a:solidFill>
@@ -16565,14 +16742,14 @@
       </p:sp>
       <p:sp>
         <p:nvSpPr>
-          <p:cNvPr id="48" name="Text 46"/>
-          <p:cNvSpPr/>
-          <p:nvPr/>
-        </p:nvSpPr>
-        <p:spPr>
-          <a:xfrm>
-            <a:off x="6062472" y="4169664"/>
-            <a:ext cx="685800" cy="475488"/>
+          <p:cNvPr id="52" name="Text 50"/>
+          <p:cNvSpPr/>
+          <p:nvPr/>
+        </p:nvSpPr>
+        <p:spPr>
+          <a:xfrm>
+            <a:off x="5581498" y="4169664"/>
+            <a:ext cx="676656" cy="384048"/>
           </a:xfrm>
           <a:prstGeom prst="rect">
             <a:avLst/>
@@ -16604,18 +16781,18 @@
       </p:sp>
       <p:sp>
         <p:nvSpPr>
-          <p:cNvPr id="49" name="Shape 47"/>
-          <p:cNvSpPr/>
-          <p:nvPr/>
-        </p:nvSpPr>
-        <p:spPr>
-          <a:xfrm>
-            <a:off x="6870192" y="4169664"/>
-            <a:ext cx="685800" cy="475488"/>
+          <p:cNvPr id="53" name="Shape 51"/>
+          <p:cNvSpPr/>
+          <p:nvPr/>
+        </p:nvSpPr>
+        <p:spPr>
+          <a:xfrm>
+            <a:off x="6307531" y="4169664"/>
+            <a:ext cx="676656" cy="384048"/>
           </a:xfrm>
           <a:prstGeom prst="rect">
             <a:avLst>
-              <a:gd name="adj" fmla="val 7692"/>
+              <a:gd name="adj" fmla="val 9524"/>
             </a:avLst>
           </a:prstGeom>
           <a:solidFill>
@@ -16631,14 +16808,14 @@
       </p:sp>
       <p:sp>
         <p:nvSpPr>
-          <p:cNvPr id="50" name="Text 48"/>
-          <p:cNvSpPr/>
-          <p:nvPr/>
-        </p:nvSpPr>
-        <p:spPr>
-          <a:xfrm>
-            <a:off x="6870192" y="4169664"/>
-            <a:ext cx="685800" cy="475488"/>
+          <p:cNvPr id="54" name="Text 52"/>
+          <p:cNvSpPr/>
+          <p:nvPr/>
+        </p:nvSpPr>
+        <p:spPr>
+          <a:xfrm>
+            <a:off x="6307531" y="4169664"/>
+            <a:ext cx="676656" cy="384048"/>
           </a:xfrm>
           <a:prstGeom prst="rect">
             <a:avLst/>
@@ -16662,7 +16839,7 @@
                 <a:ea typeface="Trebuchet MS" pitchFamily="34" charset="-122"/>
                 <a:cs typeface="Trebuchet MS" pitchFamily="34" charset="-120"/>
               </a:rPr>
-              <a:t>n</a:t>
+              <a:t>t</a:t>
             </a:r>
             <a:endParaRPr lang="en-US" sz="900" dirty="0"/>
           </a:p>
@@ -16670,18 +16847,57 @@
       </p:sp>
       <p:sp>
         <p:nvSpPr>
-          <p:cNvPr id="51" name="Shape 49"/>
-          <p:cNvSpPr/>
-          <p:nvPr/>
-        </p:nvSpPr>
-        <p:spPr>
-          <a:xfrm>
-            <a:off x="7677912" y="4169664"/>
-            <a:ext cx="685800" cy="475488"/>
+          <p:cNvPr id="55" name="Text 53"/>
+          <p:cNvSpPr/>
+          <p:nvPr/>
+        </p:nvSpPr>
+        <p:spPr>
+          <a:xfrm>
+            <a:off x="6307531" y="4572000"/>
+            <a:ext cx="676656" cy="219456"/>
+          </a:xfrm>
+          <a:prstGeom prst="rect">
+            <a:avLst/>
+          </a:prstGeom>
+          <a:noFill/>
+          <a:ln/>
+        </p:spPr>
+        <p:txBody>
+          <a:bodyPr wrap="square" lIns="0" tIns="0" rIns="0" bIns="0" rtlCol="0" anchor="t"/>
+          <a:lstStyle/>
+          <a:p>
+            <a:pPr algn="ctr" indent="0" marL="0">
+              <a:buNone/>
+            </a:pPr>
+            <a:r>
+              <a:rPr lang="en-US" sz="750" i="1" dirty="0">
+                <a:solidFill>
+                  <a:srgbClr val="94A3B8"/>
+                </a:solidFill>
+                <a:latin typeface="Calibri" pitchFamily="34" charset="0"/>
+                <a:ea typeface="Calibri" pitchFamily="34" charset="-122"/>
+                <a:cs typeface="Calibri" pitchFamily="34" charset="-120"/>
+              </a:rPr>
+              <a:t>/sh/</a:t>
+            </a:r>
+            <a:endParaRPr lang="en-US" sz="750" dirty="0"/>
+          </a:p>
+        </p:txBody>
+      </p:sp>
+      <p:sp>
+        <p:nvSpPr>
+          <p:cNvPr id="56" name="Shape 54"/>
+          <p:cNvSpPr/>
+          <p:nvPr/>
+        </p:nvSpPr>
+        <p:spPr>
+          <a:xfrm>
+            <a:off x="7033565" y="4169664"/>
+            <a:ext cx="676656" cy="384048"/>
           </a:xfrm>
           <a:prstGeom prst="rect">
             <a:avLst>
-              <a:gd name="adj" fmla="val 7692"/>
+              <a:gd name="adj" fmla="val 9524"/>
             </a:avLst>
           </a:prstGeom>
           <a:solidFill>
@@ -16697,14 +16913,14 @@
       </p:sp>
       <p:sp>
         <p:nvSpPr>
-          <p:cNvPr id="52" name="Text 50"/>
-          <p:cNvSpPr/>
-          <p:nvPr/>
-        </p:nvSpPr>
-        <p:spPr>
-          <a:xfrm>
-            <a:off x="7677912" y="4169664"/>
-            <a:ext cx="685800" cy="475488"/>
+          <p:cNvPr id="57" name="Text 55"/>
+          <p:cNvSpPr/>
+          <p:nvPr/>
+        </p:nvSpPr>
+        <p:spPr>
+          <a:xfrm>
+            <a:off x="7033565" y="4169664"/>
+            <a:ext cx="676656" cy="384048"/>
           </a:xfrm>
           <a:prstGeom prst="rect">
             <a:avLst/>
@@ -16728,7 +16944,73 @@
                 <a:ea typeface="Trebuchet MS" pitchFamily="34" charset="-122"/>
                 <a:cs typeface="Trebuchet MS" pitchFamily="34" charset="-120"/>
               </a:rPr>
-              <a:t>t</a:t>
+              <a:t>io</a:t>
+            </a:r>
+            <a:endParaRPr lang="en-US" sz="900" dirty="0"/>
+          </a:p>
+        </p:txBody>
+      </p:sp>
+      <p:sp>
+        <p:nvSpPr>
+          <p:cNvPr id="58" name="Shape 56"/>
+          <p:cNvSpPr/>
+          <p:nvPr/>
+        </p:nvSpPr>
+        <p:spPr>
+          <a:xfrm>
+            <a:off x="7759598" y="4169664"/>
+            <a:ext cx="676656" cy="384048"/>
+          </a:xfrm>
+          <a:prstGeom prst="rect">
+            <a:avLst>
+              <a:gd name="adj" fmla="val 9524"/>
+            </a:avLst>
+          </a:prstGeom>
+          <a:solidFill>
+            <a:srgbClr val="FFFFFF"/>
+          </a:solidFill>
+          <a:ln w="12700">
+            <a:solidFill>
+              <a:srgbClr val="DB2777"/>
+            </a:solidFill>
+            <a:prstDash val="solid"/>
+          </a:ln>
+        </p:spPr>
+      </p:sp>
+      <p:sp>
+        <p:nvSpPr>
+          <p:cNvPr id="59" name="Text 57"/>
+          <p:cNvSpPr/>
+          <p:nvPr/>
+        </p:nvSpPr>
+        <p:spPr>
+          <a:xfrm>
+            <a:off x="7759598" y="4169664"/>
+            <a:ext cx="676656" cy="384048"/>
+          </a:xfrm>
+          <a:prstGeom prst="rect">
+            <a:avLst/>
+          </a:prstGeom>
+          <a:noFill/>
+          <a:ln/>
+        </p:spPr>
+        <p:txBody>
+          <a:bodyPr wrap="square" lIns="0" tIns="0" rIns="0" bIns="0" rtlCol="0" anchor="ctr"/>
+          <a:lstStyle/>
+          <a:p>
+            <a:pPr algn="ctr" indent="0" marL="0">
+              <a:buNone/>
+            </a:pPr>
+            <a:r>
+              <a:rPr lang="en-US" sz="900" b="1" dirty="0">
+                <a:solidFill>
+                  <a:srgbClr val="9D174D"/>
+                </a:solidFill>
+                <a:latin typeface="Trebuchet MS" pitchFamily="34" charset="0"/>
+                <a:ea typeface="Trebuchet MS" pitchFamily="34" charset="-122"/>
+                <a:cs typeface="Trebuchet MS" pitchFamily="34" charset="-120"/>
+              </a:rPr>
+              <a:t>n</a:t>
             </a:r>
             <a:endParaRPr lang="en-US" sz="900" dirty="0"/>
           </a:p>
@@ -17636,7 +17918,7 @@
                 <a:ea typeface="Trebuchet MS" pitchFamily="34" charset="-122"/>
                 <a:cs typeface="Trebuchet MS" pitchFamily="34" charset="-120"/>
               </a:rPr>
-              <a:t>2</a:t>
+              <a:t>1</a:t>
             </a:r>
             <a:pPr algn="ctr" indent="0" marL="0">
               <a:buNone/>
@@ -17650,7 +17932,7 @@
                 <a:ea typeface="Trebuchet MS" pitchFamily="34" charset="-122"/>
                 <a:cs typeface="Trebuchet MS" pitchFamily="34" charset="-120"/>
               </a:rPr>
-              <a:t>  punctuation marks</a:t>
+              <a:t>  punctuation mark</a:t>
             </a:r>
             <a:endParaRPr lang="en-US" sz="2800" dirty="0"/>
           </a:p>
@@ -18054,7 +18336,7 @@
                 <a:ea typeface="Calibri" pitchFamily="34" charset="-122"/>
                 <a:cs typeface="Calibri" pitchFamily="34" charset="-120"/>
               </a:rPr>
-              <a:t>The keen </a:t>
+              <a:t>The </a:t>
             </a:r>
             <a:pPr algn="l" indent="0" marL="0">
               <a:buNone/>
@@ -18071,7 +18353,7 @@
                 <a:ea typeface="Calibri" pitchFamily="34" charset="-122"/>
                 <a:cs typeface="Calibri" pitchFamily="34" charset="-120"/>
               </a:rPr>
-              <a:t>observer</a:t>
+              <a:t>observant</a:t>
             </a:r>
             <a:pPr algn="l" indent="0" marL="0">
               <a:buNone/>
@@ -18085,7 +18367,7 @@
                 <a:ea typeface="Calibri" pitchFamily="34" charset="-122"/>
                 <a:cs typeface="Calibri" pitchFamily="34" charset="-120"/>
               </a:rPr>
-              <a:t> wrote down each </a:t>
+              <a:t> student recorded each </a:t>
             </a:r>
             <a:pPr algn="l" indent="0" marL="0">
               <a:buNone/>
@@ -18102,7 +18384,7 @@
                 <a:ea typeface="Calibri" pitchFamily="34" charset="-122"/>
                 <a:cs typeface="Calibri" pitchFamily="34" charset="-120"/>
               </a:rPr>
-              <a:t>observation</a:t>
+              <a:t>observable</a:t>
             </a:r>
             <a:pPr algn="l" indent="0" marL="0">
               <a:buNone/>
@@ -18116,7 +18398,7 @@
                 <a:ea typeface="Calibri" pitchFamily="34" charset="-122"/>
                 <a:cs typeface="Calibri" pitchFamily="34" charset="-120"/>
               </a:rPr>
-              <a:t> in her notebook, noting that the bird had gone </a:t>
+              <a:t> detail in her notebook, showing excellent </a:t>
             </a:r>
             <a:pPr algn="l" indent="0" marL="0">
               <a:buNone/>
@@ -18133,7 +18415,7 @@
                 <a:ea typeface="Calibri" pitchFamily="34" charset="-122"/>
                 <a:cs typeface="Calibri" pitchFamily="34" charset="-120"/>
               </a:rPr>
-              <a:t>unobserved</a:t>
+              <a:t>observational</a:t>
             </a:r>
             <a:pPr algn="l" indent="0" marL="0">
               <a:buNone/>
@@ -18147,7 +18429,7 @@
                 <a:ea typeface="Calibri" pitchFamily="34" charset="-122"/>
                 <a:cs typeface="Calibri" pitchFamily="34" charset="-120"/>
               </a:rPr>
-              <a:t> by the rest of the class.</a:t>
+              <a:t> skills.</a:t>
             </a:r>
             <a:endParaRPr lang="en-US" sz="1800" dirty="0"/>
           </a:p>
@@ -18302,7 +18584,7 @@
                 <a:ea typeface="Trebuchet MS" pitchFamily="34" charset="-122"/>
                 <a:cs typeface="Trebuchet MS" pitchFamily="34" charset="-120"/>
               </a:rPr>
-              <a:t>observer</a:t>
+              <a:t>observant</a:t>
             </a:r>
             <a:endParaRPr lang="en-US" sz="1400" dirty="0"/>
           </a:p>
@@ -18430,7 +18712,7 @@
                 <a:ea typeface="Trebuchet MS" pitchFamily="34" charset="-122"/>
                 <a:cs typeface="Trebuchet MS" pitchFamily="34" charset="-120"/>
               </a:rPr>
-              <a:t>observation</a:t>
+              <a:t>observable</a:t>
             </a:r>
             <a:endParaRPr lang="en-US" sz="1400" dirty="0"/>
           </a:p>
@@ -18558,7 +18840,7 @@
                 <a:ea typeface="Trebuchet MS" pitchFamily="34" charset="-122"/>
                 <a:cs typeface="Trebuchet MS" pitchFamily="34" charset="-120"/>
               </a:rPr>
-              <a:t>unobserved</a:t>
+              <a:t>observational</a:t>
             </a:r>
             <a:endParaRPr lang="en-US" sz="1400" dirty="0"/>
           </a:p>
@@ -19028,7 +19310,7 @@
                 <a:ea typeface="Trebuchet MS" pitchFamily="34" charset="-122"/>
                 <a:cs typeface="Trebuchet MS" pitchFamily="34" charset="-120"/>
               </a:rPr>
-              <a:t>observer</a:t>
+              <a:t>observant</a:t>
             </a:r>
             <a:endParaRPr lang="en-US" sz="2800" dirty="0"/>
           </a:p>
@@ -19855,7 +20137,7 @@
                 <a:ea typeface="Trebuchet MS" pitchFamily="34" charset="-122"/>
                 <a:cs typeface="Trebuchet MS" pitchFamily="34" charset="-120"/>
               </a:rPr>
-              <a:t>observer</a:t>
+              <a:t>observant</a:t>
             </a:r>
             <a:endParaRPr lang="en-US" sz="2800" dirty="0"/>
           </a:p>
@@ -20041,46 +20323,7 @@
       </p:sp>
       <p:sp>
         <p:nvSpPr>
-          <p:cNvPr id="19" name="Text 17"/>
-          <p:cNvSpPr/>
-          <p:nvPr/>
-        </p:nvSpPr>
-        <p:spPr>
-          <a:xfrm>
-            <a:off x="2938272" y="2752344"/>
-            <a:ext cx="1828800" cy="182880"/>
-          </a:xfrm>
-          <a:prstGeom prst="rect">
-            <a:avLst/>
-          </a:prstGeom>
-          <a:noFill/>
-          <a:ln/>
-        </p:spPr>
-        <p:txBody>
-          <a:bodyPr wrap="square" lIns="0" tIns="0" rIns="0" bIns="0" rtlCol="0" anchor="t"/>
-          <a:lstStyle/>
-          <a:p>
-            <a:pPr algn="ctr" indent="0" marL="0">
-              <a:buNone/>
-            </a:pPr>
-            <a:r>
-              <a:rPr lang="en-US" sz="700" i="1" dirty="0">
-                <a:solidFill>
-                  <a:srgbClr val="94A3B8"/>
-                </a:solidFill>
-                <a:latin typeface="Calibri" pitchFamily="34" charset="0"/>
-                <a:ea typeface="Calibri" pitchFamily="34" charset="-122"/>
-                <a:cs typeface="Calibri" pitchFamily="34" charset="-120"/>
-              </a:rPr>
-              <a:t>'e' dropped before vowel suffix</a:t>
-            </a:r>
-            <a:endParaRPr lang="en-US" sz="700" dirty="0"/>
-          </a:p>
-        </p:txBody>
-      </p:sp>
-      <p:sp>
-        <p:nvSpPr>
-          <p:cNvPr id="20" name="Shape 18"/>
+          <p:cNvPr id="19" name="Shape 17"/>
           <p:cNvSpPr/>
           <p:nvPr/>
         </p:nvSpPr>
@@ -20114,7 +20357,7 @@
       </p:sp>
       <p:sp>
         <p:nvSpPr>
-          <p:cNvPr id="21" name="Text 19"/>
+          <p:cNvPr id="20" name="Text 18"/>
           <p:cNvSpPr/>
           <p:nvPr/>
         </p:nvSpPr>
@@ -20145,7 +20388,7 @@
                 <a:ea typeface="Trebuchet MS" pitchFamily="34" charset="-122"/>
                 <a:cs typeface="Trebuchet MS" pitchFamily="34" charset="-120"/>
               </a:rPr>
-              <a:t>er</a:t>
+              <a:t>ant</a:t>
             </a:r>
             <a:endParaRPr lang="en-US" sz="1300" dirty="0"/>
           </a:p>
@@ -20153,7 +20396,7 @@
       </p:sp>
       <p:sp>
         <p:nvSpPr>
-          <p:cNvPr id="22" name="Text 20"/>
+          <p:cNvPr id="21" name="Text 19"/>
           <p:cNvSpPr/>
           <p:nvPr/>
         </p:nvSpPr>
@@ -20184,9 +20427,48 @@
                 <a:ea typeface="Calibri" pitchFamily="34" charset="-122"/>
                 <a:cs typeface="Calibri" pitchFamily="34" charset="-120"/>
               </a:rPr>
-              <a:t>a person who does something</a:t>
+              <a:t>having a quality; being</a:t>
             </a:r>
             <a:endParaRPr lang="en-US" sz="850" dirty="0"/>
+          </a:p>
+        </p:txBody>
+      </p:sp>
+      <p:sp>
+        <p:nvSpPr>
+          <p:cNvPr id="22" name="Text 20"/>
+          <p:cNvSpPr/>
+          <p:nvPr/>
+        </p:nvSpPr>
+        <p:spPr>
+          <a:xfrm>
+            <a:off x="5803392" y="2752344"/>
+            <a:ext cx="1828800" cy="182880"/>
+          </a:xfrm>
+          <a:prstGeom prst="rect">
+            <a:avLst/>
+          </a:prstGeom>
+          <a:noFill/>
+          <a:ln/>
+        </p:spPr>
+        <p:txBody>
+          <a:bodyPr wrap="square" lIns="0" tIns="0" rIns="0" bIns="0" rtlCol="0" anchor="t"/>
+          <a:lstStyle/>
+          <a:p>
+            <a:pPr algn="ctr" indent="0" marL="0">
+              <a:buNone/>
+            </a:pPr>
+            <a:r>
+              <a:rPr lang="en-US" sz="700" i="1" dirty="0">
+                <a:solidFill>
+                  <a:srgbClr val="94A3B8"/>
+                </a:solidFill>
+                <a:latin typeface="Calibri" pitchFamily="34" charset="0"/>
+                <a:ea typeface="Calibri" pitchFamily="34" charset="-122"/>
+                <a:cs typeface="Calibri" pitchFamily="34" charset="-120"/>
+              </a:rPr>
+              <a:t>'e' dropped before vowel suffix</a:t>
+            </a:r>
+            <a:endParaRPr lang="en-US" sz="700" dirty="0"/>
           </a:p>
         </p:txBody>
       </p:sp>
@@ -20879,7 +21161,7 @@
                 <a:ea typeface="Trebuchet MS" pitchFamily="34" charset="-122"/>
                 <a:cs typeface="Trebuchet MS" pitchFamily="34" charset="-120"/>
               </a:rPr>
-              <a:t>observer</a:t>
+              <a:t>observant</a:t>
             </a:r>
             <a:endParaRPr lang="en-US" sz="2800" dirty="0"/>
           </a:p>
@@ -21065,46 +21347,7 @@
       </p:sp>
       <p:sp>
         <p:nvSpPr>
-          <p:cNvPr id="19" name="Text 17"/>
-          <p:cNvSpPr/>
-          <p:nvPr/>
-        </p:nvSpPr>
-        <p:spPr>
-          <a:xfrm>
-            <a:off x="2938272" y="2752344"/>
-            <a:ext cx="1828800" cy="182880"/>
-          </a:xfrm>
-          <a:prstGeom prst="rect">
-            <a:avLst/>
-          </a:prstGeom>
-          <a:noFill/>
-          <a:ln/>
-        </p:spPr>
-        <p:txBody>
-          <a:bodyPr wrap="square" lIns="0" tIns="0" rIns="0" bIns="0" rtlCol="0" anchor="t"/>
-          <a:lstStyle/>
-          <a:p>
-            <a:pPr algn="ctr" indent="0" marL="0">
-              <a:buNone/>
-            </a:pPr>
-            <a:r>
-              <a:rPr lang="en-US" sz="700" i="1" dirty="0">
-                <a:solidFill>
-                  <a:srgbClr val="94A3B8"/>
-                </a:solidFill>
-                <a:latin typeface="Calibri" pitchFamily="34" charset="0"/>
-                <a:ea typeface="Calibri" pitchFamily="34" charset="-122"/>
-                <a:cs typeface="Calibri" pitchFamily="34" charset="-120"/>
-              </a:rPr>
-              <a:t>'e' dropped before vowel suffix</a:t>
-            </a:r>
-            <a:endParaRPr lang="en-US" sz="700" dirty="0"/>
-          </a:p>
-        </p:txBody>
-      </p:sp>
-      <p:sp>
-        <p:nvSpPr>
-          <p:cNvPr id="20" name="Shape 18"/>
+          <p:cNvPr id="19" name="Shape 17"/>
           <p:cNvSpPr/>
           <p:nvPr/>
         </p:nvSpPr>
@@ -21138,7 +21381,7 @@
       </p:sp>
       <p:sp>
         <p:nvSpPr>
-          <p:cNvPr id="21" name="Text 19"/>
+          <p:cNvPr id="20" name="Text 18"/>
           <p:cNvSpPr/>
           <p:nvPr/>
         </p:nvSpPr>
@@ -21169,7 +21412,7 @@
                 <a:ea typeface="Trebuchet MS" pitchFamily="34" charset="-122"/>
                 <a:cs typeface="Trebuchet MS" pitchFamily="34" charset="-120"/>
               </a:rPr>
-              <a:t>er</a:t>
+              <a:t>ant</a:t>
             </a:r>
             <a:endParaRPr lang="en-US" sz="1300" dirty="0"/>
           </a:p>
@@ -21177,7 +21420,7 @@
       </p:sp>
       <p:sp>
         <p:nvSpPr>
-          <p:cNvPr id="22" name="Text 20"/>
+          <p:cNvPr id="21" name="Text 19"/>
           <p:cNvSpPr/>
           <p:nvPr/>
         </p:nvSpPr>
@@ -21208,9 +21451,48 @@
                 <a:ea typeface="Calibri" pitchFamily="34" charset="-122"/>
                 <a:cs typeface="Calibri" pitchFamily="34" charset="-120"/>
               </a:rPr>
-              <a:t>a person who does something</a:t>
+              <a:t>having a quality; being</a:t>
             </a:r>
             <a:endParaRPr lang="en-US" sz="850" dirty="0"/>
+          </a:p>
+        </p:txBody>
+      </p:sp>
+      <p:sp>
+        <p:nvSpPr>
+          <p:cNvPr id="22" name="Text 20"/>
+          <p:cNvSpPr/>
+          <p:nvPr/>
+        </p:nvSpPr>
+        <p:spPr>
+          <a:xfrm>
+            <a:off x="5803392" y="2752344"/>
+            <a:ext cx="1828800" cy="182880"/>
+          </a:xfrm>
+          <a:prstGeom prst="rect">
+            <a:avLst/>
+          </a:prstGeom>
+          <a:noFill/>
+          <a:ln/>
+        </p:spPr>
+        <p:txBody>
+          <a:bodyPr wrap="square" lIns="0" tIns="0" rIns="0" bIns="0" rtlCol="0" anchor="t"/>
+          <a:lstStyle/>
+          <a:p>
+            <a:pPr algn="ctr" indent="0" marL="0">
+              <a:buNone/>
+            </a:pPr>
+            <a:r>
+              <a:rPr lang="en-US" sz="700" i="1" dirty="0">
+                <a:solidFill>
+                  <a:srgbClr val="94A3B8"/>
+                </a:solidFill>
+                <a:latin typeface="Calibri" pitchFamily="34" charset="0"/>
+                <a:ea typeface="Calibri" pitchFamily="34" charset="-122"/>
+                <a:cs typeface="Calibri" pitchFamily="34" charset="-120"/>
+              </a:rPr>
+              <a:t>'e' dropped before vowel suffix</a:t>
+            </a:r>
+            <a:endParaRPr lang="en-US" sz="700" dirty="0"/>
           </a:p>
         </p:txBody>
       </p:sp>
@@ -21577,7 +21859,7 @@
                 <a:ea typeface="Trebuchet MS" pitchFamily="34" charset="-122"/>
                 <a:cs typeface="Trebuchet MS" pitchFamily="34" charset="-120"/>
               </a:rPr>
-              <a:t>ver</a:t>
+              <a:t>vant</a:t>
             </a:r>
             <a:endParaRPr lang="en-US" sz="1400" dirty="0"/>
           </a:p>
@@ -22140,7 +22422,7 @@
                 <a:ea typeface="Trebuchet MS" pitchFamily="34" charset="-122"/>
                 <a:cs typeface="Trebuchet MS" pitchFamily="34" charset="-120"/>
               </a:rPr>
-              <a:t>observer</a:t>
+              <a:t>observant</a:t>
             </a:r>
             <a:endParaRPr lang="en-US" sz="2800" dirty="0"/>
           </a:p>
@@ -22326,46 +22608,7 @@
       </p:sp>
       <p:sp>
         <p:nvSpPr>
-          <p:cNvPr id="19" name="Text 17"/>
-          <p:cNvSpPr/>
-          <p:nvPr/>
-        </p:nvSpPr>
-        <p:spPr>
-          <a:xfrm>
-            <a:off x="2938272" y="2752344"/>
-            <a:ext cx="1828800" cy="182880"/>
-          </a:xfrm>
-          <a:prstGeom prst="rect">
-            <a:avLst/>
-          </a:prstGeom>
-          <a:noFill/>
-          <a:ln/>
-        </p:spPr>
-        <p:txBody>
-          <a:bodyPr wrap="square" lIns="0" tIns="0" rIns="0" bIns="0" rtlCol="0" anchor="t"/>
-          <a:lstStyle/>
-          <a:p>
-            <a:pPr algn="ctr" indent="0" marL="0">
-              <a:buNone/>
-            </a:pPr>
-            <a:r>
-              <a:rPr lang="en-US" sz="700" i="1" dirty="0">
-                <a:solidFill>
-                  <a:srgbClr val="94A3B8"/>
-                </a:solidFill>
-                <a:latin typeface="Calibri" pitchFamily="34" charset="0"/>
-                <a:ea typeface="Calibri" pitchFamily="34" charset="-122"/>
-                <a:cs typeface="Calibri" pitchFamily="34" charset="-120"/>
-              </a:rPr>
-              <a:t>'e' dropped before vowel suffix</a:t>
-            </a:r>
-            <a:endParaRPr lang="en-US" sz="700" dirty="0"/>
-          </a:p>
-        </p:txBody>
-      </p:sp>
-      <p:sp>
-        <p:nvSpPr>
-          <p:cNvPr id="20" name="Shape 18"/>
+          <p:cNvPr id="19" name="Shape 17"/>
           <p:cNvSpPr/>
           <p:nvPr/>
         </p:nvSpPr>
@@ -22399,7 +22642,7 @@
       </p:sp>
       <p:sp>
         <p:nvSpPr>
-          <p:cNvPr id="21" name="Text 19"/>
+          <p:cNvPr id="20" name="Text 18"/>
           <p:cNvSpPr/>
           <p:nvPr/>
         </p:nvSpPr>
@@ -22430,7 +22673,7 @@
                 <a:ea typeface="Trebuchet MS" pitchFamily="34" charset="-122"/>
                 <a:cs typeface="Trebuchet MS" pitchFamily="34" charset="-120"/>
               </a:rPr>
-              <a:t>er</a:t>
+              <a:t>ant</a:t>
             </a:r>
             <a:endParaRPr lang="en-US" sz="1300" dirty="0"/>
           </a:p>
@@ -22438,7 +22681,7 @@
       </p:sp>
       <p:sp>
         <p:nvSpPr>
-          <p:cNvPr id="22" name="Text 20"/>
+          <p:cNvPr id="21" name="Text 19"/>
           <p:cNvSpPr/>
           <p:nvPr/>
         </p:nvSpPr>
@@ -22469,9 +22712,48 @@
                 <a:ea typeface="Calibri" pitchFamily="34" charset="-122"/>
                 <a:cs typeface="Calibri" pitchFamily="34" charset="-120"/>
               </a:rPr>
-              <a:t>a person who does something</a:t>
+              <a:t>having a quality; being</a:t>
             </a:r>
             <a:endParaRPr lang="en-US" sz="850" dirty="0"/>
+          </a:p>
+        </p:txBody>
+      </p:sp>
+      <p:sp>
+        <p:nvSpPr>
+          <p:cNvPr id="22" name="Text 20"/>
+          <p:cNvSpPr/>
+          <p:nvPr/>
+        </p:nvSpPr>
+        <p:spPr>
+          <a:xfrm>
+            <a:off x="5803392" y="2752344"/>
+            <a:ext cx="1828800" cy="182880"/>
+          </a:xfrm>
+          <a:prstGeom prst="rect">
+            <a:avLst/>
+          </a:prstGeom>
+          <a:noFill/>
+          <a:ln/>
+        </p:spPr>
+        <p:txBody>
+          <a:bodyPr wrap="square" lIns="0" tIns="0" rIns="0" bIns="0" rtlCol="0" anchor="t"/>
+          <a:lstStyle/>
+          <a:p>
+            <a:pPr algn="ctr" indent="0" marL="0">
+              <a:buNone/>
+            </a:pPr>
+            <a:r>
+              <a:rPr lang="en-US" sz="700" i="1" dirty="0">
+                <a:solidFill>
+                  <a:srgbClr val="94A3B8"/>
+                </a:solidFill>
+                <a:latin typeface="Calibri" pitchFamily="34" charset="0"/>
+                <a:ea typeface="Calibri" pitchFamily="34" charset="-122"/>
+                <a:cs typeface="Calibri" pitchFamily="34" charset="-120"/>
+              </a:rPr>
+              <a:t>'e' dropped before vowel suffix</a:t>
+            </a:r>
+            <a:endParaRPr lang="en-US" sz="700" dirty="0"/>
           </a:p>
         </p:txBody>
       </p:sp>
@@ -22838,7 +23120,7 @@
                 <a:ea typeface="Trebuchet MS" pitchFamily="34" charset="-122"/>
                 <a:cs typeface="Trebuchet MS" pitchFamily="34" charset="-120"/>
               </a:rPr>
-              <a:t>ver</a:t>
+              <a:t>vant</a:t>
             </a:r>
             <a:endParaRPr lang="en-US" sz="1400" dirty="0"/>
           </a:p>
@@ -22919,11 +23201,11 @@
         <p:spPr>
           <a:xfrm>
             <a:off x="1874520" y="4096512"/>
-            <a:ext cx="6903720" cy="658368"/>
+            <a:ext cx="6903720" cy="804672"/>
           </a:xfrm>
           <a:prstGeom prst="rect">
             <a:avLst>
-              <a:gd name="adj" fmla="val 8333"/>
+              <a:gd name="adj" fmla="val 6818"/>
             </a:avLst>
           </a:prstGeom>
           <a:solidFill>
@@ -22945,12 +23227,12 @@
         </p:nvSpPr>
         <p:spPr>
           <a:xfrm>
-            <a:off x="2254649" y="4169664"/>
-            <a:ext cx="685800" cy="475488"/>
+            <a:off x="2023872" y="4169664"/>
+            <a:ext cx="685800" cy="384048"/>
           </a:xfrm>
           <a:prstGeom prst="rect">
             <a:avLst>
-              <a:gd name="adj" fmla="val 7692"/>
+              <a:gd name="adj" fmla="val 9524"/>
             </a:avLst>
           </a:prstGeom>
           <a:solidFill>
@@ -22972,8 +23254,8 @@
         </p:nvSpPr>
         <p:spPr>
           <a:xfrm>
-            <a:off x="2254649" y="4169664"/>
-            <a:ext cx="685800" cy="475488"/>
+            <a:off x="2023872" y="4169664"/>
+            <a:ext cx="685800" cy="384048"/>
           </a:xfrm>
           <a:prstGeom prst="rect">
             <a:avLst/>
@@ -23011,12 +23293,12 @@
         </p:nvSpPr>
         <p:spPr>
           <a:xfrm>
-            <a:off x="3293146" y="4169664"/>
-            <a:ext cx="685800" cy="475488"/>
+            <a:off x="2831592" y="4169664"/>
+            <a:ext cx="685800" cy="384048"/>
           </a:xfrm>
           <a:prstGeom prst="rect">
             <a:avLst>
-              <a:gd name="adj" fmla="val 7692"/>
+              <a:gd name="adj" fmla="val 9524"/>
             </a:avLst>
           </a:prstGeom>
           <a:solidFill>
@@ -23038,8 +23320,8 @@
         </p:nvSpPr>
         <p:spPr>
           <a:xfrm>
-            <a:off x="3293146" y="4169664"/>
-            <a:ext cx="685800" cy="475488"/>
+            <a:off x="2831592" y="4169664"/>
+            <a:ext cx="685800" cy="384048"/>
           </a:xfrm>
           <a:prstGeom prst="rect">
             <a:avLst/>
@@ -23077,12 +23359,12 @@
         </p:nvSpPr>
         <p:spPr>
           <a:xfrm>
-            <a:off x="4331643" y="4169664"/>
-            <a:ext cx="685800" cy="475488"/>
+            <a:off x="3639312" y="4169664"/>
+            <a:ext cx="685800" cy="384048"/>
           </a:xfrm>
           <a:prstGeom prst="rect">
             <a:avLst>
-              <a:gd name="adj" fmla="val 7692"/>
+              <a:gd name="adj" fmla="val 9524"/>
             </a:avLst>
           </a:prstGeom>
           <a:solidFill>
@@ -23104,8 +23386,8 @@
         </p:nvSpPr>
         <p:spPr>
           <a:xfrm>
-            <a:off x="4331643" y="4169664"/>
-            <a:ext cx="685800" cy="475488"/>
+            <a:off x="3639312" y="4169664"/>
+            <a:ext cx="685800" cy="384048"/>
           </a:xfrm>
           <a:prstGeom prst="rect">
             <a:avLst/>
@@ -23137,18 +23419,57 @@
       </p:sp>
       <p:sp>
         <p:nvSpPr>
-          <p:cNvPr id="43" name="Shape 41"/>
-          <p:cNvSpPr/>
-          <p:nvPr/>
-        </p:nvSpPr>
-        <p:spPr>
-          <a:xfrm>
-            <a:off x="5370141" y="4169664"/>
-            <a:ext cx="685800" cy="475488"/>
+          <p:cNvPr id="43" name="Text 41"/>
+          <p:cNvSpPr/>
+          <p:nvPr/>
+        </p:nvSpPr>
+        <p:spPr>
+          <a:xfrm>
+            <a:off x="3639312" y="4572000"/>
+            <a:ext cx="685800" cy="219456"/>
+          </a:xfrm>
+          <a:prstGeom prst="rect">
+            <a:avLst/>
+          </a:prstGeom>
+          <a:noFill/>
+          <a:ln/>
+        </p:spPr>
+        <p:txBody>
+          <a:bodyPr wrap="square" lIns="0" tIns="0" rIns="0" bIns="0" rtlCol="0" anchor="t"/>
+          <a:lstStyle/>
+          <a:p>
+            <a:pPr algn="ctr" indent="0" marL="0">
+              <a:buNone/>
+            </a:pPr>
+            <a:r>
+              <a:rPr lang="en-US" sz="750" i="1" dirty="0">
+                <a:solidFill>
+                  <a:srgbClr val="94A3B8"/>
+                </a:solidFill>
+                <a:latin typeface="Calibri" pitchFamily="34" charset="0"/>
+                <a:ea typeface="Calibri" pitchFamily="34" charset="-122"/>
+                <a:cs typeface="Calibri" pitchFamily="34" charset="-120"/>
+              </a:rPr>
+              <a:t>/z/</a:t>
+            </a:r>
+            <a:endParaRPr lang="en-US" sz="750" dirty="0"/>
+          </a:p>
+        </p:txBody>
+      </p:sp>
+      <p:sp>
+        <p:nvSpPr>
+          <p:cNvPr id="44" name="Shape 42"/>
+          <p:cNvSpPr/>
+          <p:nvPr/>
+        </p:nvSpPr>
+        <p:spPr>
+          <a:xfrm>
+            <a:off x="4447032" y="4169664"/>
+            <a:ext cx="685800" cy="384048"/>
           </a:xfrm>
           <a:prstGeom prst="rect">
             <a:avLst>
-              <a:gd name="adj" fmla="val 7692"/>
+              <a:gd name="adj" fmla="val 9524"/>
             </a:avLst>
           </a:prstGeom>
           <a:solidFill>
@@ -23164,14 +23485,14 @@
       </p:sp>
       <p:sp>
         <p:nvSpPr>
-          <p:cNvPr id="44" name="Text 42"/>
-          <p:cNvSpPr/>
-          <p:nvPr/>
-        </p:nvSpPr>
-        <p:spPr>
-          <a:xfrm>
-            <a:off x="5370141" y="4169664"/>
-            <a:ext cx="685800" cy="475488"/>
+          <p:cNvPr id="45" name="Text 43"/>
+          <p:cNvSpPr/>
+          <p:nvPr/>
+        </p:nvSpPr>
+        <p:spPr>
+          <a:xfrm>
+            <a:off x="4447032" y="4169664"/>
+            <a:ext cx="685800" cy="384048"/>
           </a:xfrm>
           <a:prstGeom prst="rect">
             <a:avLst/>
@@ -23203,18 +23524,18 @@
       </p:sp>
       <p:sp>
         <p:nvSpPr>
-          <p:cNvPr id="45" name="Shape 43"/>
-          <p:cNvSpPr/>
-          <p:nvPr/>
-        </p:nvSpPr>
-        <p:spPr>
-          <a:xfrm>
-            <a:off x="6408638" y="4169664"/>
-            <a:ext cx="685800" cy="475488"/>
+          <p:cNvPr id="46" name="Shape 44"/>
+          <p:cNvSpPr/>
+          <p:nvPr/>
+        </p:nvSpPr>
+        <p:spPr>
+          <a:xfrm>
+            <a:off x="5254752" y="4169664"/>
+            <a:ext cx="685800" cy="384048"/>
           </a:xfrm>
           <a:prstGeom prst="rect">
             <a:avLst>
-              <a:gd name="adj" fmla="val 7692"/>
+              <a:gd name="adj" fmla="val 9524"/>
             </a:avLst>
           </a:prstGeom>
           <a:solidFill>
@@ -23230,14 +23551,14 @@
       </p:sp>
       <p:sp>
         <p:nvSpPr>
-          <p:cNvPr id="46" name="Text 44"/>
-          <p:cNvSpPr/>
-          <p:nvPr/>
-        </p:nvSpPr>
-        <p:spPr>
-          <a:xfrm>
-            <a:off x="6408638" y="4169664"/>
-            <a:ext cx="685800" cy="475488"/>
+          <p:cNvPr id="47" name="Text 45"/>
+          <p:cNvSpPr/>
+          <p:nvPr/>
+        </p:nvSpPr>
+        <p:spPr>
+          <a:xfrm>
+            <a:off x="5254752" y="4169664"/>
+            <a:ext cx="685800" cy="384048"/>
           </a:xfrm>
           <a:prstGeom prst="rect">
             <a:avLst/>
@@ -23269,18 +23590,18 @@
       </p:sp>
       <p:sp>
         <p:nvSpPr>
-          <p:cNvPr id="47" name="Shape 45"/>
-          <p:cNvSpPr/>
-          <p:nvPr/>
-        </p:nvSpPr>
-        <p:spPr>
-          <a:xfrm>
-            <a:off x="7447135" y="4169664"/>
-            <a:ext cx="685800" cy="475488"/>
+          <p:cNvPr id="48" name="Shape 46"/>
+          <p:cNvSpPr/>
+          <p:nvPr/>
+        </p:nvSpPr>
+        <p:spPr>
+          <a:xfrm>
+            <a:off x="6062472" y="4169664"/>
+            <a:ext cx="685800" cy="384048"/>
           </a:xfrm>
           <a:prstGeom prst="rect">
             <a:avLst>
-              <a:gd name="adj" fmla="val 7692"/>
+              <a:gd name="adj" fmla="val 9524"/>
             </a:avLst>
           </a:prstGeom>
           <a:solidFill>
@@ -23296,14 +23617,14 @@
       </p:sp>
       <p:sp>
         <p:nvSpPr>
-          <p:cNvPr id="48" name="Text 46"/>
-          <p:cNvSpPr/>
-          <p:nvPr/>
-        </p:nvSpPr>
-        <p:spPr>
-          <a:xfrm>
-            <a:off x="7447135" y="4169664"/>
-            <a:ext cx="685800" cy="475488"/>
+          <p:cNvPr id="49" name="Text 47"/>
+          <p:cNvSpPr/>
+          <p:nvPr/>
+        </p:nvSpPr>
+        <p:spPr>
+          <a:xfrm>
+            <a:off x="6062472" y="4169664"/>
+            <a:ext cx="685800" cy="384048"/>
           </a:xfrm>
           <a:prstGeom prst="rect">
             <a:avLst/>
@@ -23327,7 +23648,139 @@
                 <a:ea typeface="Trebuchet MS" pitchFamily="34" charset="-122"/>
                 <a:cs typeface="Trebuchet MS" pitchFamily="34" charset="-120"/>
               </a:rPr>
-              <a:t>er</a:t>
+              <a:t>a</a:t>
+            </a:r>
+            <a:endParaRPr lang="en-US" sz="900" dirty="0"/>
+          </a:p>
+        </p:txBody>
+      </p:sp>
+      <p:sp>
+        <p:nvSpPr>
+          <p:cNvPr id="50" name="Shape 48"/>
+          <p:cNvSpPr/>
+          <p:nvPr/>
+        </p:nvSpPr>
+        <p:spPr>
+          <a:xfrm>
+            <a:off x="6870192" y="4169664"/>
+            <a:ext cx="685800" cy="384048"/>
+          </a:xfrm>
+          <a:prstGeom prst="rect">
+            <a:avLst>
+              <a:gd name="adj" fmla="val 9524"/>
+            </a:avLst>
+          </a:prstGeom>
+          <a:solidFill>
+            <a:srgbClr val="FFFFFF"/>
+          </a:solidFill>
+          <a:ln w="12700">
+            <a:solidFill>
+              <a:srgbClr val="DB2777"/>
+            </a:solidFill>
+            <a:prstDash val="solid"/>
+          </a:ln>
+        </p:spPr>
+      </p:sp>
+      <p:sp>
+        <p:nvSpPr>
+          <p:cNvPr id="51" name="Text 49"/>
+          <p:cNvSpPr/>
+          <p:nvPr/>
+        </p:nvSpPr>
+        <p:spPr>
+          <a:xfrm>
+            <a:off x="6870192" y="4169664"/>
+            <a:ext cx="685800" cy="384048"/>
+          </a:xfrm>
+          <a:prstGeom prst="rect">
+            <a:avLst/>
+          </a:prstGeom>
+          <a:noFill/>
+          <a:ln/>
+        </p:spPr>
+        <p:txBody>
+          <a:bodyPr wrap="square" lIns="0" tIns="0" rIns="0" bIns="0" rtlCol="0" anchor="ctr"/>
+          <a:lstStyle/>
+          <a:p>
+            <a:pPr algn="ctr" indent="0" marL="0">
+              <a:buNone/>
+            </a:pPr>
+            <a:r>
+              <a:rPr lang="en-US" sz="900" b="1" dirty="0">
+                <a:solidFill>
+                  <a:srgbClr val="9D174D"/>
+                </a:solidFill>
+                <a:latin typeface="Trebuchet MS" pitchFamily="34" charset="0"/>
+                <a:ea typeface="Trebuchet MS" pitchFamily="34" charset="-122"/>
+                <a:cs typeface="Trebuchet MS" pitchFamily="34" charset="-120"/>
+              </a:rPr>
+              <a:t>n</a:t>
+            </a:r>
+            <a:endParaRPr lang="en-US" sz="900" dirty="0"/>
+          </a:p>
+        </p:txBody>
+      </p:sp>
+      <p:sp>
+        <p:nvSpPr>
+          <p:cNvPr id="52" name="Shape 50"/>
+          <p:cNvSpPr/>
+          <p:nvPr/>
+        </p:nvSpPr>
+        <p:spPr>
+          <a:xfrm>
+            <a:off x="7677912" y="4169664"/>
+            <a:ext cx="685800" cy="384048"/>
+          </a:xfrm>
+          <a:prstGeom prst="rect">
+            <a:avLst>
+              <a:gd name="adj" fmla="val 9524"/>
+            </a:avLst>
+          </a:prstGeom>
+          <a:solidFill>
+            <a:srgbClr val="FFFFFF"/>
+          </a:solidFill>
+          <a:ln w="12700">
+            <a:solidFill>
+              <a:srgbClr val="DB2777"/>
+            </a:solidFill>
+            <a:prstDash val="solid"/>
+          </a:ln>
+        </p:spPr>
+      </p:sp>
+      <p:sp>
+        <p:nvSpPr>
+          <p:cNvPr id="53" name="Text 51"/>
+          <p:cNvSpPr/>
+          <p:nvPr/>
+        </p:nvSpPr>
+        <p:spPr>
+          <a:xfrm>
+            <a:off x="7677912" y="4169664"/>
+            <a:ext cx="685800" cy="384048"/>
+          </a:xfrm>
+          <a:prstGeom prst="rect">
+            <a:avLst/>
+          </a:prstGeom>
+          <a:noFill/>
+          <a:ln/>
+        </p:spPr>
+        <p:txBody>
+          <a:bodyPr wrap="square" lIns="0" tIns="0" rIns="0" bIns="0" rtlCol="0" anchor="ctr"/>
+          <a:lstStyle/>
+          <a:p>
+            <a:pPr algn="ctr" indent="0" marL="0">
+              <a:buNone/>
+            </a:pPr>
+            <a:r>
+              <a:rPr lang="en-US" sz="900" b="1" dirty="0">
+                <a:solidFill>
+                  <a:srgbClr val="9D174D"/>
+                </a:solidFill>
+                <a:latin typeface="Trebuchet MS" pitchFamily="34" charset="0"/>
+                <a:ea typeface="Trebuchet MS" pitchFamily="34" charset="-122"/>
+                <a:cs typeface="Trebuchet MS" pitchFamily="34" charset="-120"/>
+              </a:rPr>
+              <a:t>t</a:t>
             </a:r>
             <a:endParaRPr lang="en-US" sz="900" dirty="0"/>
           </a:p>
@@ -23758,7 +24211,7 @@
                 <a:ea typeface="Trebuchet MS" pitchFamily="34" charset="-122"/>
                 <a:cs typeface="Trebuchet MS" pitchFamily="34" charset="-120"/>
               </a:rPr>
-              <a:t>observation</a:t>
+              <a:t>observable</a:t>
             </a:r>
             <a:endParaRPr lang="en-US" sz="2800" dirty="0"/>
           </a:p>
@@ -24585,7 +25038,7 @@
                 <a:ea typeface="Trebuchet MS" pitchFamily="34" charset="-122"/>
                 <a:cs typeface="Trebuchet MS" pitchFamily="34" charset="-120"/>
               </a:rPr>
-              <a:t>observation</a:t>
+              <a:t>observable</a:t>
             </a:r>
             <a:endParaRPr lang="en-US" sz="2800" dirty="0"/>
           </a:p>
@@ -24771,46 +25224,7 @@
       </p:sp>
       <p:sp>
         <p:nvSpPr>
-          <p:cNvPr id="19" name="Text 17"/>
-          <p:cNvSpPr/>
-          <p:nvPr/>
-        </p:nvSpPr>
-        <p:spPr>
-          <a:xfrm>
-            <a:off x="2938272" y="2752344"/>
-            <a:ext cx="1828800" cy="182880"/>
-          </a:xfrm>
-          <a:prstGeom prst="rect">
-            <a:avLst/>
-          </a:prstGeom>
-          <a:noFill/>
-          <a:ln/>
-        </p:spPr>
-        <p:txBody>
-          <a:bodyPr wrap="square" lIns="0" tIns="0" rIns="0" bIns="0" rtlCol="0" anchor="t"/>
-          <a:lstStyle/>
-          <a:p>
-            <a:pPr algn="ctr" indent="0" marL="0">
-              <a:buNone/>
-            </a:pPr>
-            <a:r>
-              <a:rPr lang="en-US" sz="700" i="1" dirty="0">
-                <a:solidFill>
-                  <a:srgbClr val="94A3B8"/>
-                </a:solidFill>
-                <a:latin typeface="Calibri" pitchFamily="34" charset="0"/>
-                <a:ea typeface="Calibri" pitchFamily="34" charset="-122"/>
-                <a:cs typeface="Calibri" pitchFamily="34" charset="-120"/>
-              </a:rPr>
-              <a:t>'e' dropped before vowel suffix</a:t>
-            </a:r>
-            <a:endParaRPr lang="en-US" sz="700" dirty="0"/>
-          </a:p>
-        </p:txBody>
-      </p:sp>
-      <p:sp>
-        <p:nvSpPr>
-          <p:cNvPr id="20" name="Shape 18"/>
+          <p:cNvPr id="19" name="Shape 17"/>
           <p:cNvSpPr/>
           <p:nvPr/>
         </p:nvSpPr>
@@ -24844,7 +25258,7 @@
       </p:sp>
       <p:sp>
         <p:nvSpPr>
-          <p:cNvPr id="21" name="Text 19"/>
+          <p:cNvPr id="20" name="Text 18"/>
           <p:cNvSpPr/>
           <p:nvPr/>
         </p:nvSpPr>
@@ -24875,7 +25289,7 @@
                 <a:ea typeface="Trebuchet MS" pitchFamily="34" charset="-122"/>
                 <a:cs typeface="Trebuchet MS" pitchFamily="34" charset="-120"/>
               </a:rPr>
-              <a:t>ation</a:t>
+              <a:t>able</a:t>
             </a:r>
             <a:endParaRPr lang="en-US" sz="1300" dirty="0"/>
           </a:p>
@@ -24883,7 +25297,7 @@
       </p:sp>
       <p:sp>
         <p:nvSpPr>
-          <p:cNvPr id="22" name="Text 20"/>
+          <p:cNvPr id="21" name="Text 19"/>
           <p:cNvSpPr/>
           <p:nvPr/>
         </p:nvSpPr>
@@ -24914,9 +25328,48 @@
                 <a:ea typeface="Calibri" pitchFamily="34" charset="-122"/>
                 <a:cs typeface="Calibri" pitchFamily="34" charset="-120"/>
               </a:rPr>
-              <a:t>the act or result of</a:t>
+              <a:t>able to be</a:t>
             </a:r>
             <a:endParaRPr lang="en-US" sz="850" dirty="0"/>
+          </a:p>
+        </p:txBody>
+      </p:sp>
+      <p:sp>
+        <p:nvSpPr>
+          <p:cNvPr id="22" name="Text 20"/>
+          <p:cNvSpPr/>
+          <p:nvPr/>
+        </p:nvSpPr>
+        <p:spPr>
+          <a:xfrm>
+            <a:off x="5803392" y="2752344"/>
+            <a:ext cx="1828800" cy="182880"/>
+          </a:xfrm>
+          <a:prstGeom prst="rect">
+            <a:avLst/>
+          </a:prstGeom>
+          <a:noFill/>
+          <a:ln/>
+        </p:spPr>
+        <p:txBody>
+          <a:bodyPr wrap="square" lIns="0" tIns="0" rIns="0" bIns="0" rtlCol="0" anchor="t"/>
+          <a:lstStyle/>
+          <a:p>
+            <a:pPr algn="ctr" indent="0" marL="0">
+              <a:buNone/>
+            </a:pPr>
+            <a:r>
+              <a:rPr lang="en-US" sz="700" i="1" dirty="0">
+                <a:solidFill>
+                  <a:srgbClr val="94A3B8"/>
+                </a:solidFill>
+                <a:latin typeface="Calibri" pitchFamily="34" charset="0"/>
+                <a:ea typeface="Calibri" pitchFamily="34" charset="-122"/>
+                <a:cs typeface="Calibri" pitchFamily="34" charset="-120"/>
+              </a:rPr>
+              <a:t>'e' dropped before vowel suffix</a:t>
+            </a:r>
+            <a:endParaRPr lang="en-US" sz="700" dirty="0"/>
           </a:p>
         </p:txBody>
       </p:sp>
@@ -26328,7 +26781,7 @@
                 <a:ea typeface="Trebuchet MS" pitchFamily="34" charset="-122"/>
                 <a:cs typeface="Trebuchet MS" pitchFamily="34" charset="-120"/>
               </a:rPr>
-              <a:t>observation</a:t>
+              <a:t>observable</a:t>
             </a:r>
             <a:endParaRPr lang="en-US" sz="2800" dirty="0"/>
           </a:p>
@@ -26514,46 +26967,7 @@
       </p:sp>
       <p:sp>
         <p:nvSpPr>
-          <p:cNvPr id="19" name="Text 17"/>
-          <p:cNvSpPr/>
-          <p:nvPr/>
-        </p:nvSpPr>
-        <p:spPr>
-          <a:xfrm>
-            <a:off x="2938272" y="2752344"/>
-            <a:ext cx="1828800" cy="182880"/>
-          </a:xfrm>
-          <a:prstGeom prst="rect">
-            <a:avLst/>
-          </a:prstGeom>
-          <a:noFill/>
-          <a:ln/>
-        </p:spPr>
-        <p:txBody>
-          <a:bodyPr wrap="square" lIns="0" tIns="0" rIns="0" bIns="0" rtlCol="0" anchor="t"/>
-          <a:lstStyle/>
-          <a:p>
-            <a:pPr algn="ctr" indent="0" marL="0">
-              <a:buNone/>
-            </a:pPr>
-            <a:r>
-              <a:rPr lang="en-US" sz="700" i="1" dirty="0">
-                <a:solidFill>
-                  <a:srgbClr val="94A3B8"/>
-                </a:solidFill>
-                <a:latin typeface="Calibri" pitchFamily="34" charset="0"/>
-                <a:ea typeface="Calibri" pitchFamily="34" charset="-122"/>
-                <a:cs typeface="Calibri" pitchFamily="34" charset="-120"/>
-              </a:rPr>
-              <a:t>'e' dropped before vowel suffix</a:t>
-            </a:r>
-            <a:endParaRPr lang="en-US" sz="700" dirty="0"/>
-          </a:p>
-        </p:txBody>
-      </p:sp>
-      <p:sp>
-        <p:nvSpPr>
-          <p:cNvPr id="20" name="Shape 18"/>
+          <p:cNvPr id="19" name="Shape 17"/>
           <p:cNvSpPr/>
           <p:nvPr/>
         </p:nvSpPr>
@@ -26587,7 +27001,7 @@
       </p:sp>
       <p:sp>
         <p:nvSpPr>
-          <p:cNvPr id="21" name="Text 19"/>
+          <p:cNvPr id="20" name="Text 18"/>
           <p:cNvSpPr/>
           <p:nvPr/>
         </p:nvSpPr>
@@ -26618,7 +27032,7 @@
                 <a:ea typeface="Trebuchet MS" pitchFamily="34" charset="-122"/>
                 <a:cs typeface="Trebuchet MS" pitchFamily="34" charset="-120"/>
               </a:rPr>
-              <a:t>ation</a:t>
+              <a:t>able</a:t>
             </a:r>
             <a:endParaRPr lang="en-US" sz="1300" dirty="0"/>
           </a:p>
@@ -26626,7 +27040,7 @@
       </p:sp>
       <p:sp>
         <p:nvSpPr>
-          <p:cNvPr id="22" name="Text 20"/>
+          <p:cNvPr id="21" name="Text 19"/>
           <p:cNvSpPr/>
           <p:nvPr/>
         </p:nvSpPr>
@@ -26657,9 +27071,48 @@
                 <a:ea typeface="Calibri" pitchFamily="34" charset="-122"/>
                 <a:cs typeface="Calibri" pitchFamily="34" charset="-120"/>
               </a:rPr>
-              <a:t>the act or result of</a:t>
+              <a:t>able to be</a:t>
             </a:r>
             <a:endParaRPr lang="en-US" sz="850" dirty="0"/>
+          </a:p>
+        </p:txBody>
+      </p:sp>
+      <p:sp>
+        <p:nvSpPr>
+          <p:cNvPr id="22" name="Text 20"/>
+          <p:cNvSpPr/>
+          <p:nvPr/>
+        </p:nvSpPr>
+        <p:spPr>
+          <a:xfrm>
+            <a:off x="5803392" y="2752344"/>
+            <a:ext cx="1828800" cy="182880"/>
+          </a:xfrm>
+          <a:prstGeom prst="rect">
+            <a:avLst/>
+          </a:prstGeom>
+          <a:noFill/>
+          <a:ln/>
+        </p:spPr>
+        <p:txBody>
+          <a:bodyPr wrap="square" lIns="0" tIns="0" rIns="0" bIns="0" rtlCol="0" anchor="t"/>
+          <a:lstStyle/>
+          <a:p>
+            <a:pPr algn="ctr" indent="0" marL="0">
+              <a:buNone/>
+            </a:pPr>
+            <a:r>
+              <a:rPr lang="en-US" sz="700" i="1" dirty="0">
+                <a:solidFill>
+                  <a:srgbClr val="94A3B8"/>
+                </a:solidFill>
+                <a:latin typeface="Calibri" pitchFamily="34" charset="0"/>
+                <a:ea typeface="Calibri" pitchFamily="34" charset="-122"/>
+                <a:cs typeface="Calibri" pitchFamily="34" charset="-120"/>
+              </a:rPr>
+              <a:t>'e' dropped before vowel suffix</a:t>
+            </a:r>
+            <a:endParaRPr lang="en-US" sz="700" dirty="0"/>
           </a:p>
         </p:txBody>
       </p:sp>
@@ -27131,7 +27584,7 @@
                 <a:ea typeface="Trebuchet MS" pitchFamily="34" charset="-122"/>
                 <a:cs typeface="Trebuchet MS" pitchFamily="34" charset="-120"/>
               </a:rPr>
-              <a:t>tion</a:t>
+              <a:t>ble</a:t>
             </a:r>
             <a:endParaRPr lang="en-US" sz="1400" dirty="0"/>
           </a:p>
@@ -27694,7 +28147,7 @@
                 <a:ea typeface="Trebuchet MS" pitchFamily="34" charset="-122"/>
                 <a:cs typeface="Trebuchet MS" pitchFamily="34" charset="-120"/>
               </a:rPr>
-              <a:t>observation</a:t>
+              <a:t>observable</a:t>
             </a:r>
             <a:endParaRPr lang="en-US" sz="2800" dirty="0"/>
           </a:p>
@@ -27880,46 +28333,7 @@
       </p:sp>
       <p:sp>
         <p:nvSpPr>
-          <p:cNvPr id="19" name="Text 17"/>
-          <p:cNvSpPr/>
-          <p:nvPr/>
-        </p:nvSpPr>
-        <p:spPr>
-          <a:xfrm>
-            <a:off x="2938272" y="2752344"/>
-            <a:ext cx="1828800" cy="182880"/>
-          </a:xfrm>
-          <a:prstGeom prst="rect">
-            <a:avLst/>
-          </a:prstGeom>
-          <a:noFill/>
-          <a:ln/>
-        </p:spPr>
-        <p:txBody>
-          <a:bodyPr wrap="square" lIns="0" tIns="0" rIns="0" bIns="0" rtlCol="0" anchor="t"/>
-          <a:lstStyle/>
-          <a:p>
-            <a:pPr algn="ctr" indent="0" marL="0">
-              <a:buNone/>
-            </a:pPr>
-            <a:r>
-              <a:rPr lang="en-US" sz="700" i="1" dirty="0">
-                <a:solidFill>
-                  <a:srgbClr val="94A3B8"/>
-                </a:solidFill>
-                <a:latin typeface="Calibri" pitchFamily="34" charset="0"/>
-                <a:ea typeface="Calibri" pitchFamily="34" charset="-122"/>
-                <a:cs typeface="Calibri" pitchFamily="34" charset="-120"/>
-              </a:rPr>
-              <a:t>'e' dropped before vowel suffix</a:t>
-            </a:r>
-            <a:endParaRPr lang="en-US" sz="700" dirty="0"/>
-          </a:p>
-        </p:txBody>
-      </p:sp>
-      <p:sp>
-        <p:nvSpPr>
-          <p:cNvPr id="20" name="Shape 18"/>
+          <p:cNvPr id="19" name="Shape 17"/>
           <p:cNvSpPr/>
           <p:nvPr/>
         </p:nvSpPr>
@@ -27953,7 +28367,7 @@
       </p:sp>
       <p:sp>
         <p:nvSpPr>
-          <p:cNvPr id="21" name="Text 19"/>
+          <p:cNvPr id="20" name="Text 18"/>
           <p:cNvSpPr/>
           <p:nvPr/>
         </p:nvSpPr>
@@ -27984,7 +28398,7 @@
                 <a:ea typeface="Trebuchet MS" pitchFamily="34" charset="-122"/>
                 <a:cs typeface="Trebuchet MS" pitchFamily="34" charset="-120"/>
               </a:rPr>
-              <a:t>ation</a:t>
+              <a:t>able</a:t>
             </a:r>
             <a:endParaRPr lang="en-US" sz="1300" dirty="0"/>
           </a:p>
@@ -27992,7 +28406,7 @@
       </p:sp>
       <p:sp>
         <p:nvSpPr>
-          <p:cNvPr id="22" name="Text 20"/>
+          <p:cNvPr id="21" name="Text 19"/>
           <p:cNvSpPr/>
           <p:nvPr/>
         </p:nvSpPr>
@@ -28023,9 +28437,48 @@
                 <a:ea typeface="Calibri" pitchFamily="34" charset="-122"/>
                 <a:cs typeface="Calibri" pitchFamily="34" charset="-120"/>
               </a:rPr>
-              <a:t>the act or result of</a:t>
+              <a:t>able to be</a:t>
             </a:r>
             <a:endParaRPr lang="en-US" sz="850" dirty="0"/>
+          </a:p>
+        </p:txBody>
+      </p:sp>
+      <p:sp>
+        <p:nvSpPr>
+          <p:cNvPr id="22" name="Text 20"/>
+          <p:cNvSpPr/>
+          <p:nvPr/>
+        </p:nvSpPr>
+        <p:spPr>
+          <a:xfrm>
+            <a:off x="5803392" y="2752344"/>
+            <a:ext cx="1828800" cy="182880"/>
+          </a:xfrm>
+          <a:prstGeom prst="rect">
+            <a:avLst/>
+          </a:prstGeom>
+          <a:noFill/>
+          <a:ln/>
+        </p:spPr>
+        <p:txBody>
+          <a:bodyPr wrap="square" lIns="0" tIns="0" rIns="0" bIns="0" rtlCol="0" anchor="t"/>
+          <a:lstStyle/>
+          <a:p>
+            <a:pPr algn="ctr" indent="0" marL="0">
+              <a:buNone/>
+            </a:pPr>
+            <a:r>
+              <a:rPr lang="en-US" sz="700" i="1" dirty="0">
+                <a:solidFill>
+                  <a:srgbClr val="94A3B8"/>
+                </a:solidFill>
+                <a:latin typeface="Calibri" pitchFamily="34" charset="0"/>
+                <a:ea typeface="Calibri" pitchFamily="34" charset="-122"/>
+                <a:cs typeface="Calibri" pitchFamily="34" charset="-120"/>
+              </a:rPr>
+              <a:t>'e' dropped before vowel suffix</a:t>
+            </a:r>
+            <a:endParaRPr lang="en-US" sz="700" dirty="0"/>
           </a:p>
         </p:txBody>
       </p:sp>
@@ -28497,7 +28950,7 @@
                 <a:ea typeface="Trebuchet MS" pitchFamily="34" charset="-122"/>
                 <a:cs typeface="Trebuchet MS" pitchFamily="34" charset="-120"/>
               </a:rPr>
-              <a:t>tion</a:t>
+              <a:t>ble</a:t>
             </a:r>
             <a:endParaRPr lang="en-US" sz="1400" dirty="0"/>
           </a:p>
@@ -28604,8 +29057,8 @@
         </p:nvSpPr>
         <p:spPr>
           <a:xfrm>
-            <a:off x="1951330" y="4169664"/>
-            <a:ext cx="676656" cy="384048"/>
+            <a:off x="2023872" y="4169664"/>
+            <a:ext cx="685800" cy="384048"/>
           </a:xfrm>
           <a:prstGeom prst="rect">
             <a:avLst>
@@ -28631,8 +29084,8 @@
         </p:nvSpPr>
         <p:spPr>
           <a:xfrm>
-            <a:off x="1951330" y="4169664"/>
-            <a:ext cx="676656" cy="384048"/>
+            <a:off x="2023872" y="4169664"/>
+            <a:ext cx="685800" cy="384048"/>
           </a:xfrm>
           <a:prstGeom prst="rect">
             <a:avLst/>
@@ -28670,8 +29123,8 @@
         </p:nvSpPr>
         <p:spPr>
           <a:xfrm>
-            <a:off x="2677363" y="4169664"/>
-            <a:ext cx="676656" cy="384048"/>
+            <a:off x="2831592" y="4169664"/>
+            <a:ext cx="685800" cy="384048"/>
           </a:xfrm>
           <a:prstGeom prst="rect">
             <a:avLst>
@@ -28697,8 +29150,8 @@
         </p:nvSpPr>
         <p:spPr>
           <a:xfrm>
-            <a:off x="2677363" y="4169664"/>
-            <a:ext cx="676656" cy="384048"/>
+            <a:off x="2831592" y="4169664"/>
+            <a:ext cx="685800" cy="384048"/>
           </a:xfrm>
           <a:prstGeom prst="rect">
             <a:avLst/>
@@ -28736,8 +29189,8 @@
         </p:nvSpPr>
         <p:spPr>
           <a:xfrm>
-            <a:off x="3403397" y="4169664"/>
-            <a:ext cx="676656" cy="384048"/>
+            <a:off x="3639312" y="4169664"/>
+            <a:ext cx="685800" cy="384048"/>
           </a:xfrm>
           <a:prstGeom prst="rect">
             <a:avLst>
@@ -28763,8 +29216,8 @@
         </p:nvSpPr>
         <p:spPr>
           <a:xfrm>
-            <a:off x="3403397" y="4169664"/>
-            <a:ext cx="676656" cy="384048"/>
+            <a:off x="3639312" y="4169664"/>
+            <a:ext cx="685800" cy="384048"/>
           </a:xfrm>
           <a:prstGeom prst="rect">
             <a:avLst/>
@@ -28796,14 +29249,53 @@
       </p:sp>
       <p:sp>
         <p:nvSpPr>
-          <p:cNvPr id="46" name="Shape 44"/>
-          <p:cNvSpPr/>
-          <p:nvPr/>
-        </p:nvSpPr>
-        <p:spPr>
-          <a:xfrm>
-            <a:off x="4129430" y="4169664"/>
-            <a:ext cx="676656" cy="384048"/>
+          <p:cNvPr id="46" name="Text 44"/>
+          <p:cNvSpPr/>
+          <p:nvPr/>
+        </p:nvSpPr>
+        <p:spPr>
+          <a:xfrm>
+            <a:off x="3639312" y="4572000"/>
+            <a:ext cx="685800" cy="219456"/>
+          </a:xfrm>
+          <a:prstGeom prst="rect">
+            <a:avLst/>
+          </a:prstGeom>
+          <a:noFill/>
+          <a:ln/>
+        </p:spPr>
+        <p:txBody>
+          <a:bodyPr wrap="square" lIns="0" tIns="0" rIns="0" bIns="0" rtlCol="0" anchor="t"/>
+          <a:lstStyle/>
+          <a:p>
+            <a:pPr algn="ctr" indent="0" marL="0">
+              <a:buNone/>
+            </a:pPr>
+            <a:r>
+              <a:rPr lang="en-US" sz="750" i="1" dirty="0">
+                <a:solidFill>
+                  <a:srgbClr val="94A3B8"/>
+                </a:solidFill>
+                <a:latin typeface="Calibri" pitchFamily="34" charset="0"/>
+                <a:ea typeface="Calibri" pitchFamily="34" charset="-122"/>
+                <a:cs typeface="Calibri" pitchFamily="34" charset="-120"/>
+              </a:rPr>
+              <a:t>/z/</a:t>
+            </a:r>
+            <a:endParaRPr lang="en-US" sz="750" dirty="0"/>
+          </a:p>
+        </p:txBody>
+      </p:sp>
+      <p:sp>
+        <p:nvSpPr>
+          <p:cNvPr id="47" name="Shape 45"/>
+          <p:cNvSpPr/>
+          <p:nvPr/>
+        </p:nvSpPr>
+        <p:spPr>
+          <a:xfrm>
+            <a:off x="4447032" y="4169664"/>
+            <a:ext cx="685800" cy="384048"/>
           </a:xfrm>
           <a:prstGeom prst="rect">
             <a:avLst>
@@ -28823,14 +29315,14 @@
       </p:sp>
       <p:sp>
         <p:nvSpPr>
-          <p:cNvPr id="47" name="Text 45"/>
-          <p:cNvSpPr/>
-          <p:nvPr/>
-        </p:nvSpPr>
-        <p:spPr>
-          <a:xfrm>
-            <a:off x="4129430" y="4169664"/>
-            <a:ext cx="676656" cy="384048"/>
+          <p:cNvPr id="48" name="Text 46"/>
+          <p:cNvSpPr/>
+          <p:nvPr/>
+        </p:nvSpPr>
+        <p:spPr>
+          <a:xfrm>
+            <a:off x="4447032" y="4169664"/>
+            <a:ext cx="685800" cy="384048"/>
           </a:xfrm>
           <a:prstGeom prst="rect">
             <a:avLst/>
@@ -28862,14 +29354,14 @@
       </p:sp>
       <p:sp>
         <p:nvSpPr>
-          <p:cNvPr id="48" name="Shape 46"/>
-          <p:cNvSpPr/>
-          <p:nvPr/>
-        </p:nvSpPr>
-        <p:spPr>
-          <a:xfrm>
-            <a:off x="4855464" y="4169664"/>
-            <a:ext cx="676656" cy="384048"/>
+          <p:cNvPr id="49" name="Shape 47"/>
+          <p:cNvSpPr/>
+          <p:nvPr/>
+        </p:nvSpPr>
+        <p:spPr>
+          <a:xfrm>
+            <a:off x="5254752" y="4169664"/>
+            <a:ext cx="685800" cy="384048"/>
           </a:xfrm>
           <a:prstGeom prst="rect">
             <a:avLst>
@@ -28889,14 +29381,14 @@
       </p:sp>
       <p:sp>
         <p:nvSpPr>
-          <p:cNvPr id="49" name="Text 47"/>
-          <p:cNvSpPr/>
-          <p:nvPr/>
-        </p:nvSpPr>
-        <p:spPr>
-          <a:xfrm>
-            <a:off x="4855464" y="4169664"/>
-            <a:ext cx="676656" cy="384048"/>
+          <p:cNvPr id="50" name="Text 48"/>
+          <p:cNvSpPr/>
+          <p:nvPr/>
+        </p:nvSpPr>
+        <p:spPr>
+          <a:xfrm>
+            <a:off x="5254752" y="4169664"/>
+            <a:ext cx="685800" cy="384048"/>
           </a:xfrm>
           <a:prstGeom prst="rect">
             <a:avLst/>
@@ -28928,14 +29420,14 @@
       </p:sp>
       <p:sp>
         <p:nvSpPr>
-          <p:cNvPr id="50" name="Shape 48"/>
-          <p:cNvSpPr/>
-          <p:nvPr/>
-        </p:nvSpPr>
-        <p:spPr>
-          <a:xfrm>
-            <a:off x="5581498" y="4169664"/>
-            <a:ext cx="676656" cy="384048"/>
+          <p:cNvPr id="51" name="Shape 49"/>
+          <p:cNvSpPr/>
+          <p:nvPr/>
+        </p:nvSpPr>
+        <p:spPr>
+          <a:xfrm>
+            <a:off x="6062472" y="4169664"/>
+            <a:ext cx="685800" cy="384048"/>
           </a:xfrm>
           <a:prstGeom prst="rect">
             <a:avLst>
@@ -28955,14 +29447,14 @@
       </p:sp>
       <p:sp>
         <p:nvSpPr>
-          <p:cNvPr id="51" name="Text 49"/>
-          <p:cNvSpPr/>
-          <p:nvPr/>
-        </p:nvSpPr>
-        <p:spPr>
-          <a:xfrm>
-            <a:off x="5581498" y="4169664"/>
-            <a:ext cx="676656" cy="384048"/>
+          <p:cNvPr id="52" name="Text 50"/>
+          <p:cNvSpPr/>
+          <p:nvPr/>
+        </p:nvSpPr>
+        <p:spPr>
+          <a:xfrm>
+            <a:off x="6062472" y="4169664"/>
+            <a:ext cx="685800" cy="384048"/>
           </a:xfrm>
           <a:prstGeom prst="rect">
             <a:avLst/>
@@ -28994,14 +29486,14 @@
       </p:sp>
       <p:sp>
         <p:nvSpPr>
-          <p:cNvPr id="52" name="Shape 50"/>
-          <p:cNvSpPr/>
-          <p:nvPr/>
-        </p:nvSpPr>
-        <p:spPr>
-          <a:xfrm>
-            <a:off x="6307531" y="4169664"/>
-            <a:ext cx="676656" cy="384048"/>
+          <p:cNvPr id="53" name="Shape 51"/>
+          <p:cNvSpPr/>
+          <p:nvPr/>
+        </p:nvSpPr>
+        <p:spPr>
+          <a:xfrm>
+            <a:off x="6870192" y="4169664"/>
+            <a:ext cx="685800" cy="384048"/>
           </a:xfrm>
           <a:prstGeom prst="rect">
             <a:avLst>
@@ -29021,14 +29513,14 @@
       </p:sp>
       <p:sp>
         <p:nvSpPr>
-          <p:cNvPr id="53" name="Text 51"/>
-          <p:cNvSpPr/>
-          <p:nvPr/>
-        </p:nvSpPr>
-        <p:spPr>
-          <a:xfrm>
-            <a:off x="6307531" y="4169664"/>
-            <a:ext cx="676656" cy="384048"/>
+          <p:cNvPr id="54" name="Text 52"/>
+          <p:cNvSpPr/>
+          <p:nvPr/>
+        </p:nvSpPr>
+        <p:spPr>
+          <a:xfrm>
+            <a:off x="6870192" y="4169664"/>
+            <a:ext cx="685800" cy="384048"/>
           </a:xfrm>
           <a:prstGeom prst="rect">
             <a:avLst/>
@@ -29052,7 +29544,7 @@
                 <a:ea typeface="Trebuchet MS" pitchFamily="34" charset="-122"/>
                 <a:cs typeface="Trebuchet MS" pitchFamily="34" charset="-120"/>
               </a:rPr>
-              <a:t>t</a:t>
+              <a:t>b</a:t>
             </a:r>
             <a:endParaRPr lang="en-US" sz="900" dirty="0"/>
           </a:p>
@@ -29060,53 +29552,14 @@
       </p:sp>
       <p:sp>
         <p:nvSpPr>
-          <p:cNvPr id="54" name="Text 52"/>
-          <p:cNvSpPr/>
-          <p:nvPr/>
-        </p:nvSpPr>
-        <p:spPr>
-          <a:xfrm>
-            <a:off x="6307531" y="4572000"/>
-            <a:ext cx="676656" cy="219456"/>
-          </a:xfrm>
-          <a:prstGeom prst="rect">
-            <a:avLst/>
-          </a:prstGeom>
-          <a:noFill/>
-          <a:ln/>
-        </p:spPr>
-        <p:txBody>
-          <a:bodyPr wrap="square" lIns="0" tIns="0" rIns="0" bIns="0" rtlCol="0" anchor="t"/>
-          <a:lstStyle/>
-          <a:p>
-            <a:pPr algn="ctr" indent="0" marL="0">
-              <a:buNone/>
-            </a:pPr>
-            <a:r>
-              <a:rPr lang="en-US" sz="750" i="1" dirty="0">
-                <a:solidFill>
-                  <a:srgbClr val="94A3B8"/>
-                </a:solidFill>
-                <a:latin typeface="Calibri" pitchFamily="34" charset="0"/>
-                <a:ea typeface="Calibri" pitchFamily="34" charset="-122"/>
-                <a:cs typeface="Calibri" pitchFamily="34" charset="-120"/>
-              </a:rPr>
-              <a:t>/sh/</a:t>
-            </a:r>
-            <a:endParaRPr lang="en-US" sz="750" dirty="0"/>
-          </a:p>
-        </p:txBody>
-      </p:sp>
-      <p:sp>
-        <p:nvSpPr>
           <p:cNvPr id="55" name="Shape 53"/>
           <p:cNvSpPr/>
           <p:nvPr/>
         </p:nvSpPr>
         <p:spPr>
           <a:xfrm>
-            <a:off x="7033565" y="4169664"/>
-            <a:ext cx="676656" cy="384048"/>
+            <a:off x="7677912" y="4169664"/>
+            <a:ext cx="685800" cy="384048"/>
           </a:xfrm>
           <a:prstGeom prst="rect">
             <a:avLst>
@@ -29132,8 +29585,8 @@
         </p:nvSpPr>
         <p:spPr>
           <a:xfrm>
-            <a:off x="7033565" y="4169664"/>
-            <a:ext cx="676656" cy="384048"/>
+            <a:off x="7677912" y="4169664"/>
+            <a:ext cx="685800" cy="384048"/>
           </a:xfrm>
           <a:prstGeom prst="rect">
             <a:avLst/>
@@ -29157,73 +29610,7 @@
                 <a:ea typeface="Trebuchet MS" pitchFamily="34" charset="-122"/>
                 <a:cs typeface="Trebuchet MS" pitchFamily="34" charset="-120"/>
               </a:rPr>
-              <a:t>io</a:t>
-            </a:r>
-            <a:endParaRPr lang="en-US" sz="900" dirty="0"/>
-          </a:p>
-        </p:txBody>
-      </p:sp>
-      <p:sp>
-        <p:nvSpPr>
-          <p:cNvPr id="57" name="Shape 55"/>
-          <p:cNvSpPr/>
-          <p:nvPr/>
-        </p:nvSpPr>
-        <p:spPr>
-          <a:xfrm>
-            <a:off x="7759598" y="4169664"/>
-            <a:ext cx="676656" cy="384048"/>
-          </a:xfrm>
-          <a:prstGeom prst="rect">
-            <a:avLst>
-              <a:gd name="adj" fmla="val 9524"/>
-            </a:avLst>
-          </a:prstGeom>
-          <a:solidFill>
-            <a:srgbClr val="FFFFFF"/>
-          </a:solidFill>
-          <a:ln w="12700">
-            <a:solidFill>
-              <a:srgbClr val="DB2777"/>
-            </a:solidFill>
-            <a:prstDash val="solid"/>
-          </a:ln>
-        </p:spPr>
-      </p:sp>
-      <p:sp>
-        <p:nvSpPr>
-          <p:cNvPr id="58" name="Text 56"/>
-          <p:cNvSpPr/>
-          <p:nvPr/>
-        </p:nvSpPr>
-        <p:spPr>
-          <a:xfrm>
-            <a:off x="7759598" y="4169664"/>
-            <a:ext cx="676656" cy="384048"/>
-          </a:xfrm>
-          <a:prstGeom prst="rect">
-            <a:avLst/>
-          </a:prstGeom>
-          <a:noFill/>
-          <a:ln/>
-        </p:spPr>
-        <p:txBody>
-          <a:bodyPr wrap="square" lIns="0" tIns="0" rIns="0" bIns="0" rtlCol="0" anchor="ctr"/>
-          <a:lstStyle/>
-          <a:p>
-            <a:pPr algn="ctr" indent="0" marL="0">
-              <a:buNone/>
-            </a:pPr>
-            <a:r>
-              <a:rPr lang="en-US" sz="900" b="1" dirty="0">
-                <a:solidFill>
-                  <a:srgbClr val="9D174D"/>
-                </a:solidFill>
-                <a:latin typeface="Trebuchet MS" pitchFamily="34" charset="0"/>
-                <a:ea typeface="Trebuchet MS" pitchFamily="34" charset="-122"/>
-                <a:cs typeface="Trebuchet MS" pitchFamily="34" charset="-120"/>
-              </a:rPr>
-              <a:t>n</a:t>
+              <a:t>le</a:t>
             </a:r>
             <a:endParaRPr lang="en-US" sz="900" dirty="0"/>
           </a:p>
@@ -29654,7 +30041,7 @@
                 <a:ea typeface="Trebuchet MS" pitchFamily="34" charset="-122"/>
                 <a:cs typeface="Trebuchet MS" pitchFamily="34" charset="-120"/>
               </a:rPr>
-              <a:t>unobserved</a:t>
+              <a:t>observational</a:t>
             </a:r>
             <a:endParaRPr lang="en-US" sz="2800" dirty="0"/>
           </a:p>
@@ -30481,7 +30868,7 @@
                 <a:ea typeface="Trebuchet MS" pitchFamily="34" charset="-122"/>
                 <a:cs typeface="Trebuchet MS" pitchFamily="34" charset="-120"/>
               </a:rPr>
-              <a:t>unobserved</a:t>
+              <a:t>observational</a:t>
             </a:r>
             <a:endParaRPr lang="en-US" sz="2800" dirty="0"/>
           </a:p>
@@ -30570,11 +30957,11 @@
             </a:avLst>
           </a:prstGeom>
           <a:solidFill>
-            <a:srgbClr val="DDD6FE"/>
+            <a:srgbClr val="CCFBF1"/>
           </a:solidFill>
           <a:ln w="19050">
             <a:solidFill>
-              <a:srgbClr val="7C3AED"/>
+              <a:srgbClr val="0D9488"/>
             </a:solidFill>
             <a:prstDash val="solid"/>
           </a:ln>
@@ -30614,13 +31001,13 @@
             <a:r>
               <a:rPr lang="en-US" sz="1300" b="1" dirty="0">
                 <a:solidFill>
-                  <a:srgbClr val="4C1D95"/>
+                  <a:srgbClr val="0F766E"/>
                 </a:solidFill>
                 <a:latin typeface="Trebuchet MS" pitchFamily="34" charset="0"/>
                 <a:ea typeface="Trebuchet MS" pitchFamily="34" charset="-122"/>
                 <a:cs typeface="Trebuchet MS" pitchFamily="34" charset="-120"/>
               </a:rPr>
-              <a:t>un</a:t>
+              <a:t>observe</a:t>
             </a:r>
             <a:endParaRPr lang="en-US" sz="1300" dirty="0"/>
           </a:p>
@@ -30659,7 +31046,7 @@
                 <a:ea typeface="Calibri" pitchFamily="34" charset="-122"/>
                 <a:cs typeface="Calibri" pitchFamily="34" charset="-120"/>
               </a:rPr>
-              <a:t>not</a:t>
+              <a:t>to watch carefully</a:t>
             </a:r>
             <a:endParaRPr lang="en-US" sz="850" dirty="0"/>
           </a:p>
@@ -30682,11 +31069,11 @@
             </a:avLst>
           </a:prstGeom>
           <a:solidFill>
-            <a:srgbClr val="CCFBF1"/>
+            <a:srgbClr val="FCE7F3"/>
           </a:solidFill>
           <a:ln w="19050">
             <a:solidFill>
-              <a:srgbClr val="0D9488"/>
+              <a:srgbClr val="DB2777"/>
             </a:solidFill>
             <a:prstDash val="solid"/>
           </a:ln>
@@ -30726,13 +31113,13 @@
             <a:r>
               <a:rPr lang="en-US" sz="1300" b="1" dirty="0">
                 <a:solidFill>
-                  <a:srgbClr val="0F766E"/>
+                  <a:srgbClr val="9D174D"/>
                 </a:solidFill>
                 <a:latin typeface="Trebuchet MS" pitchFamily="34" charset="0"/>
                 <a:ea typeface="Trebuchet MS" pitchFamily="34" charset="-122"/>
                 <a:cs typeface="Trebuchet MS" pitchFamily="34" charset="-120"/>
               </a:rPr>
-              <a:t>observe</a:t>
+              <a:t>ation</a:t>
             </a:r>
             <a:endParaRPr lang="en-US" sz="1300" dirty="0"/>
           </a:p>
@@ -30771,7 +31158,7 @@
                 <a:ea typeface="Calibri" pitchFamily="34" charset="-122"/>
                 <a:cs typeface="Calibri" pitchFamily="34" charset="-120"/>
               </a:rPr>
-              <a:t>to watch carefully</a:t>
+              <a:t>the act or result of</a:t>
             </a:r>
             <a:endParaRPr lang="en-US" sz="850" dirty="0"/>
           </a:p>
@@ -30883,7 +31270,7 @@
                 <a:ea typeface="Trebuchet MS" pitchFamily="34" charset="-122"/>
                 <a:cs typeface="Trebuchet MS" pitchFamily="34" charset="-120"/>
               </a:rPr>
-              <a:t>ed</a:t>
+              <a:t>al</a:t>
             </a:r>
             <a:endParaRPr lang="en-US" sz="1300" dirty="0"/>
           </a:p>
@@ -30922,7 +31309,7 @@
                 <a:ea typeface="Calibri" pitchFamily="34" charset="-122"/>
                 <a:cs typeface="Calibri" pitchFamily="34" charset="-120"/>
               </a:rPr>
-              <a:t>in the past; done to something</a:t>
+              <a:t>relating to; of the kind of</a:t>
             </a:r>
             <a:endParaRPr lang="en-US" sz="850" dirty="0"/>
           </a:p>
@@ -31617,7 +32004,7 @@
                 <a:ea typeface="Trebuchet MS" pitchFamily="34" charset="-122"/>
                 <a:cs typeface="Trebuchet MS" pitchFamily="34" charset="-120"/>
               </a:rPr>
-              <a:t>unobserved</a:t>
+              <a:t>observational</a:t>
             </a:r>
             <a:endParaRPr lang="en-US" sz="2800" dirty="0"/>
           </a:p>
@@ -31706,11 +32093,11 @@
             </a:avLst>
           </a:prstGeom>
           <a:solidFill>
-            <a:srgbClr val="DDD6FE"/>
+            <a:srgbClr val="CCFBF1"/>
           </a:solidFill>
           <a:ln w="19050">
             <a:solidFill>
-              <a:srgbClr val="7C3AED"/>
+              <a:srgbClr val="0D9488"/>
             </a:solidFill>
             <a:prstDash val="solid"/>
           </a:ln>
@@ -31750,13 +32137,13 @@
             <a:r>
               <a:rPr lang="en-US" sz="1300" b="1" dirty="0">
                 <a:solidFill>
-                  <a:srgbClr val="4C1D95"/>
+                  <a:srgbClr val="0F766E"/>
                 </a:solidFill>
                 <a:latin typeface="Trebuchet MS" pitchFamily="34" charset="0"/>
                 <a:ea typeface="Trebuchet MS" pitchFamily="34" charset="-122"/>
                 <a:cs typeface="Trebuchet MS" pitchFamily="34" charset="-120"/>
               </a:rPr>
-              <a:t>un</a:t>
+              <a:t>observe</a:t>
             </a:r>
             <a:endParaRPr lang="en-US" sz="1300" dirty="0"/>
           </a:p>
@@ -31795,7 +32182,7 @@
                 <a:ea typeface="Calibri" pitchFamily="34" charset="-122"/>
                 <a:cs typeface="Calibri" pitchFamily="34" charset="-120"/>
               </a:rPr>
-              <a:t>not</a:t>
+              <a:t>to watch carefully</a:t>
             </a:r>
             <a:endParaRPr lang="en-US" sz="850" dirty="0"/>
           </a:p>
@@ -31818,11 +32205,11 @@
             </a:avLst>
           </a:prstGeom>
           <a:solidFill>
-            <a:srgbClr val="CCFBF1"/>
+            <a:srgbClr val="FCE7F3"/>
           </a:solidFill>
           <a:ln w="19050">
             <a:solidFill>
-              <a:srgbClr val="0D9488"/>
+              <a:srgbClr val="DB2777"/>
             </a:solidFill>
             <a:prstDash val="solid"/>
           </a:ln>
@@ -31862,13 +32249,13 @@
             <a:r>
               <a:rPr lang="en-US" sz="1300" b="1" dirty="0">
                 <a:solidFill>
-                  <a:srgbClr val="0F766E"/>
+                  <a:srgbClr val="9D174D"/>
                 </a:solidFill>
                 <a:latin typeface="Trebuchet MS" pitchFamily="34" charset="0"/>
                 <a:ea typeface="Trebuchet MS" pitchFamily="34" charset="-122"/>
                 <a:cs typeface="Trebuchet MS" pitchFamily="34" charset="-120"/>
               </a:rPr>
-              <a:t>observe</a:t>
+              <a:t>ation</a:t>
             </a:r>
             <a:endParaRPr lang="en-US" sz="1300" dirty="0"/>
           </a:p>
@@ -31907,7 +32294,7 @@
                 <a:ea typeface="Calibri" pitchFamily="34" charset="-122"/>
                 <a:cs typeface="Calibri" pitchFamily="34" charset="-120"/>
               </a:rPr>
-              <a:t>to watch carefully</a:t>
+              <a:t>the act or result of</a:t>
             </a:r>
             <a:endParaRPr lang="en-US" sz="850" dirty="0"/>
           </a:p>
@@ -32019,7 +32406,7 @@
                 <a:ea typeface="Trebuchet MS" pitchFamily="34" charset="-122"/>
                 <a:cs typeface="Trebuchet MS" pitchFamily="34" charset="-120"/>
               </a:rPr>
-              <a:t>ed</a:t>
+              <a:t>al</a:t>
             </a:r>
             <a:endParaRPr lang="en-US" sz="1300" dirty="0"/>
           </a:p>
@@ -32058,7 +32445,7 @@
                 <a:ea typeface="Calibri" pitchFamily="34" charset="-122"/>
                 <a:cs typeface="Calibri" pitchFamily="34" charset="-120"/>
               </a:rPr>
-              <a:t>in the past; done to something</a:t>
+              <a:t>relating to; of the kind of</a:t>
             </a:r>
             <a:endParaRPr lang="en-US" sz="850" dirty="0"/>
           </a:p>
@@ -32165,8 +32552,8 @@
         </p:nvSpPr>
         <p:spPr>
           <a:xfrm>
-            <a:off x="2313432" y="3364992"/>
-            <a:ext cx="1645920" cy="475488"/>
+            <a:off x="1978152" y="3364992"/>
+            <a:ext cx="1225296" cy="475488"/>
           </a:xfrm>
           <a:prstGeom prst="rect">
             <a:avLst>
@@ -32192,8 +32579,8 @@
         </p:nvSpPr>
         <p:spPr>
           <a:xfrm>
-            <a:off x="2313432" y="3364992"/>
-            <a:ext cx="1645920" cy="475488"/>
+            <a:off x="1978152" y="3364992"/>
+            <a:ext cx="1225296" cy="475488"/>
           </a:xfrm>
           <a:prstGeom prst="rect">
             <a:avLst/>
@@ -32217,7 +32604,7 @@
                 <a:ea typeface="Trebuchet MS" pitchFamily="34" charset="-122"/>
                 <a:cs typeface="Trebuchet MS" pitchFamily="34" charset="-120"/>
               </a:rPr>
-              <a:t>un</a:t>
+              <a:t>ob</a:t>
             </a:r>
             <a:endParaRPr lang="en-US" sz="1400" dirty="0"/>
           </a:p>
@@ -32231,8 +32618,8 @@
         </p:nvSpPr>
         <p:spPr>
           <a:xfrm>
-            <a:off x="3959352" y="3364992"/>
-            <a:ext cx="411480" cy="475488"/>
+            <a:off x="3203448" y="3364992"/>
+            <a:ext cx="76200" cy="475488"/>
           </a:xfrm>
           <a:prstGeom prst="rect">
             <a:avLst/>
@@ -32270,8 +32657,8 @@
         </p:nvSpPr>
         <p:spPr>
           <a:xfrm>
-            <a:off x="4370832" y="3364992"/>
-            <a:ext cx="1645920" cy="475488"/>
+            <a:off x="3279648" y="3364992"/>
+            <a:ext cx="1225296" cy="475488"/>
           </a:xfrm>
           <a:prstGeom prst="rect">
             <a:avLst>
@@ -32297,8 +32684,8 @@
         </p:nvSpPr>
         <p:spPr>
           <a:xfrm>
-            <a:off x="4370832" y="3364992"/>
-            <a:ext cx="1645920" cy="475488"/>
+            <a:off x="3279648" y="3364992"/>
+            <a:ext cx="1225296" cy="475488"/>
           </a:xfrm>
           <a:prstGeom prst="rect">
             <a:avLst/>
@@ -32322,7 +32709,7 @@
                 <a:ea typeface="Trebuchet MS" pitchFamily="34" charset="-122"/>
                 <a:cs typeface="Trebuchet MS" pitchFamily="34" charset="-120"/>
               </a:rPr>
-              <a:t>ob</a:t>
+              <a:t>ser</a:t>
             </a:r>
             <a:endParaRPr lang="en-US" sz="1400" dirty="0"/>
           </a:p>
@@ -32336,8 +32723,8 @@
         </p:nvSpPr>
         <p:spPr>
           <a:xfrm>
-            <a:off x="6016752" y="3364992"/>
-            <a:ext cx="411480" cy="475488"/>
+            <a:off x="4504944" y="3364992"/>
+            <a:ext cx="76200" cy="475488"/>
           </a:xfrm>
           <a:prstGeom prst="rect">
             <a:avLst/>
@@ -32375,8 +32762,8 @@
         </p:nvSpPr>
         <p:spPr>
           <a:xfrm>
-            <a:off x="6428232" y="3364992"/>
-            <a:ext cx="1645920" cy="475488"/>
+            <a:off x="4581144" y="3364992"/>
+            <a:ext cx="1225296" cy="475488"/>
           </a:xfrm>
           <a:prstGeom prst="rect">
             <a:avLst>
@@ -32402,8 +32789,8 @@
         </p:nvSpPr>
         <p:spPr>
           <a:xfrm>
-            <a:off x="6428232" y="3364992"/>
-            <a:ext cx="1645920" cy="475488"/>
+            <a:off x="4581144" y="3364992"/>
+            <a:ext cx="1225296" cy="475488"/>
           </a:xfrm>
           <a:prstGeom prst="rect">
             <a:avLst/>
@@ -32427,7 +32814,7 @@
                 <a:ea typeface="Trebuchet MS" pitchFamily="34" charset="-122"/>
                 <a:cs typeface="Trebuchet MS" pitchFamily="34" charset="-120"/>
               </a:rPr>
-              <a:t>served</a:t>
+              <a:t>va</a:t>
             </a:r>
             <a:endParaRPr lang="en-US" sz="1400" dirty="0"/>
           </a:p>
@@ -32435,7 +32822,217 @@
       </p:sp>
       <p:sp>
         <p:nvSpPr>
-          <p:cNvPr id="37" name="Shape 35"/>
+          <p:cNvPr id="37" name="Text 35"/>
+          <p:cNvSpPr/>
+          <p:nvPr/>
+        </p:nvSpPr>
+        <p:spPr>
+          <a:xfrm>
+            <a:off x="5806440" y="3364992"/>
+            <a:ext cx="76200" cy="475488"/>
+          </a:xfrm>
+          <a:prstGeom prst="rect">
+            <a:avLst/>
+          </a:prstGeom>
+          <a:noFill/>
+          <a:ln/>
+        </p:spPr>
+        <p:txBody>
+          <a:bodyPr wrap="square" lIns="0" tIns="0" rIns="0" bIns="0" rtlCol="0" anchor="ctr"/>
+          <a:lstStyle/>
+          <a:p>
+            <a:pPr algn="ctr" indent="0" marL="0">
+              <a:buNone/>
+            </a:pPr>
+            <a:r>
+              <a:rPr lang="en-US" sz="1600" b="1" dirty="0">
+                <a:solidFill>
+                  <a:srgbClr val="0D9488"/>
+                </a:solidFill>
+                <a:latin typeface="Trebuchet MS" pitchFamily="34" charset="0"/>
+                <a:ea typeface="Trebuchet MS" pitchFamily="34" charset="-122"/>
+                <a:cs typeface="Trebuchet MS" pitchFamily="34" charset="-120"/>
+              </a:rPr>
+              <a:t>·</a:t>
+            </a:r>
+            <a:endParaRPr lang="en-US" sz="1600" dirty="0"/>
+          </a:p>
+        </p:txBody>
+      </p:sp>
+      <p:sp>
+        <p:nvSpPr>
+          <p:cNvPr id="38" name="Shape 36"/>
+          <p:cNvSpPr/>
+          <p:nvPr/>
+        </p:nvSpPr>
+        <p:spPr>
+          <a:xfrm>
+            <a:off x="5882640" y="3364992"/>
+            <a:ext cx="1225296" cy="475488"/>
+          </a:xfrm>
+          <a:prstGeom prst="rect">
+            <a:avLst>
+              <a:gd name="adj" fmla="val 9615"/>
+            </a:avLst>
+          </a:prstGeom>
+          <a:solidFill>
+            <a:srgbClr val="FFFFFF"/>
+          </a:solidFill>
+          <a:ln w="12700">
+            <a:solidFill>
+              <a:srgbClr val="0D9488"/>
+            </a:solidFill>
+            <a:prstDash val="solid"/>
+          </a:ln>
+        </p:spPr>
+      </p:sp>
+      <p:sp>
+        <p:nvSpPr>
+          <p:cNvPr id="39" name="Text 37"/>
+          <p:cNvSpPr/>
+          <p:nvPr/>
+        </p:nvSpPr>
+        <p:spPr>
+          <a:xfrm>
+            <a:off x="5882640" y="3364992"/>
+            <a:ext cx="1225296" cy="475488"/>
+          </a:xfrm>
+          <a:prstGeom prst="rect">
+            <a:avLst/>
+          </a:prstGeom>
+          <a:noFill/>
+          <a:ln/>
+        </p:spPr>
+        <p:txBody>
+          <a:bodyPr wrap="square" lIns="0" tIns="0" rIns="0" bIns="0" rtlCol="0" anchor="ctr"/>
+          <a:lstStyle/>
+          <a:p>
+            <a:pPr algn="ctr" indent="0" marL="0">
+              <a:buNone/>
+            </a:pPr>
+            <a:r>
+              <a:rPr lang="en-US" sz="1400" b="1" dirty="0">
+                <a:solidFill>
+                  <a:srgbClr val="0D9488"/>
+                </a:solidFill>
+                <a:latin typeface="Trebuchet MS" pitchFamily="34" charset="0"/>
+                <a:ea typeface="Trebuchet MS" pitchFamily="34" charset="-122"/>
+                <a:cs typeface="Trebuchet MS" pitchFamily="34" charset="-120"/>
+              </a:rPr>
+              <a:t>tion</a:t>
+            </a:r>
+            <a:endParaRPr lang="en-US" sz="1400" dirty="0"/>
+          </a:p>
+        </p:txBody>
+      </p:sp>
+      <p:sp>
+        <p:nvSpPr>
+          <p:cNvPr id="40" name="Text 38"/>
+          <p:cNvSpPr/>
+          <p:nvPr/>
+        </p:nvSpPr>
+        <p:spPr>
+          <a:xfrm>
+            <a:off x="7107936" y="3364992"/>
+            <a:ext cx="76200" cy="475488"/>
+          </a:xfrm>
+          <a:prstGeom prst="rect">
+            <a:avLst/>
+          </a:prstGeom>
+          <a:noFill/>
+          <a:ln/>
+        </p:spPr>
+        <p:txBody>
+          <a:bodyPr wrap="square" lIns="0" tIns="0" rIns="0" bIns="0" rtlCol="0" anchor="ctr"/>
+          <a:lstStyle/>
+          <a:p>
+            <a:pPr algn="ctr" indent="0" marL="0">
+              <a:buNone/>
+            </a:pPr>
+            <a:r>
+              <a:rPr lang="en-US" sz="1600" b="1" dirty="0">
+                <a:solidFill>
+                  <a:srgbClr val="0D9488"/>
+                </a:solidFill>
+                <a:latin typeface="Trebuchet MS" pitchFamily="34" charset="0"/>
+                <a:ea typeface="Trebuchet MS" pitchFamily="34" charset="-122"/>
+                <a:cs typeface="Trebuchet MS" pitchFamily="34" charset="-120"/>
+              </a:rPr>
+              <a:t>·</a:t>
+            </a:r>
+            <a:endParaRPr lang="en-US" sz="1600" dirty="0"/>
+          </a:p>
+        </p:txBody>
+      </p:sp>
+      <p:sp>
+        <p:nvSpPr>
+          <p:cNvPr id="41" name="Shape 39"/>
+          <p:cNvSpPr/>
+          <p:nvPr/>
+        </p:nvSpPr>
+        <p:spPr>
+          <a:xfrm>
+            <a:off x="7184136" y="3364992"/>
+            <a:ext cx="1225296" cy="475488"/>
+          </a:xfrm>
+          <a:prstGeom prst="rect">
+            <a:avLst>
+              <a:gd name="adj" fmla="val 9615"/>
+            </a:avLst>
+          </a:prstGeom>
+          <a:solidFill>
+            <a:srgbClr val="FFFFFF"/>
+          </a:solidFill>
+          <a:ln w="12700">
+            <a:solidFill>
+              <a:srgbClr val="0D9488"/>
+            </a:solidFill>
+            <a:prstDash val="solid"/>
+          </a:ln>
+        </p:spPr>
+      </p:sp>
+      <p:sp>
+        <p:nvSpPr>
+          <p:cNvPr id="42" name="Text 40"/>
+          <p:cNvSpPr/>
+          <p:nvPr/>
+        </p:nvSpPr>
+        <p:spPr>
+          <a:xfrm>
+            <a:off x="7184136" y="3364992"/>
+            <a:ext cx="1225296" cy="475488"/>
+          </a:xfrm>
+          <a:prstGeom prst="rect">
+            <a:avLst/>
+          </a:prstGeom>
+          <a:noFill/>
+          <a:ln/>
+        </p:spPr>
+        <p:txBody>
+          <a:bodyPr wrap="square" lIns="0" tIns="0" rIns="0" bIns="0" rtlCol="0" anchor="ctr"/>
+          <a:lstStyle/>
+          <a:p>
+            <a:pPr algn="ctr" indent="0" marL="0">
+              <a:buNone/>
+            </a:pPr>
+            <a:r>
+              <a:rPr lang="en-US" sz="1400" b="1" dirty="0">
+                <a:solidFill>
+                  <a:srgbClr val="0D9488"/>
+                </a:solidFill>
+                <a:latin typeface="Trebuchet MS" pitchFamily="34" charset="0"/>
+                <a:ea typeface="Trebuchet MS" pitchFamily="34" charset="-122"/>
+                <a:cs typeface="Trebuchet MS" pitchFamily="34" charset="-120"/>
+              </a:rPr>
+              <a:t>al</a:t>
+            </a:r>
+            <a:endParaRPr lang="en-US" sz="1400" dirty="0"/>
+          </a:p>
+        </p:txBody>
+      </p:sp>
+      <p:sp>
+        <p:nvSpPr>
+          <p:cNvPr id="43" name="Shape 41"/>
           <p:cNvSpPr/>
           <p:nvPr/>
         </p:nvSpPr>
@@ -32462,7 +33059,7 @@
       </p:sp>
       <p:sp>
         <p:nvSpPr>
-          <p:cNvPr id="38" name="Text 36"/>
+          <p:cNvPr id="44" name="Text 42"/>
           <p:cNvSpPr/>
           <p:nvPr/>
         </p:nvSpPr>
@@ -32501,7 +33098,7 @@
       </p:sp>
       <p:sp>
         <p:nvSpPr>
-          <p:cNvPr id="39" name="Shape 37"/>
+          <p:cNvPr id="45" name="Shape 43"/>
           <p:cNvSpPr/>
           <p:nvPr/>
         </p:nvSpPr>
@@ -32528,7 +33125,7 @@
       </p:sp>
       <p:sp>
         <p:nvSpPr>
-          <p:cNvPr id="40" name="Text 38"/>
+          <p:cNvPr id="46" name="Text 44"/>
           <p:cNvSpPr/>
           <p:nvPr/>
         </p:nvSpPr>
@@ -32990,7 +33587,7 @@
                 <a:ea typeface="Trebuchet MS" pitchFamily="34" charset="-122"/>
                 <a:cs typeface="Trebuchet MS" pitchFamily="34" charset="-120"/>
               </a:rPr>
-              <a:t>unobserved</a:t>
+              <a:t>observational</a:t>
             </a:r>
             <a:endParaRPr lang="en-US" sz="2800" dirty="0"/>
           </a:p>
@@ -33079,11 +33676,11 @@
             </a:avLst>
           </a:prstGeom>
           <a:solidFill>
-            <a:srgbClr val="DDD6FE"/>
+            <a:srgbClr val="CCFBF1"/>
           </a:solidFill>
           <a:ln w="19050">
             <a:solidFill>
-              <a:srgbClr val="7C3AED"/>
+              <a:srgbClr val="0D9488"/>
             </a:solidFill>
             <a:prstDash val="solid"/>
           </a:ln>
@@ -33123,13 +33720,13 @@
             <a:r>
               <a:rPr lang="en-US" sz="1300" b="1" dirty="0">
                 <a:solidFill>
-                  <a:srgbClr val="4C1D95"/>
+                  <a:srgbClr val="0F766E"/>
                 </a:solidFill>
                 <a:latin typeface="Trebuchet MS" pitchFamily="34" charset="0"/>
                 <a:ea typeface="Trebuchet MS" pitchFamily="34" charset="-122"/>
                 <a:cs typeface="Trebuchet MS" pitchFamily="34" charset="-120"/>
               </a:rPr>
-              <a:t>un</a:t>
+              <a:t>observe</a:t>
             </a:r>
             <a:endParaRPr lang="en-US" sz="1300" dirty="0"/>
           </a:p>
@@ -33168,7 +33765,7 @@
                 <a:ea typeface="Calibri" pitchFamily="34" charset="-122"/>
                 <a:cs typeface="Calibri" pitchFamily="34" charset="-120"/>
               </a:rPr>
-              <a:t>not</a:t>
+              <a:t>to watch carefully</a:t>
             </a:r>
             <a:endParaRPr lang="en-US" sz="850" dirty="0"/>
           </a:p>
@@ -33191,11 +33788,11 @@
             </a:avLst>
           </a:prstGeom>
           <a:solidFill>
-            <a:srgbClr val="CCFBF1"/>
+            <a:srgbClr val="FCE7F3"/>
           </a:solidFill>
           <a:ln w="19050">
             <a:solidFill>
-              <a:srgbClr val="0D9488"/>
+              <a:srgbClr val="DB2777"/>
             </a:solidFill>
             <a:prstDash val="solid"/>
           </a:ln>
@@ -33235,13 +33832,13 @@
             <a:r>
               <a:rPr lang="en-US" sz="1300" b="1" dirty="0">
                 <a:solidFill>
-                  <a:srgbClr val="0F766E"/>
+                  <a:srgbClr val="9D174D"/>
                 </a:solidFill>
                 <a:latin typeface="Trebuchet MS" pitchFamily="34" charset="0"/>
                 <a:ea typeface="Trebuchet MS" pitchFamily="34" charset="-122"/>
                 <a:cs typeface="Trebuchet MS" pitchFamily="34" charset="-120"/>
               </a:rPr>
-              <a:t>observe</a:t>
+              <a:t>ation</a:t>
             </a:r>
             <a:endParaRPr lang="en-US" sz="1300" dirty="0"/>
           </a:p>
@@ -33280,7 +33877,7 @@
                 <a:ea typeface="Calibri" pitchFamily="34" charset="-122"/>
                 <a:cs typeface="Calibri" pitchFamily="34" charset="-120"/>
               </a:rPr>
-              <a:t>to watch carefully</a:t>
+              <a:t>the act or result of</a:t>
             </a:r>
             <a:endParaRPr lang="en-US" sz="850" dirty="0"/>
           </a:p>
@@ -33392,7 +33989,7 @@
                 <a:ea typeface="Trebuchet MS" pitchFamily="34" charset="-122"/>
                 <a:cs typeface="Trebuchet MS" pitchFamily="34" charset="-120"/>
               </a:rPr>
-              <a:t>ed</a:t>
+              <a:t>al</a:t>
             </a:r>
             <a:endParaRPr lang="en-US" sz="1300" dirty="0"/>
           </a:p>
@@ -33431,7 +34028,7 @@
                 <a:ea typeface="Calibri" pitchFamily="34" charset="-122"/>
                 <a:cs typeface="Calibri" pitchFamily="34" charset="-120"/>
               </a:rPr>
-              <a:t>in the past; done to something</a:t>
+              <a:t>relating to; of the kind of</a:t>
             </a:r>
             <a:endParaRPr lang="en-US" sz="850" dirty="0"/>
           </a:p>
@@ -33538,8 +34135,8 @@
         </p:nvSpPr>
         <p:spPr>
           <a:xfrm>
-            <a:off x="2313432" y="3364992"/>
-            <a:ext cx="1645920" cy="475488"/>
+            <a:off x="1978152" y="3364992"/>
+            <a:ext cx="1225296" cy="475488"/>
           </a:xfrm>
           <a:prstGeom prst="rect">
             <a:avLst>
@@ -33565,8 +34162,8 @@
         </p:nvSpPr>
         <p:spPr>
           <a:xfrm>
-            <a:off x="2313432" y="3364992"/>
-            <a:ext cx="1645920" cy="475488"/>
+            <a:off x="1978152" y="3364992"/>
+            <a:ext cx="1225296" cy="475488"/>
           </a:xfrm>
           <a:prstGeom prst="rect">
             <a:avLst/>
@@ -33590,7 +34187,7 @@
                 <a:ea typeface="Trebuchet MS" pitchFamily="34" charset="-122"/>
                 <a:cs typeface="Trebuchet MS" pitchFamily="34" charset="-120"/>
               </a:rPr>
-              <a:t>un</a:t>
+              <a:t>ob</a:t>
             </a:r>
             <a:endParaRPr lang="en-US" sz="1400" dirty="0"/>
           </a:p>
@@ -33604,8 +34201,8 @@
         </p:nvSpPr>
         <p:spPr>
           <a:xfrm>
-            <a:off x="3959352" y="3364992"/>
-            <a:ext cx="411480" cy="475488"/>
+            <a:off x="3203448" y="3364992"/>
+            <a:ext cx="76200" cy="475488"/>
           </a:xfrm>
           <a:prstGeom prst="rect">
             <a:avLst/>
@@ -33643,8 +34240,8 @@
         </p:nvSpPr>
         <p:spPr>
           <a:xfrm>
-            <a:off x="4370832" y="3364992"/>
-            <a:ext cx="1645920" cy="475488"/>
+            <a:off x="3279648" y="3364992"/>
+            <a:ext cx="1225296" cy="475488"/>
           </a:xfrm>
           <a:prstGeom prst="rect">
             <a:avLst>
@@ -33670,8 +34267,8 @@
         </p:nvSpPr>
         <p:spPr>
           <a:xfrm>
-            <a:off x="4370832" y="3364992"/>
-            <a:ext cx="1645920" cy="475488"/>
+            <a:off x="3279648" y="3364992"/>
+            <a:ext cx="1225296" cy="475488"/>
           </a:xfrm>
           <a:prstGeom prst="rect">
             <a:avLst/>
@@ -33695,7 +34292,7 @@
                 <a:ea typeface="Trebuchet MS" pitchFamily="34" charset="-122"/>
                 <a:cs typeface="Trebuchet MS" pitchFamily="34" charset="-120"/>
               </a:rPr>
-              <a:t>ob</a:t>
+              <a:t>ser</a:t>
             </a:r>
             <a:endParaRPr lang="en-US" sz="1400" dirty="0"/>
           </a:p>
@@ -33709,8 +34306,8 @@
         </p:nvSpPr>
         <p:spPr>
           <a:xfrm>
-            <a:off x="6016752" y="3364992"/>
-            <a:ext cx="411480" cy="475488"/>
+            <a:off x="4504944" y="3364992"/>
+            <a:ext cx="76200" cy="475488"/>
           </a:xfrm>
           <a:prstGeom prst="rect">
             <a:avLst/>
@@ -33748,8 +34345,8 @@
         </p:nvSpPr>
         <p:spPr>
           <a:xfrm>
-            <a:off x="6428232" y="3364992"/>
-            <a:ext cx="1645920" cy="475488"/>
+            <a:off x="4581144" y="3364992"/>
+            <a:ext cx="1225296" cy="475488"/>
           </a:xfrm>
           <a:prstGeom prst="rect">
             <a:avLst>
@@ -33775,8 +34372,8 @@
         </p:nvSpPr>
         <p:spPr>
           <a:xfrm>
-            <a:off x="6428232" y="3364992"/>
-            <a:ext cx="1645920" cy="475488"/>
+            <a:off x="4581144" y="3364992"/>
+            <a:ext cx="1225296" cy="475488"/>
           </a:xfrm>
           <a:prstGeom prst="rect">
             <a:avLst/>
@@ -33800,7 +34397,7 @@
                 <a:ea typeface="Trebuchet MS" pitchFamily="34" charset="-122"/>
                 <a:cs typeface="Trebuchet MS" pitchFamily="34" charset="-120"/>
               </a:rPr>
-              <a:t>served</a:t>
+              <a:t>va</a:t>
             </a:r>
             <a:endParaRPr lang="en-US" sz="1400" dirty="0"/>
           </a:p>
@@ -33808,7 +34405,217 @@
       </p:sp>
       <p:sp>
         <p:nvSpPr>
-          <p:cNvPr id="37" name="Shape 35"/>
+          <p:cNvPr id="37" name="Text 35"/>
+          <p:cNvSpPr/>
+          <p:nvPr/>
+        </p:nvSpPr>
+        <p:spPr>
+          <a:xfrm>
+            <a:off x="5806440" y="3364992"/>
+            <a:ext cx="76200" cy="475488"/>
+          </a:xfrm>
+          <a:prstGeom prst="rect">
+            <a:avLst/>
+          </a:prstGeom>
+          <a:noFill/>
+          <a:ln/>
+        </p:spPr>
+        <p:txBody>
+          <a:bodyPr wrap="square" lIns="0" tIns="0" rIns="0" bIns="0" rtlCol="0" anchor="ctr"/>
+          <a:lstStyle/>
+          <a:p>
+            <a:pPr algn="ctr" indent="0" marL="0">
+              <a:buNone/>
+            </a:pPr>
+            <a:r>
+              <a:rPr lang="en-US" sz="1600" b="1" dirty="0">
+                <a:solidFill>
+                  <a:srgbClr val="0D9488"/>
+                </a:solidFill>
+                <a:latin typeface="Trebuchet MS" pitchFamily="34" charset="0"/>
+                <a:ea typeface="Trebuchet MS" pitchFamily="34" charset="-122"/>
+                <a:cs typeface="Trebuchet MS" pitchFamily="34" charset="-120"/>
+              </a:rPr>
+              <a:t>·</a:t>
+            </a:r>
+            <a:endParaRPr lang="en-US" sz="1600" dirty="0"/>
+          </a:p>
+        </p:txBody>
+      </p:sp>
+      <p:sp>
+        <p:nvSpPr>
+          <p:cNvPr id="38" name="Shape 36"/>
+          <p:cNvSpPr/>
+          <p:nvPr/>
+        </p:nvSpPr>
+        <p:spPr>
+          <a:xfrm>
+            <a:off x="5882640" y="3364992"/>
+            <a:ext cx="1225296" cy="475488"/>
+          </a:xfrm>
+          <a:prstGeom prst="rect">
+            <a:avLst>
+              <a:gd name="adj" fmla="val 9615"/>
+            </a:avLst>
+          </a:prstGeom>
+          <a:solidFill>
+            <a:srgbClr val="FFFFFF"/>
+          </a:solidFill>
+          <a:ln w="12700">
+            <a:solidFill>
+              <a:srgbClr val="0D9488"/>
+            </a:solidFill>
+            <a:prstDash val="solid"/>
+          </a:ln>
+        </p:spPr>
+      </p:sp>
+      <p:sp>
+        <p:nvSpPr>
+          <p:cNvPr id="39" name="Text 37"/>
+          <p:cNvSpPr/>
+          <p:nvPr/>
+        </p:nvSpPr>
+        <p:spPr>
+          <a:xfrm>
+            <a:off x="5882640" y="3364992"/>
+            <a:ext cx="1225296" cy="475488"/>
+          </a:xfrm>
+          <a:prstGeom prst="rect">
+            <a:avLst/>
+          </a:prstGeom>
+          <a:noFill/>
+          <a:ln/>
+        </p:spPr>
+        <p:txBody>
+          <a:bodyPr wrap="square" lIns="0" tIns="0" rIns="0" bIns="0" rtlCol="0" anchor="ctr"/>
+          <a:lstStyle/>
+          <a:p>
+            <a:pPr algn="ctr" indent="0" marL="0">
+              <a:buNone/>
+            </a:pPr>
+            <a:r>
+              <a:rPr lang="en-US" sz="1400" b="1" dirty="0">
+                <a:solidFill>
+                  <a:srgbClr val="0D9488"/>
+                </a:solidFill>
+                <a:latin typeface="Trebuchet MS" pitchFamily="34" charset="0"/>
+                <a:ea typeface="Trebuchet MS" pitchFamily="34" charset="-122"/>
+                <a:cs typeface="Trebuchet MS" pitchFamily="34" charset="-120"/>
+              </a:rPr>
+              <a:t>tion</a:t>
+            </a:r>
+            <a:endParaRPr lang="en-US" sz="1400" dirty="0"/>
+          </a:p>
+        </p:txBody>
+      </p:sp>
+      <p:sp>
+        <p:nvSpPr>
+          <p:cNvPr id="40" name="Text 38"/>
+          <p:cNvSpPr/>
+          <p:nvPr/>
+        </p:nvSpPr>
+        <p:spPr>
+          <a:xfrm>
+            <a:off x="7107936" y="3364992"/>
+            <a:ext cx="76200" cy="475488"/>
+          </a:xfrm>
+          <a:prstGeom prst="rect">
+            <a:avLst/>
+          </a:prstGeom>
+          <a:noFill/>
+          <a:ln/>
+        </p:spPr>
+        <p:txBody>
+          <a:bodyPr wrap="square" lIns="0" tIns="0" rIns="0" bIns="0" rtlCol="0" anchor="ctr"/>
+          <a:lstStyle/>
+          <a:p>
+            <a:pPr algn="ctr" indent="0" marL="0">
+              <a:buNone/>
+            </a:pPr>
+            <a:r>
+              <a:rPr lang="en-US" sz="1600" b="1" dirty="0">
+                <a:solidFill>
+                  <a:srgbClr val="0D9488"/>
+                </a:solidFill>
+                <a:latin typeface="Trebuchet MS" pitchFamily="34" charset="0"/>
+                <a:ea typeface="Trebuchet MS" pitchFamily="34" charset="-122"/>
+                <a:cs typeface="Trebuchet MS" pitchFamily="34" charset="-120"/>
+              </a:rPr>
+              <a:t>·</a:t>
+            </a:r>
+            <a:endParaRPr lang="en-US" sz="1600" dirty="0"/>
+          </a:p>
+        </p:txBody>
+      </p:sp>
+      <p:sp>
+        <p:nvSpPr>
+          <p:cNvPr id="41" name="Shape 39"/>
+          <p:cNvSpPr/>
+          <p:nvPr/>
+        </p:nvSpPr>
+        <p:spPr>
+          <a:xfrm>
+            <a:off x="7184136" y="3364992"/>
+            <a:ext cx="1225296" cy="475488"/>
+          </a:xfrm>
+          <a:prstGeom prst="rect">
+            <a:avLst>
+              <a:gd name="adj" fmla="val 9615"/>
+            </a:avLst>
+          </a:prstGeom>
+          <a:solidFill>
+            <a:srgbClr val="FFFFFF"/>
+          </a:solidFill>
+          <a:ln w="12700">
+            <a:solidFill>
+              <a:srgbClr val="0D9488"/>
+            </a:solidFill>
+            <a:prstDash val="solid"/>
+          </a:ln>
+        </p:spPr>
+      </p:sp>
+      <p:sp>
+        <p:nvSpPr>
+          <p:cNvPr id="42" name="Text 40"/>
+          <p:cNvSpPr/>
+          <p:nvPr/>
+        </p:nvSpPr>
+        <p:spPr>
+          <a:xfrm>
+            <a:off x="7184136" y="3364992"/>
+            <a:ext cx="1225296" cy="475488"/>
+          </a:xfrm>
+          <a:prstGeom prst="rect">
+            <a:avLst/>
+          </a:prstGeom>
+          <a:noFill/>
+          <a:ln/>
+        </p:spPr>
+        <p:txBody>
+          <a:bodyPr wrap="square" lIns="0" tIns="0" rIns="0" bIns="0" rtlCol="0" anchor="ctr"/>
+          <a:lstStyle/>
+          <a:p>
+            <a:pPr algn="ctr" indent="0" marL="0">
+              <a:buNone/>
+            </a:pPr>
+            <a:r>
+              <a:rPr lang="en-US" sz="1400" b="1" dirty="0">
+                <a:solidFill>
+                  <a:srgbClr val="0D9488"/>
+                </a:solidFill>
+                <a:latin typeface="Trebuchet MS" pitchFamily="34" charset="0"/>
+                <a:ea typeface="Trebuchet MS" pitchFamily="34" charset="-122"/>
+                <a:cs typeface="Trebuchet MS" pitchFamily="34" charset="-120"/>
+              </a:rPr>
+              <a:t>al</a:t>
+            </a:r>
+            <a:endParaRPr lang="en-US" sz="1400" dirty="0"/>
+          </a:p>
+        </p:txBody>
+      </p:sp>
+      <p:sp>
+        <p:nvSpPr>
+          <p:cNvPr id="43" name="Shape 41"/>
           <p:cNvSpPr/>
           <p:nvPr/>
         </p:nvSpPr>
@@ -33835,7 +34642,7 @@
       </p:sp>
       <p:sp>
         <p:nvSpPr>
-          <p:cNvPr id="38" name="Text 36"/>
+          <p:cNvPr id="44" name="Text 42"/>
           <p:cNvSpPr/>
           <p:nvPr/>
         </p:nvSpPr>
@@ -33874,18 +34681,18 @@
       </p:sp>
       <p:sp>
         <p:nvSpPr>
-          <p:cNvPr id="39" name="Shape 37"/>
+          <p:cNvPr id="45" name="Shape 43"/>
           <p:cNvSpPr/>
           <p:nvPr/>
         </p:nvSpPr>
         <p:spPr>
           <a:xfrm>
             <a:off x="1874520" y="4096512"/>
-            <a:ext cx="6903720" cy="658368"/>
+            <a:ext cx="6903720" cy="804672"/>
           </a:xfrm>
           <a:prstGeom prst="rect">
             <a:avLst>
-              <a:gd name="adj" fmla="val 8333"/>
+              <a:gd name="adj" fmla="val 6818"/>
             </a:avLst>
           </a:prstGeom>
           <a:solidFill>
@@ -33901,18 +34708,18 @@
       </p:sp>
       <p:sp>
         <p:nvSpPr>
-          <p:cNvPr id="40" name="Shape 38"/>
-          <p:cNvSpPr/>
-          <p:nvPr/>
-        </p:nvSpPr>
-        <p:spPr>
-          <a:xfrm>
-            <a:off x="2023872" y="4169664"/>
-            <a:ext cx="685800" cy="475488"/>
+          <p:cNvPr id="46" name="Shape 44"/>
+          <p:cNvSpPr/>
+          <p:nvPr/>
+        </p:nvSpPr>
+        <p:spPr>
+          <a:xfrm>
+            <a:off x="1952244" y="4169664"/>
+            <a:ext cx="543652" cy="384048"/>
           </a:xfrm>
           <a:prstGeom prst="rect">
             <a:avLst>
-              <a:gd name="adj" fmla="val 7692"/>
+              <a:gd name="adj" fmla="val 9524"/>
             </a:avLst>
           </a:prstGeom>
           <a:solidFill>
@@ -33928,14 +34735,14 @@
       </p:sp>
       <p:sp>
         <p:nvSpPr>
-          <p:cNvPr id="41" name="Text 39"/>
-          <p:cNvSpPr/>
-          <p:nvPr/>
-        </p:nvSpPr>
-        <p:spPr>
-          <a:xfrm>
-            <a:off x="2023872" y="4169664"/>
-            <a:ext cx="685800" cy="475488"/>
+          <p:cNvPr id="47" name="Text 45"/>
+          <p:cNvSpPr/>
+          <p:nvPr/>
+        </p:nvSpPr>
+        <p:spPr>
+          <a:xfrm>
+            <a:off x="1952244" y="4169664"/>
+            <a:ext cx="543652" cy="384048"/>
           </a:xfrm>
           <a:prstGeom prst="rect">
             <a:avLst/>
@@ -33959,7 +34766,7 @@
                 <a:ea typeface="Trebuchet MS" pitchFamily="34" charset="-122"/>
                 <a:cs typeface="Trebuchet MS" pitchFamily="34" charset="-120"/>
               </a:rPr>
-              <a:t>u</a:t>
+              <a:t>o</a:t>
             </a:r>
             <a:endParaRPr lang="en-US" sz="900" dirty="0"/>
           </a:p>
@@ -33967,18 +34774,18 @@
       </p:sp>
       <p:sp>
         <p:nvSpPr>
-          <p:cNvPr id="42" name="Shape 40"/>
-          <p:cNvSpPr/>
-          <p:nvPr/>
-        </p:nvSpPr>
-        <p:spPr>
-          <a:xfrm>
-            <a:off x="2831592" y="4169664"/>
-            <a:ext cx="685800" cy="475488"/>
+          <p:cNvPr id="48" name="Shape 46"/>
+          <p:cNvSpPr/>
+          <p:nvPr/>
+        </p:nvSpPr>
+        <p:spPr>
+          <a:xfrm>
+            <a:off x="2546188" y="4169664"/>
+            <a:ext cx="543652" cy="384048"/>
           </a:xfrm>
           <a:prstGeom prst="rect">
             <a:avLst>
-              <a:gd name="adj" fmla="val 7692"/>
+              <a:gd name="adj" fmla="val 9524"/>
             </a:avLst>
           </a:prstGeom>
           <a:solidFill>
@@ -33994,14 +34801,14 @@
       </p:sp>
       <p:sp>
         <p:nvSpPr>
-          <p:cNvPr id="43" name="Text 41"/>
-          <p:cNvSpPr/>
-          <p:nvPr/>
-        </p:nvSpPr>
-        <p:spPr>
-          <a:xfrm>
-            <a:off x="2831592" y="4169664"/>
-            <a:ext cx="685800" cy="475488"/>
+          <p:cNvPr id="49" name="Text 47"/>
+          <p:cNvSpPr/>
+          <p:nvPr/>
+        </p:nvSpPr>
+        <p:spPr>
+          <a:xfrm>
+            <a:off x="2546188" y="4169664"/>
+            <a:ext cx="543652" cy="384048"/>
           </a:xfrm>
           <a:prstGeom prst="rect">
             <a:avLst/>
@@ -34025,7 +34832,7 @@
                 <a:ea typeface="Trebuchet MS" pitchFamily="34" charset="-122"/>
                 <a:cs typeface="Trebuchet MS" pitchFamily="34" charset="-120"/>
               </a:rPr>
-              <a:t>n</a:t>
+              <a:t>b</a:t>
             </a:r>
             <a:endParaRPr lang="en-US" sz="900" dirty="0"/>
           </a:p>
@@ -34033,18 +34840,18 @@
       </p:sp>
       <p:sp>
         <p:nvSpPr>
-          <p:cNvPr id="44" name="Shape 42"/>
-          <p:cNvSpPr/>
-          <p:nvPr/>
-        </p:nvSpPr>
-        <p:spPr>
-          <a:xfrm>
-            <a:off x="3639312" y="4169664"/>
-            <a:ext cx="685800" cy="475488"/>
+          <p:cNvPr id="50" name="Shape 48"/>
+          <p:cNvSpPr/>
+          <p:nvPr/>
+        </p:nvSpPr>
+        <p:spPr>
+          <a:xfrm>
+            <a:off x="3140133" y="4169664"/>
+            <a:ext cx="543652" cy="384048"/>
           </a:xfrm>
           <a:prstGeom prst="rect">
             <a:avLst>
-              <a:gd name="adj" fmla="val 7692"/>
+              <a:gd name="adj" fmla="val 9524"/>
             </a:avLst>
           </a:prstGeom>
           <a:solidFill>
@@ -34060,14 +34867,14 @@
       </p:sp>
       <p:sp>
         <p:nvSpPr>
-          <p:cNvPr id="45" name="Text 43"/>
-          <p:cNvSpPr/>
-          <p:nvPr/>
-        </p:nvSpPr>
-        <p:spPr>
-          <a:xfrm>
-            <a:off x="3639312" y="4169664"/>
-            <a:ext cx="685800" cy="475488"/>
+          <p:cNvPr id="51" name="Text 49"/>
+          <p:cNvSpPr/>
+          <p:nvPr/>
+        </p:nvSpPr>
+        <p:spPr>
+          <a:xfrm>
+            <a:off x="3140133" y="4169664"/>
+            <a:ext cx="543652" cy="384048"/>
           </a:xfrm>
           <a:prstGeom prst="rect">
             <a:avLst/>
@@ -34091,7 +34898,7 @@
                 <a:ea typeface="Trebuchet MS" pitchFamily="34" charset="-122"/>
                 <a:cs typeface="Trebuchet MS" pitchFamily="34" charset="-120"/>
               </a:rPr>
-              <a:t>o</a:t>
+              <a:t>s</a:t>
             </a:r>
             <a:endParaRPr lang="en-US" sz="900" dirty="0"/>
           </a:p>
@@ -34099,18 +34906,57 @@
       </p:sp>
       <p:sp>
         <p:nvSpPr>
-          <p:cNvPr id="46" name="Shape 44"/>
-          <p:cNvSpPr/>
-          <p:nvPr/>
-        </p:nvSpPr>
-        <p:spPr>
-          <a:xfrm>
-            <a:off x="4447032" y="4169664"/>
-            <a:ext cx="685800" cy="475488"/>
+          <p:cNvPr id="52" name="Text 50"/>
+          <p:cNvSpPr/>
+          <p:nvPr/>
+        </p:nvSpPr>
+        <p:spPr>
+          <a:xfrm>
+            <a:off x="3140133" y="4572000"/>
+            <a:ext cx="543652" cy="219456"/>
+          </a:xfrm>
+          <a:prstGeom prst="rect">
+            <a:avLst/>
+          </a:prstGeom>
+          <a:noFill/>
+          <a:ln/>
+        </p:spPr>
+        <p:txBody>
+          <a:bodyPr wrap="square" lIns="0" tIns="0" rIns="0" bIns="0" rtlCol="0" anchor="t"/>
+          <a:lstStyle/>
+          <a:p>
+            <a:pPr algn="ctr" indent="0" marL="0">
+              <a:buNone/>
+            </a:pPr>
+            <a:r>
+              <a:rPr lang="en-US" sz="750" i="1" dirty="0">
+                <a:solidFill>
+                  <a:srgbClr val="94A3B8"/>
+                </a:solidFill>
+                <a:latin typeface="Calibri" pitchFamily="34" charset="0"/>
+                <a:ea typeface="Calibri" pitchFamily="34" charset="-122"/>
+                <a:cs typeface="Calibri" pitchFamily="34" charset="-120"/>
+              </a:rPr>
+              <a:t>/z/</a:t>
+            </a:r>
+            <a:endParaRPr lang="en-US" sz="750" dirty="0"/>
+          </a:p>
+        </p:txBody>
+      </p:sp>
+      <p:sp>
+        <p:nvSpPr>
+          <p:cNvPr id="53" name="Shape 51"/>
+          <p:cNvSpPr/>
+          <p:nvPr/>
+        </p:nvSpPr>
+        <p:spPr>
+          <a:xfrm>
+            <a:off x="3734077" y="4169664"/>
+            <a:ext cx="543652" cy="384048"/>
           </a:xfrm>
           <a:prstGeom prst="rect">
             <a:avLst>
-              <a:gd name="adj" fmla="val 7692"/>
+              <a:gd name="adj" fmla="val 9524"/>
             </a:avLst>
           </a:prstGeom>
           <a:solidFill>
@@ -34126,14 +34972,14 @@
       </p:sp>
       <p:sp>
         <p:nvSpPr>
-          <p:cNvPr id="47" name="Text 45"/>
-          <p:cNvSpPr/>
-          <p:nvPr/>
-        </p:nvSpPr>
-        <p:spPr>
-          <a:xfrm>
-            <a:off x="4447032" y="4169664"/>
-            <a:ext cx="685800" cy="475488"/>
+          <p:cNvPr id="54" name="Text 52"/>
+          <p:cNvSpPr/>
+          <p:nvPr/>
+        </p:nvSpPr>
+        <p:spPr>
+          <a:xfrm>
+            <a:off x="3734077" y="4169664"/>
+            <a:ext cx="543652" cy="384048"/>
           </a:xfrm>
           <a:prstGeom prst="rect">
             <a:avLst/>
@@ -34157,7 +35003,7 @@
                 <a:ea typeface="Trebuchet MS" pitchFamily="34" charset="-122"/>
                 <a:cs typeface="Trebuchet MS" pitchFamily="34" charset="-120"/>
               </a:rPr>
-              <a:t>b</a:t>
+              <a:t>er</a:t>
             </a:r>
             <a:endParaRPr lang="en-US" sz="900" dirty="0"/>
           </a:p>
@@ -34165,18 +35011,18 @@
       </p:sp>
       <p:sp>
         <p:nvSpPr>
-          <p:cNvPr id="48" name="Shape 46"/>
-          <p:cNvSpPr/>
-          <p:nvPr/>
-        </p:nvSpPr>
-        <p:spPr>
-          <a:xfrm>
-            <a:off x="5254752" y="4169664"/>
-            <a:ext cx="685800" cy="475488"/>
+          <p:cNvPr id="55" name="Shape 53"/>
+          <p:cNvSpPr/>
+          <p:nvPr/>
+        </p:nvSpPr>
+        <p:spPr>
+          <a:xfrm>
+            <a:off x="4328021" y="4169664"/>
+            <a:ext cx="543652" cy="384048"/>
           </a:xfrm>
           <a:prstGeom prst="rect">
             <a:avLst>
-              <a:gd name="adj" fmla="val 7692"/>
+              <a:gd name="adj" fmla="val 9524"/>
             </a:avLst>
           </a:prstGeom>
           <a:solidFill>
@@ -34192,14 +35038,14 @@
       </p:sp>
       <p:sp>
         <p:nvSpPr>
-          <p:cNvPr id="49" name="Text 47"/>
-          <p:cNvSpPr/>
-          <p:nvPr/>
-        </p:nvSpPr>
-        <p:spPr>
-          <a:xfrm>
-            <a:off x="5254752" y="4169664"/>
-            <a:ext cx="685800" cy="475488"/>
+          <p:cNvPr id="56" name="Text 54"/>
+          <p:cNvSpPr/>
+          <p:nvPr/>
+        </p:nvSpPr>
+        <p:spPr>
+          <a:xfrm>
+            <a:off x="4328021" y="4169664"/>
+            <a:ext cx="543652" cy="384048"/>
           </a:xfrm>
           <a:prstGeom prst="rect">
             <a:avLst/>
@@ -34223,7 +35069,7 @@
                 <a:ea typeface="Trebuchet MS" pitchFamily="34" charset="-122"/>
                 <a:cs typeface="Trebuchet MS" pitchFamily="34" charset="-120"/>
               </a:rPr>
-              <a:t>s</a:t>
+              <a:t>v</a:t>
             </a:r>
             <a:endParaRPr lang="en-US" sz="900" dirty="0"/>
           </a:p>
@@ -34231,18 +35077,18 @@
       </p:sp>
       <p:sp>
         <p:nvSpPr>
-          <p:cNvPr id="50" name="Shape 48"/>
-          <p:cNvSpPr/>
-          <p:nvPr/>
-        </p:nvSpPr>
-        <p:spPr>
-          <a:xfrm>
-            <a:off x="6062472" y="4169664"/>
-            <a:ext cx="685800" cy="475488"/>
+          <p:cNvPr id="57" name="Shape 55"/>
+          <p:cNvSpPr/>
+          <p:nvPr/>
+        </p:nvSpPr>
+        <p:spPr>
+          <a:xfrm>
+            <a:off x="4921966" y="4169664"/>
+            <a:ext cx="543652" cy="384048"/>
           </a:xfrm>
           <a:prstGeom prst="rect">
             <a:avLst>
-              <a:gd name="adj" fmla="val 7692"/>
+              <a:gd name="adj" fmla="val 9524"/>
             </a:avLst>
           </a:prstGeom>
           <a:solidFill>
@@ -34258,14 +35104,14 @@
       </p:sp>
       <p:sp>
         <p:nvSpPr>
-          <p:cNvPr id="51" name="Text 49"/>
-          <p:cNvSpPr/>
-          <p:nvPr/>
-        </p:nvSpPr>
-        <p:spPr>
-          <a:xfrm>
-            <a:off x="6062472" y="4169664"/>
-            <a:ext cx="685800" cy="475488"/>
+          <p:cNvPr id="58" name="Text 56"/>
+          <p:cNvSpPr/>
+          <p:nvPr/>
+        </p:nvSpPr>
+        <p:spPr>
+          <a:xfrm>
+            <a:off x="4921966" y="4169664"/>
+            <a:ext cx="543652" cy="384048"/>
           </a:xfrm>
           <a:prstGeom prst="rect">
             <a:avLst/>
@@ -34289,7 +35135,7 @@
                 <a:ea typeface="Trebuchet MS" pitchFamily="34" charset="-122"/>
                 <a:cs typeface="Trebuchet MS" pitchFamily="34" charset="-120"/>
               </a:rPr>
-              <a:t>er</a:t>
+              <a:t>a</a:t>
             </a:r>
             <a:endParaRPr lang="en-US" sz="900" dirty="0"/>
           </a:p>
@@ -34297,18 +35143,18 @@
       </p:sp>
       <p:sp>
         <p:nvSpPr>
-          <p:cNvPr id="52" name="Shape 50"/>
-          <p:cNvSpPr/>
-          <p:nvPr/>
-        </p:nvSpPr>
-        <p:spPr>
-          <a:xfrm>
-            <a:off x="6870192" y="4169664"/>
-            <a:ext cx="685800" cy="475488"/>
+          <p:cNvPr id="59" name="Shape 57"/>
+          <p:cNvSpPr/>
+          <p:nvPr/>
+        </p:nvSpPr>
+        <p:spPr>
+          <a:xfrm>
+            <a:off x="5515910" y="4169664"/>
+            <a:ext cx="543652" cy="384048"/>
           </a:xfrm>
           <a:prstGeom prst="rect">
             <a:avLst>
-              <a:gd name="adj" fmla="val 7692"/>
+              <a:gd name="adj" fmla="val 9524"/>
             </a:avLst>
           </a:prstGeom>
           <a:solidFill>
@@ -34324,14 +35170,14 @@
       </p:sp>
       <p:sp>
         <p:nvSpPr>
-          <p:cNvPr id="53" name="Text 51"/>
-          <p:cNvSpPr/>
-          <p:nvPr/>
-        </p:nvSpPr>
-        <p:spPr>
-          <a:xfrm>
-            <a:off x="6870192" y="4169664"/>
-            <a:ext cx="685800" cy="475488"/>
+          <p:cNvPr id="60" name="Text 58"/>
+          <p:cNvSpPr/>
+          <p:nvPr/>
+        </p:nvSpPr>
+        <p:spPr>
+          <a:xfrm>
+            <a:off x="5515910" y="4169664"/>
+            <a:ext cx="543652" cy="384048"/>
           </a:xfrm>
           <a:prstGeom prst="rect">
             <a:avLst/>
@@ -34355,7 +35201,7 @@
                 <a:ea typeface="Trebuchet MS" pitchFamily="34" charset="-122"/>
                 <a:cs typeface="Trebuchet MS" pitchFamily="34" charset="-120"/>
               </a:rPr>
-              <a:t>v</a:t>
+              <a:t>t</a:t>
             </a:r>
             <a:endParaRPr lang="en-US" sz="900" dirty="0"/>
           </a:p>
@@ -34363,18 +35209,57 @@
       </p:sp>
       <p:sp>
         <p:nvSpPr>
-          <p:cNvPr id="54" name="Shape 52"/>
-          <p:cNvSpPr/>
-          <p:nvPr/>
-        </p:nvSpPr>
-        <p:spPr>
-          <a:xfrm>
-            <a:off x="7677912" y="4169664"/>
-            <a:ext cx="685800" cy="475488"/>
+          <p:cNvPr id="61" name="Text 59"/>
+          <p:cNvSpPr/>
+          <p:nvPr/>
+        </p:nvSpPr>
+        <p:spPr>
+          <a:xfrm>
+            <a:off x="5515910" y="4572000"/>
+            <a:ext cx="543652" cy="219456"/>
+          </a:xfrm>
+          <a:prstGeom prst="rect">
+            <a:avLst/>
+          </a:prstGeom>
+          <a:noFill/>
+          <a:ln/>
+        </p:spPr>
+        <p:txBody>
+          <a:bodyPr wrap="square" lIns="0" tIns="0" rIns="0" bIns="0" rtlCol="0" anchor="t"/>
+          <a:lstStyle/>
+          <a:p>
+            <a:pPr algn="ctr" indent="0" marL="0">
+              <a:buNone/>
+            </a:pPr>
+            <a:r>
+              <a:rPr lang="en-US" sz="750" i="1" dirty="0">
+                <a:solidFill>
+                  <a:srgbClr val="94A3B8"/>
+                </a:solidFill>
+                <a:latin typeface="Calibri" pitchFamily="34" charset="0"/>
+                <a:ea typeface="Calibri" pitchFamily="34" charset="-122"/>
+                <a:cs typeface="Calibri" pitchFamily="34" charset="-120"/>
+              </a:rPr>
+              <a:t>/sh/</a:t>
+            </a:r>
+            <a:endParaRPr lang="en-US" sz="750" dirty="0"/>
+          </a:p>
+        </p:txBody>
+      </p:sp>
+      <p:sp>
+        <p:nvSpPr>
+          <p:cNvPr id="62" name="Shape 60"/>
+          <p:cNvSpPr/>
+          <p:nvPr/>
+        </p:nvSpPr>
+        <p:spPr>
+          <a:xfrm>
+            <a:off x="6109855" y="4169664"/>
+            <a:ext cx="543652" cy="384048"/>
           </a:xfrm>
           <a:prstGeom prst="rect">
             <a:avLst>
-              <a:gd name="adj" fmla="val 7692"/>
+              <a:gd name="adj" fmla="val 9524"/>
             </a:avLst>
           </a:prstGeom>
           <a:solidFill>
@@ -34390,14 +35275,14 @@
       </p:sp>
       <p:sp>
         <p:nvSpPr>
-          <p:cNvPr id="55" name="Text 53"/>
-          <p:cNvSpPr/>
-          <p:nvPr/>
-        </p:nvSpPr>
-        <p:spPr>
-          <a:xfrm>
-            <a:off x="7677912" y="4169664"/>
-            <a:ext cx="685800" cy="475488"/>
+          <p:cNvPr id="63" name="Text 61"/>
+          <p:cNvSpPr/>
+          <p:nvPr/>
+        </p:nvSpPr>
+        <p:spPr>
+          <a:xfrm>
+            <a:off x="6109855" y="4169664"/>
+            <a:ext cx="543652" cy="384048"/>
           </a:xfrm>
           <a:prstGeom prst="rect">
             <a:avLst/>
@@ -34421,7 +35306,205 @@
                 <a:ea typeface="Trebuchet MS" pitchFamily="34" charset="-122"/>
                 <a:cs typeface="Trebuchet MS" pitchFamily="34" charset="-120"/>
               </a:rPr>
-              <a:t>ed</a:t>
+              <a:t>io</a:t>
+            </a:r>
+            <a:endParaRPr lang="en-US" sz="900" dirty="0"/>
+          </a:p>
+        </p:txBody>
+      </p:sp>
+      <p:sp>
+        <p:nvSpPr>
+          <p:cNvPr id="64" name="Shape 62"/>
+          <p:cNvSpPr/>
+          <p:nvPr/>
+        </p:nvSpPr>
+        <p:spPr>
+          <a:xfrm>
+            <a:off x="6703799" y="4169664"/>
+            <a:ext cx="543652" cy="384048"/>
+          </a:xfrm>
+          <a:prstGeom prst="rect">
+            <a:avLst>
+              <a:gd name="adj" fmla="val 9524"/>
+            </a:avLst>
+          </a:prstGeom>
+          <a:solidFill>
+            <a:srgbClr val="FFFFFF"/>
+          </a:solidFill>
+          <a:ln w="12700">
+            <a:solidFill>
+              <a:srgbClr val="DB2777"/>
+            </a:solidFill>
+            <a:prstDash val="solid"/>
+          </a:ln>
+        </p:spPr>
+      </p:sp>
+      <p:sp>
+        <p:nvSpPr>
+          <p:cNvPr id="65" name="Text 63"/>
+          <p:cNvSpPr/>
+          <p:nvPr/>
+        </p:nvSpPr>
+        <p:spPr>
+          <a:xfrm>
+            <a:off x="6703799" y="4169664"/>
+            <a:ext cx="543652" cy="384048"/>
+          </a:xfrm>
+          <a:prstGeom prst="rect">
+            <a:avLst/>
+          </a:prstGeom>
+          <a:noFill/>
+          <a:ln/>
+        </p:spPr>
+        <p:txBody>
+          <a:bodyPr wrap="square" lIns="0" tIns="0" rIns="0" bIns="0" rtlCol="0" anchor="ctr"/>
+          <a:lstStyle/>
+          <a:p>
+            <a:pPr algn="ctr" indent="0" marL="0">
+              <a:buNone/>
+            </a:pPr>
+            <a:r>
+              <a:rPr lang="en-US" sz="900" b="1" dirty="0">
+                <a:solidFill>
+                  <a:srgbClr val="9D174D"/>
+                </a:solidFill>
+                <a:latin typeface="Trebuchet MS" pitchFamily="34" charset="0"/>
+                <a:ea typeface="Trebuchet MS" pitchFamily="34" charset="-122"/>
+                <a:cs typeface="Trebuchet MS" pitchFamily="34" charset="-120"/>
+              </a:rPr>
+              <a:t>n</a:t>
+            </a:r>
+            <a:endParaRPr lang="en-US" sz="900" dirty="0"/>
+          </a:p>
+        </p:txBody>
+      </p:sp>
+      <p:sp>
+        <p:nvSpPr>
+          <p:cNvPr id="66" name="Shape 64"/>
+          <p:cNvSpPr/>
+          <p:nvPr/>
+        </p:nvSpPr>
+        <p:spPr>
+          <a:xfrm>
+            <a:off x="7297743" y="4169664"/>
+            <a:ext cx="543652" cy="384048"/>
+          </a:xfrm>
+          <a:prstGeom prst="rect">
+            <a:avLst>
+              <a:gd name="adj" fmla="val 9524"/>
+            </a:avLst>
+          </a:prstGeom>
+          <a:solidFill>
+            <a:srgbClr val="FFFFFF"/>
+          </a:solidFill>
+          <a:ln w="12700">
+            <a:solidFill>
+              <a:srgbClr val="DB2777"/>
+            </a:solidFill>
+            <a:prstDash val="solid"/>
+          </a:ln>
+        </p:spPr>
+      </p:sp>
+      <p:sp>
+        <p:nvSpPr>
+          <p:cNvPr id="67" name="Text 65"/>
+          <p:cNvSpPr/>
+          <p:nvPr/>
+        </p:nvSpPr>
+        <p:spPr>
+          <a:xfrm>
+            <a:off x="7297743" y="4169664"/>
+            <a:ext cx="543652" cy="384048"/>
+          </a:xfrm>
+          <a:prstGeom prst="rect">
+            <a:avLst/>
+          </a:prstGeom>
+          <a:noFill/>
+          <a:ln/>
+        </p:spPr>
+        <p:txBody>
+          <a:bodyPr wrap="square" lIns="0" tIns="0" rIns="0" bIns="0" rtlCol="0" anchor="ctr"/>
+          <a:lstStyle/>
+          <a:p>
+            <a:pPr algn="ctr" indent="0" marL="0">
+              <a:buNone/>
+            </a:pPr>
+            <a:r>
+              <a:rPr lang="en-US" sz="900" b="1" dirty="0">
+                <a:solidFill>
+                  <a:srgbClr val="9D174D"/>
+                </a:solidFill>
+                <a:latin typeface="Trebuchet MS" pitchFamily="34" charset="0"/>
+                <a:ea typeface="Trebuchet MS" pitchFamily="34" charset="-122"/>
+                <a:cs typeface="Trebuchet MS" pitchFamily="34" charset="-120"/>
+              </a:rPr>
+              <a:t>a</a:t>
+            </a:r>
+            <a:endParaRPr lang="en-US" sz="900" dirty="0"/>
+          </a:p>
+        </p:txBody>
+      </p:sp>
+      <p:sp>
+        <p:nvSpPr>
+          <p:cNvPr id="68" name="Shape 66"/>
+          <p:cNvSpPr/>
+          <p:nvPr/>
+        </p:nvSpPr>
+        <p:spPr>
+          <a:xfrm>
+            <a:off x="7891688" y="4169664"/>
+            <a:ext cx="543652" cy="384048"/>
+          </a:xfrm>
+          <a:prstGeom prst="rect">
+            <a:avLst>
+              <a:gd name="adj" fmla="val 9524"/>
+            </a:avLst>
+          </a:prstGeom>
+          <a:solidFill>
+            <a:srgbClr val="FFFFFF"/>
+          </a:solidFill>
+          <a:ln w="12700">
+            <a:solidFill>
+              <a:srgbClr val="DB2777"/>
+            </a:solidFill>
+            <a:prstDash val="solid"/>
+          </a:ln>
+        </p:spPr>
+      </p:sp>
+      <p:sp>
+        <p:nvSpPr>
+          <p:cNvPr id="69" name="Text 67"/>
+          <p:cNvSpPr/>
+          <p:nvPr/>
+        </p:nvSpPr>
+        <p:spPr>
+          <a:xfrm>
+            <a:off x="7891688" y="4169664"/>
+            <a:ext cx="543652" cy="384048"/>
+          </a:xfrm>
+          <a:prstGeom prst="rect">
+            <a:avLst/>
+          </a:prstGeom>
+          <a:noFill/>
+          <a:ln/>
+        </p:spPr>
+        <p:txBody>
+          <a:bodyPr wrap="square" lIns="0" tIns="0" rIns="0" bIns="0" rtlCol="0" anchor="ctr"/>
+          <a:lstStyle/>
+          <a:p>
+            <a:pPr algn="ctr" indent="0" marL="0">
+              <a:buNone/>
+            </a:pPr>
+            <a:r>
+              <a:rPr lang="en-US" sz="900" b="1" dirty="0">
+                <a:solidFill>
+                  <a:srgbClr val="9D174D"/>
+                </a:solidFill>
+                <a:latin typeface="Trebuchet MS" pitchFamily="34" charset="0"/>
+                <a:ea typeface="Trebuchet MS" pitchFamily="34" charset="-122"/>
+                <a:cs typeface="Trebuchet MS" pitchFamily="34" charset="-120"/>
+              </a:rPr>
+              <a:t>l</a:t>
             </a:r>
             <a:endParaRPr lang="en-US" sz="900" dirty="0"/>
           </a:p>
@@ -36617,7 +37700,7 @@
                 <a:ea typeface="Trebuchet MS" pitchFamily="34" charset="-122"/>
                 <a:cs typeface="Trebuchet MS" pitchFamily="34" charset="-120"/>
               </a:rPr>
-              <a:t>-ance</a:t>
+              <a:t>-ing</a:t>
             </a:r>
             <a:endParaRPr lang="en-US" sz="1300" dirty="0"/>
           </a:p>
@@ -36681,7 +37764,7 @@
                 <a:ea typeface="Trebuchet MS" pitchFamily="34" charset="-122"/>
                 <a:cs typeface="Trebuchet MS" pitchFamily="34" charset="-120"/>
               </a:rPr>
-              <a:t>over-</a:t>
+              <a:t>mis-</a:t>
             </a:r>
             <a:endParaRPr lang="en-US" sz="1300" dirty="0"/>
           </a:p>
@@ -36770,7 +37853,7 @@
                 <a:ea typeface="Trebuchet MS" pitchFamily="34" charset="-122"/>
                 <a:cs typeface="Trebuchet MS" pitchFamily="34" charset="-120"/>
               </a:rPr>
-              <a:t>-atory</a:t>
+              <a:t>-ed</a:t>
             </a:r>
             <a:endParaRPr lang="en-US" sz="1300" dirty="0"/>
           </a:p>
@@ -36834,7 +37917,7 @@
                 <a:ea typeface="Trebuchet MS" pitchFamily="34" charset="-122"/>
                 <a:cs typeface="Trebuchet MS" pitchFamily="34" charset="-120"/>
               </a:rPr>
-              <a:t>mis-</a:t>
+              <a:t>over-</a:t>
             </a:r>
             <a:endParaRPr lang="en-US" sz="1300" dirty="0"/>
           </a:p>
@@ -36923,7 +38006,7 @@
                 <a:ea typeface="Trebuchet MS" pitchFamily="34" charset="-122"/>
                 <a:cs typeface="Trebuchet MS" pitchFamily="34" charset="-120"/>
               </a:rPr>
-              <a:t>-ed</a:t>
+              <a:t>-able</a:t>
             </a:r>
             <a:endParaRPr lang="en-US" sz="1300" dirty="0"/>
           </a:p>
@@ -37226,7 +38309,7 @@
                 <a:ea typeface="Trebuchet MS" pitchFamily="34" charset="-122"/>
                 <a:cs typeface="Trebuchet MS" pitchFamily="34" charset="-120"/>
               </a:rPr>
-              <a:t>observatory</a:t>
+              <a:t>observing</a:t>
             </a:r>
             <a:endParaRPr lang="en-US" sz="1200" dirty="0"/>
           </a:p>
@@ -37292,7 +38375,7 @@
                 <a:ea typeface="Trebuchet MS" pitchFamily="34" charset="-122"/>
                 <a:cs typeface="Trebuchet MS" pitchFamily="34" charset="-120"/>
               </a:rPr>
-              <a:t>observant</a:t>
+              <a:t>observable</a:t>
             </a:r>
             <a:endParaRPr lang="en-US" sz="1200" dirty="0"/>
           </a:p>
@@ -37358,7 +38441,7 @@
                 <a:ea typeface="Trebuchet MS" pitchFamily="34" charset="-122"/>
                 <a:cs typeface="Trebuchet MS" pitchFamily="34" charset="-120"/>
               </a:rPr>
-              <a:t>observance</a:t>
+              <a:t>observant</a:t>
             </a:r>
             <a:endParaRPr lang="en-US" sz="1200" dirty="0"/>
           </a:p>
@@ -37424,7 +38507,7 @@
                 <a:ea typeface="Trebuchet MS" pitchFamily="34" charset="-122"/>
                 <a:cs typeface="Trebuchet MS" pitchFamily="34" charset="-120"/>
               </a:rPr>
-              <a:t>observed</a:t>
+              <a:t>observatory</a:t>
             </a:r>
             <a:endParaRPr lang="en-US" sz="1200" dirty="0"/>
           </a:p>
@@ -37490,7 +38573,7 @@
                 <a:ea typeface="Trebuchet MS" pitchFamily="34" charset="-122"/>
                 <a:cs typeface="Trebuchet MS" pitchFamily="34" charset="-120"/>
               </a:rPr>
-              <a:t>unobserved</a:t>
+              <a:t>unobservant</a:t>
             </a:r>
             <a:endParaRPr lang="en-US" sz="1200" dirty="0"/>
           </a:p>
@@ -38678,7 +39761,7 @@
                 <a:ea typeface="Calibri" pitchFamily="34" charset="-122"/>
                 <a:cs typeface="Calibri" pitchFamily="34" charset="-120"/>
               </a:rPr>
-              <a:t>1.  The root 'observe' comes from Latin and means to watch carefully.</a:t>
+              <a:t>1.  The root 'observe' comes from Latin and means to watch or notice carefully.</a:t>
             </a:r>
             <a:endParaRPr lang="en-US" sz="1300" dirty="0"/>
           </a:p>
@@ -38817,7 +39900,7 @@
                 <a:ea typeface="Calibri" pitchFamily="34" charset="-122"/>
                 <a:cs typeface="Calibri" pitchFamily="34" charset="-120"/>
               </a:rPr>
-              <a:t>2.  An 'observatory' is a place where you go to cook food.</a:t>
+              <a:t>2.  The word 'observer' means to completely ignore something.</a:t>
             </a:r>
             <a:endParaRPr lang="en-US" sz="1300" dirty="0"/>
           </a:p>
@@ -38956,7 +40039,7 @@
                 <a:ea typeface="Calibri" pitchFamily="34" charset="-122"/>
                 <a:cs typeface="Calibri" pitchFamily="34" charset="-120"/>
               </a:rPr>
-              <a:t>3.  Someone who is 'observant' is good at noticing details around them.</a:t>
+              <a:t>3.  The suffix '-ation' in 'observation' means 'the person who'.</a:t>
             </a:r>
             <a:endParaRPr lang="en-US" sz="1300" dirty="0"/>
           </a:p>
@@ -38979,11 +40062,11 @@
             </a:avLst>
           </a:prstGeom>
           <a:solidFill>
-            <a:srgbClr val="DCFCE7"/>
-          </a:solidFill>
-          <a:ln w="12700">
-            <a:solidFill>
-              <a:srgbClr val="16A34A"/>
+            <a:srgbClr val="FEE2E2"/>
+          </a:solidFill>
+          <a:ln w="12700">
+            <a:solidFill>
+              <a:srgbClr val="DC2626"/>
             </a:solidFill>
             <a:prstDash val="solid"/>
           </a:ln>
@@ -39016,13 +40099,13 @@
             <a:r>
               <a:rPr lang="en-US" sz="1100" b="1" dirty="0">
                 <a:solidFill>
-                  <a:srgbClr val="16A34A"/>
+                  <a:srgbClr val="DC2626"/>
                 </a:solidFill>
                 <a:latin typeface="Trebuchet MS" pitchFamily="34" charset="0"/>
                 <a:ea typeface="Trebuchet MS" pitchFamily="34" charset="-122"/>
                 <a:cs typeface="Trebuchet MS" pitchFamily="34" charset="-120"/>
               </a:rPr>
-              <a:t>TRUE</a:t>
+              <a:t>FALSE</a:t>
             </a:r>
             <a:endParaRPr lang="en-US" sz="1100" dirty="0"/>
           </a:p>
@@ -39095,7 +40178,7 @@
                 <a:ea typeface="Calibri" pitchFamily="34" charset="-122"/>
                 <a:cs typeface="Calibri" pitchFamily="34" charset="-120"/>
               </a:rPr>
-              <a:t>4.  The word 'observation' contains the root 'observe'.</a:t>
+              <a:t>4.  Adding the prefix 'un' to 'observant' makes a word meaning not noticing things well.</a:t>
             </a:r>
             <a:endParaRPr lang="en-US" sz="1300" dirty="0"/>
           </a:p>
@@ -39234,7 +40317,7 @@
                 <a:ea typeface="Calibri" pitchFamily="34" charset="-122"/>
                 <a:cs typeface="Calibri" pitchFamily="34" charset="-120"/>
               </a:rPr>
-              <a:t>5.  The word 'unobserved' means someone was definitely seen by others.</a:t>
+              <a:t>5.  An observatory is a place where people carefully watch and study the stars.</a:t>
             </a:r>
             <a:endParaRPr lang="en-US" sz="1300" dirty="0"/>
           </a:p>
@@ -39257,11 +40340,11 @@
             </a:avLst>
           </a:prstGeom>
           <a:solidFill>
-            <a:srgbClr val="FEE2E2"/>
-          </a:solidFill>
-          <a:ln w="12700">
-            <a:solidFill>
-              <a:srgbClr val="DC2626"/>
+            <a:srgbClr val="DCFCE7"/>
+          </a:solidFill>
+          <a:ln w="12700">
+            <a:solidFill>
+              <a:srgbClr val="16A34A"/>
             </a:solidFill>
             <a:prstDash val="solid"/>
           </a:ln>
@@ -39294,13 +40377,13 @@
             <a:r>
               <a:rPr lang="en-US" sz="1100" b="1" dirty="0">
                 <a:solidFill>
-                  <a:srgbClr val="DC2626"/>
+                  <a:srgbClr val="16A34A"/>
                 </a:solidFill>
                 <a:latin typeface="Trebuchet MS" pitchFamily="34" charset="0"/>
                 <a:ea typeface="Trebuchet MS" pitchFamily="34" charset="-122"/>
                 <a:cs typeface="Trebuchet MS" pitchFamily="34" charset="-120"/>
               </a:rPr>
-              <a:t>FALSE</a:t>
+              <a:t>TRUE</a:t>
             </a:r>
             <a:endParaRPr lang="en-US" sz="1100" dirty="0"/>
           </a:p>
@@ -40071,7 +41154,7 @@
                 <a:ea typeface="Trebuchet MS" pitchFamily="34" charset="-122"/>
                 <a:cs typeface="Trebuchet MS" pitchFamily="34" charset="-120"/>
               </a:rPr>
-              <a:t>observatory</a:t>
+              <a:t>observing</a:t>
             </a:r>
             <a:endParaRPr lang="en-US" sz="1300" dirty="0"/>
           </a:p>
@@ -40137,7 +41220,7 @@
                 <a:ea typeface="Trebuchet MS" pitchFamily="34" charset="-122"/>
                 <a:cs typeface="Trebuchet MS" pitchFamily="34" charset="-120"/>
               </a:rPr>
-              <a:t>observant</a:t>
+              <a:t>observable</a:t>
             </a:r>
             <a:endParaRPr lang="en-US" sz="1300" dirty="0"/>
           </a:p>
@@ -40203,7 +41286,7 @@
                 <a:ea typeface="Trebuchet MS" pitchFamily="34" charset="-122"/>
                 <a:cs typeface="Trebuchet MS" pitchFamily="34" charset="-120"/>
               </a:rPr>
-              <a:t>observance</a:t>
+              <a:t>observant</a:t>
             </a:r>
             <a:endParaRPr lang="en-US" sz="1300" dirty="0"/>
           </a:p>
@@ -40269,7 +41352,7 @@
                 <a:ea typeface="Trebuchet MS" pitchFamily="34" charset="-122"/>
                 <a:cs typeface="Trebuchet MS" pitchFamily="34" charset="-120"/>
               </a:rPr>
-              <a:t>observed</a:t>
+              <a:t>observatory</a:t>
             </a:r>
             <a:endParaRPr lang="en-US" sz="1300" dirty="0"/>
           </a:p>
@@ -41296,7 +42379,7 @@
                 <a:ea typeface="Trebuchet MS" pitchFamily="34" charset="-122"/>
                 <a:cs typeface="Trebuchet MS" pitchFamily="34" charset="-120"/>
               </a:rPr>
-              <a:t>-ance</a:t>
+              <a:t>-ing</a:t>
             </a:r>
             <a:endParaRPr lang="en-US" sz="1300" dirty="0"/>
           </a:p>
@@ -41360,7 +42443,7 @@
                 <a:ea typeface="Trebuchet MS" pitchFamily="34" charset="-122"/>
                 <a:cs typeface="Trebuchet MS" pitchFamily="34" charset="-120"/>
               </a:rPr>
-              <a:t>over-</a:t>
+              <a:t>mis-</a:t>
             </a:r>
             <a:endParaRPr lang="en-US" sz="1300" dirty="0"/>
           </a:p>
@@ -41449,7 +42532,7 @@
                 <a:ea typeface="Trebuchet MS" pitchFamily="34" charset="-122"/>
                 <a:cs typeface="Trebuchet MS" pitchFamily="34" charset="-120"/>
               </a:rPr>
-              <a:t>-atory</a:t>
+              <a:t>-ed</a:t>
             </a:r>
             <a:endParaRPr lang="en-US" sz="1300" dirty="0"/>
           </a:p>
@@ -41513,7 +42596,7 @@
                 <a:ea typeface="Trebuchet MS" pitchFamily="34" charset="-122"/>
                 <a:cs typeface="Trebuchet MS" pitchFamily="34" charset="-120"/>
               </a:rPr>
-              <a:t>mis-</a:t>
+              <a:t>over-</a:t>
             </a:r>
             <a:endParaRPr lang="en-US" sz="1300" dirty="0"/>
           </a:p>
@@ -41602,7 +42685,7 @@
                 <a:ea typeface="Trebuchet MS" pitchFamily="34" charset="-122"/>
                 <a:cs typeface="Trebuchet MS" pitchFamily="34" charset="-120"/>
               </a:rPr>
-              <a:t>-ed</a:t>
+              <a:t>-able</a:t>
             </a:r>
             <a:endParaRPr lang="en-US" sz="1300" dirty="0"/>
           </a:p>
@@ -42513,7 +43596,7 @@
                 <a:ea typeface="Calibri" pitchFamily="34" charset="-122"/>
                 <a:cs typeface="Calibri" pitchFamily="34" charset="-120"/>
               </a:rPr>
-              <a:t>Watched carefully or noticed something in the past.</a:t>
+              <a:t>A special building with telescopes used to study the sky and stars.</a:t>
             </a:r>
             <a:endParaRPr lang="en-US" sz="1200" dirty="0"/>
           </a:p>
@@ -42652,7 +43735,7 @@
                 <a:ea typeface="Calibri" pitchFamily="34" charset="-122"/>
                 <a:cs typeface="Calibri" pitchFamily="34" charset="-120"/>
               </a:rPr>
-              <a:t>A special building with telescopes used to watch the stars and sky.</a:t>
+              <a:t>Currently watching and paying careful attention to something.</a:t>
             </a:r>
             <a:endParaRPr lang="en-US" sz="1200" dirty="0"/>
           </a:p>
@@ -42791,7 +43874,7 @@
                 <a:ea typeface="Calibri" pitchFamily="34" charset="-122"/>
                 <a:cs typeface="Calibri" pitchFamily="34" charset="-120"/>
               </a:rPr>
-              <a:t>The act of following or keeping a rule, custom, or tradition.</a:t>
+              <a:t>Quick to notice things; good at paying attention to detail.</a:t>
             </a:r>
             <a:endParaRPr lang="en-US" sz="1200" dirty="0"/>
           </a:p>
@@ -42864,7 +43947,7 @@
                 <a:ea typeface="Trebuchet MS" pitchFamily="34" charset="-122"/>
                 <a:cs typeface="Trebuchet MS" pitchFamily="34" charset="-120"/>
               </a:rPr>
-              <a:t>observatory</a:t>
+              <a:t>observing</a:t>
             </a:r>
             <a:endParaRPr lang="en-US" sz="1200" dirty="0"/>
           </a:p>
@@ -43003,7 +44086,7 @@
                 <a:ea typeface="Trebuchet MS" pitchFamily="34" charset="-122"/>
                 <a:cs typeface="Trebuchet MS" pitchFamily="34" charset="-120"/>
               </a:rPr>
-              <a:t>observant</a:t>
+              <a:t>observable</a:t>
             </a:r>
             <a:endParaRPr lang="en-US" sz="1200" dirty="0"/>
           </a:p>
@@ -43069,7 +44152,7 @@
                 <a:ea typeface="Calibri" pitchFamily="34" charset="-122"/>
                 <a:cs typeface="Calibri" pitchFamily="34" charset="-120"/>
               </a:rPr>
-              <a:t>Good at noticing things around you.</a:t>
+              <a:t>Something that can be seen or noticed.</a:t>
             </a:r>
             <a:endParaRPr lang="en-US" sz="1200" dirty="0"/>
           </a:p>
@@ -43142,7 +44225,7 @@
                 <a:ea typeface="Trebuchet MS" pitchFamily="34" charset="-122"/>
                 <a:cs typeface="Trebuchet MS" pitchFamily="34" charset="-120"/>
               </a:rPr>
-              <a:t>observance</a:t>
+              <a:t>observant</a:t>
             </a:r>
             <a:endParaRPr lang="en-US" sz="1200" dirty="0"/>
           </a:p>
@@ -43208,7 +44291,7 @@
                 <a:ea typeface="Calibri" pitchFamily="34" charset="-122"/>
                 <a:cs typeface="Calibri" pitchFamily="34" charset="-120"/>
               </a:rPr>
-              <a:t>The act of watching something carefully and noticing details.</a:t>
+              <a:t>The act of watching something closely to learn about it.</a:t>
             </a:r>
             <a:endParaRPr lang="en-US" sz="1200" dirty="0"/>
           </a:p>
@@ -43281,7 +44364,7 @@
                 <a:ea typeface="Trebuchet MS" pitchFamily="34" charset="-122"/>
                 <a:cs typeface="Trebuchet MS" pitchFamily="34" charset="-120"/>
               </a:rPr>
-              <a:t>observed</a:t>
+              <a:t>observatory</a:t>
             </a:r>
             <a:endParaRPr lang="en-US" sz="1200" dirty="0"/>
           </a:p>
@@ -43347,7 +44430,7 @@
                 <a:ea typeface="Calibri" pitchFamily="34" charset="-122"/>
                 <a:cs typeface="Calibri" pitchFamily="34" charset="-120"/>
               </a:rPr>
-              <a:t>A person who watches and notices what is happening.</a:t>
+              <a:t>A person who watches and notices things carefully.</a:t>
             </a:r>
             <a:endParaRPr lang="en-US" sz="1200" dirty="0"/>
           </a:p>
@@ -43842,7 +44925,7 @@
                 <a:ea typeface="Calibri" pitchFamily="34" charset="-122"/>
                 <a:cs typeface="Calibri" pitchFamily="34" charset="-120"/>
               </a:rPr>
-              <a:t>The scientist made a careful observation of the insects living under the log.</a:t>
+              <a:t>The scientist used a magnifying glass to observe the tiny insects crawling across the leaf.</a:t>
             </a:r>
             <a:endParaRPr lang="en-US" sz="1500" dirty="0"/>
           </a:p>
@@ -44006,7 +45089,7 @@
                 <a:ea typeface="Calibri" pitchFamily="34" charset="-122"/>
                 <a:cs typeface="Calibri" pitchFamily="34" charset="-120"/>
               </a:rPr>
-              <a:t>Our class visited the observatory on the hill to look at the planets through a telescope.</a:t>
+              <a:t>After careful observation, the students were able to record exactly how the plant had changed over the week.</a:t>
             </a:r>
             <a:endParaRPr lang="en-US" sz="1500" dirty="0"/>
           </a:p>
@@ -44170,7 +45253,7 @@
                 <a:ea typeface="Calibri" pitchFamily="34" charset="-122"/>
                 <a:cs typeface="Calibri" pitchFamily="34" charset="-120"/>
               </a:rPr>
-              <a:t>Jake was very observant and noticed the tiny spider hiding in the corner of the window.</a:t>
+              <a:t>A good observer notices small details that other people might easily miss.</a:t>
             </a:r>
             <a:endParaRPr lang="en-US" sz="1500" dirty="0"/>
           </a:p>
